--- a/Elevate-Vision-2027.pptx
+++ b/Elevate-Vision-2027.pptx
@@ -115,47 +115,47 @@
   <p:extLst>
     <p:ext uri="{521415D9-36F7-43E2-AB2F-B90AF26B5E84}">
       <p14:sectionLst xmlns:p14="http://schemas.microsoft.com/office/powerpoint/2010/main">
-        <p14:section name="Opening" id="{4a08fa21-c996-7ea3-2372-0aac8417e300}">
+        <p14:section name="Opening" id="{b1933991-12ed-8ec3-8137-8b40d45c997a}">
           <p14:sldIdLst>
             <p14:sldId id="256"/>
           </p14:sldIdLst>
         </p14:section>
-        <p14:section name="Vision" id="{3cb5208f-1db1-4536-400d-8f76f1b71155}">
+        <p14:section name="Vision" id="{45485ebd-ea18-a173-9d0e-214f3dc87c9a}">
           <p14:sldIdLst>
             <p14:sldId id="257"/>
           </p14:sldIdLst>
         </p14:section>
-        <p14:section name="Metrics" id="{d2ce6c68-e475-e397-5f1d-022d33018ab5}">
+        <p14:section name="Metrics" id="{3a1733c3-3a1c-fdc1-81b1-4feea41fa72a}">
           <p14:sldIdLst>
             <p14:sldId id="258"/>
           </p14:sldIdLst>
         </p14:section>
-        <p14:section name="Market" id="{4c9a1dde-83e4-de8e-db8d-8be19fe56444}">
+        <p14:section name="Market" id="{46739440-883c-6924-9c46-77b914be32c5}">
           <p14:sldIdLst>
             <p14:sldId id="259"/>
           </p14:sldIdLst>
         </p14:section>
-        <p14:section name="Strategy" id="{be67cab8-3a62-961b-50a1-15bf6f33d40f}">
+        <p14:section name="Strategy" id="{04eeda06-1e4a-119b-261e-2842d0014de5}">
           <p14:sldIdLst>
             <p14:sldId id="260"/>
           </p14:sldIdLst>
         </p14:section>
-        <p14:section name="Roadmap" id="{244a3965-c45e-6c90-1b85-3a7bef2ee4b1}">
+        <p14:section name="Roadmap" id="{f9986d98-a67f-b78d-99a3-ddbe932d6b16}">
           <p14:sldIdLst>
             <p14:sldId id="261"/>
           </p14:sldIdLst>
         </p14:section>
-        <p14:section name="Results" id="{24c9f141-2fef-4a9a-dda4-720a8b007c93}">
+        <p14:section name="Results" id="{9c2b5db6-4075-3c4c-5eef-287d170ea51a}">
           <p14:sldIdLst>
             <p14:sldId id="262"/>
           </p14:sldIdLst>
         </p14:section>
-        <p14:section name="Next Steps" id="{4822d462-b948-eb4c-4367-8b1d7b25d9a0}">
+        <p14:section name="Next Steps" id="{0b0a23eb-0dbf-0625-6048-288309f2eadc}">
           <p14:sldIdLst>
             <p14:sldId id="263"/>
           </p14:sldIdLst>
         </p14:section>
-        <p14:section name="Close" id="{ec45520c-a332-f379-8771-7548dd1b7bff}">
+        <p14:section name="Close" id="{d239fdc5-4093-6c46-ece3-d53949d2fb3b}">
           <p14:sldIdLst>
             <p14:sldId id="264"/>
           </p14:sldIdLst>
@@ -2546,7 +2546,7 @@
       </p:sp>
       <p:sp>
         <p:nvSpPr>
-          <p:cNvPr id="6" name="Text 4"/>
+          <p:cNvPr id="6" name="c1-1"/>
           <p:cNvSpPr txBox="1"/>
           <p:nvPr/>
         </p:nvSpPr>
@@ -2582,7 +2582,7 @@
       </p:sp>
       <p:sp>
         <p:nvSpPr>
-          <p:cNvPr id="7" name="Text 5"/>
+          <p:cNvPr id="7" name="c1-2"/>
           <p:cNvSpPr txBox="1"/>
           <p:nvPr/>
         </p:nvSpPr>
@@ -2618,7 +2618,7 @@
       </p:sp>
       <p:sp>
         <p:nvSpPr>
-          <p:cNvPr id="8" name="Text 6"/>
+          <p:cNvPr id="8" name="c2-3"/>
           <p:cNvSpPr txBox="1"/>
           <p:nvPr/>
         </p:nvSpPr>
@@ -2654,7 +2654,7 @@
       </p:sp>
       <p:sp>
         <p:nvSpPr>
-          <p:cNvPr id="9" name="Shape 7"/>
+          <p:cNvPr id="9" name="c2-4bg"/>
           <p:cNvSpPr/>
           <p:nvPr/>
         </p:nvSpPr>
@@ -2676,7 +2676,7 @@
       </p:sp>
       <p:pic>
         <p:nvPicPr>
-          <p:cNvPr id="10" name="Image 0" descr="preencoded.png">    </p:cNvPr>
+          <p:cNvPr id="10" name="c2-4ic" descr="preencoded.png">    </p:cNvPr>
           <p:cNvPicPr>
             <a:picLocks noChangeAspect="1"/>
           </p:cNvPicPr>
@@ -2700,7 +2700,7 @@
       </p:pic>
       <p:sp>
         <p:nvSpPr>
-          <p:cNvPr id="11" name="Text 8"/>
+          <p:cNvPr id="11" name="c2-5"/>
           <p:cNvSpPr txBox="1"/>
           <p:nvPr/>
         </p:nvSpPr>
@@ -2784,6 +2784,326 @@
   <p:clrMapOvr>
     <a:masterClrMapping/>
   </p:clrMapOvr>
+  <p:timing>
+    <p:tnLst>
+      <p:par>
+        <p:cTn id="1" dur="indefinite" restart="never" nodeType="tmRoot">
+          <p:childTnLst>
+            <p:seq concurrent="1" nextAc="seek">
+              <p:cTn id="2" dur="indefinite" nodeType="mainSeq">
+                <p:childTnLst>
+                  <p:par>
+                    <p:cTn id="3" fill="hold">
+                      <p:stCondLst>
+                        <p:cond delay="indefinite"/>
+                      </p:stCondLst>
+                      <p:childTnLst>
+                        <p:par>
+                          <p:cTn id="4" fill="hold">
+                            <p:stCondLst>
+                              <p:cond delay="0"/>
+                            </p:stCondLst>
+                            <p:childTnLst>
+                              <p:par>
+                                <p:cTn id="5" presetID="10" presetClass="entr" presetSubtype="0" fill="hold" grpId="0" nodeType="clickEffect">
+                                  <p:stCondLst>
+                                    <p:cond delay="0"/>
+                                  </p:stCondLst>
+                                  <p:childTnLst>
+                                    <p:set>
+                                      <p:cBhvr>
+                                        <p:cTn id="6" dur="1" fill="hold">
+                                          <p:stCondLst>
+                                            <p:cond delay="0"/>
+                                          </p:stCondLst>
+                                        </p:cTn>
+                                        <p:tgtEl>
+                                          <p:spTgt spid="6"/>
+                                        </p:tgtEl>
+                                        <p:attrNameLst>
+                                          <p:attrName>style.visibility</p:attrName>
+                                        </p:attrNameLst>
+                                      </p:cBhvr>
+                                      <p:to>
+                                        <p:strVal val="visible"/>
+                                      </p:to>
+                                    </p:set>
+                                    <p:animEffect transition="in" filter="fade">
+                                      <p:cBhvr>
+                                        <p:cTn id="7" dur="500"/>
+                                        <p:tgtEl>
+                                          <p:spTgt spid="6"/>
+                                        </p:tgtEl>
+                                      </p:cBhvr>
+                                    </p:animEffect>
+                                  </p:childTnLst>
+                                </p:cTn>
+                              </p:par>
+                            </p:childTnLst>
+                          </p:cTn>
+                        </p:par>
+                        <p:par>
+                          <p:cTn id="8" fill="hold">
+                            <p:stCondLst>
+                              <p:cond delay="0"/>
+                            </p:stCondLst>
+                            <p:childTnLst>
+                              <p:par>
+                                <p:cTn id="9" presetID="10" presetClass="entr" presetSubtype="0" fill="hold" grpId="0" nodeType="withEffect">
+                                  <p:stCondLst>
+                                    <p:cond delay="0"/>
+                                  </p:stCondLst>
+                                  <p:childTnLst>
+                                    <p:set>
+                                      <p:cBhvr>
+                                        <p:cTn id="10" dur="1" fill="hold">
+                                          <p:stCondLst>
+                                            <p:cond delay="0"/>
+                                          </p:stCondLst>
+                                        </p:cTn>
+                                        <p:tgtEl>
+                                          <p:spTgt spid="7"/>
+                                        </p:tgtEl>
+                                        <p:attrNameLst>
+                                          <p:attrName>style.visibility</p:attrName>
+                                        </p:attrNameLst>
+                                      </p:cBhvr>
+                                      <p:to>
+                                        <p:strVal val="visible"/>
+                                      </p:to>
+                                    </p:set>
+                                    <p:animEffect transition="in" filter="fade">
+                                      <p:cBhvr>
+                                        <p:cTn id="11" dur="500"/>
+                                        <p:tgtEl>
+                                          <p:spTgt spid="7"/>
+                                        </p:tgtEl>
+                                      </p:cBhvr>
+                                    </p:animEffect>
+                                  </p:childTnLst>
+                                </p:cTn>
+                              </p:par>
+                            </p:childTnLst>
+                          </p:cTn>
+                        </p:par>
+                      </p:childTnLst>
+                    </p:cTn>
+                  </p:par>
+                  <p:par>
+                    <p:cTn id="12" fill="hold">
+                      <p:stCondLst>
+                        <p:cond delay="indefinite"/>
+                      </p:stCondLst>
+                      <p:childTnLst>
+                        <p:par>
+                          <p:cTn id="13" fill="hold">
+                            <p:stCondLst>
+                              <p:cond delay="0"/>
+                            </p:stCondLst>
+                            <p:childTnLst>
+                              <p:par>
+                                <p:cTn id="14" presetID="10" presetClass="entr" presetSubtype="0" fill="hold" grpId="0" nodeType="clickEffect">
+                                  <p:stCondLst>
+                                    <p:cond delay="0"/>
+                                  </p:stCondLst>
+                                  <p:childTnLst>
+                                    <p:set>
+                                      <p:cBhvr>
+                                        <p:cTn id="15" dur="1" fill="hold">
+                                          <p:stCondLst>
+                                            <p:cond delay="0"/>
+                                          </p:stCondLst>
+                                        </p:cTn>
+                                        <p:tgtEl>
+                                          <p:spTgt spid="8"/>
+                                        </p:tgtEl>
+                                        <p:attrNameLst>
+                                          <p:attrName>style.visibility</p:attrName>
+                                        </p:attrNameLst>
+                                      </p:cBhvr>
+                                      <p:to>
+                                        <p:strVal val="visible"/>
+                                      </p:to>
+                                    </p:set>
+                                    <p:animEffect transition="in" filter="fade">
+                                      <p:cBhvr>
+                                        <p:cTn id="16" dur="500"/>
+                                        <p:tgtEl>
+                                          <p:spTgt spid="8"/>
+                                        </p:tgtEl>
+                                      </p:cBhvr>
+                                    </p:animEffect>
+                                  </p:childTnLst>
+                                </p:cTn>
+                              </p:par>
+                            </p:childTnLst>
+                          </p:cTn>
+                        </p:par>
+                        <p:par>
+                          <p:cTn id="17" fill="hold">
+                            <p:stCondLst>
+                              <p:cond delay="0"/>
+                            </p:stCondLst>
+                            <p:childTnLst>
+                              <p:par>
+                                <p:cTn id="18" presetID="10" presetClass="entr" presetSubtype="0" fill="hold" grpId="0" nodeType="withEffect">
+                                  <p:stCondLst>
+                                    <p:cond delay="0"/>
+                                  </p:stCondLst>
+                                  <p:childTnLst>
+                                    <p:set>
+                                      <p:cBhvr>
+                                        <p:cTn id="19" dur="1" fill="hold">
+                                          <p:stCondLst>
+                                            <p:cond delay="0"/>
+                                          </p:stCondLst>
+                                        </p:cTn>
+                                        <p:tgtEl>
+                                          <p:spTgt spid="9"/>
+                                        </p:tgtEl>
+                                        <p:attrNameLst>
+                                          <p:attrName>style.visibility</p:attrName>
+                                        </p:attrNameLst>
+                                      </p:cBhvr>
+                                      <p:to>
+                                        <p:strVal val="visible"/>
+                                      </p:to>
+                                    </p:set>
+                                    <p:animEffect transition="in" filter="fade">
+                                      <p:cBhvr>
+                                        <p:cTn id="20" dur="500"/>
+                                        <p:tgtEl>
+                                          <p:spTgt spid="9"/>
+                                        </p:tgtEl>
+                                      </p:cBhvr>
+                                    </p:animEffect>
+                                  </p:childTnLst>
+                                </p:cTn>
+                              </p:par>
+                            </p:childTnLst>
+                          </p:cTn>
+                        </p:par>
+                        <p:par>
+                          <p:cTn id="21" fill="hold">
+                            <p:stCondLst>
+                              <p:cond delay="0"/>
+                            </p:stCondLst>
+                            <p:childTnLst>
+                              <p:par>
+                                <p:cTn id="22" presetID="10" presetClass="entr" presetSubtype="0" fill="hold" grpId="0" nodeType="withEffect">
+                                  <p:stCondLst>
+                                    <p:cond delay="0"/>
+                                  </p:stCondLst>
+                                  <p:childTnLst>
+                                    <p:set>
+                                      <p:cBhvr>
+                                        <p:cTn id="23" dur="1" fill="hold">
+                                          <p:stCondLst>
+                                            <p:cond delay="0"/>
+                                          </p:stCondLst>
+                                        </p:cTn>
+                                        <p:tgtEl>
+                                          <p:spTgt spid="11"/>
+                                        </p:tgtEl>
+                                        <p:attrNameLst>
+                                          <p:attrName>style.visibility</p:attrName>
+                                        </p:attrNameLst>
+                                      </p:cBhvr>
+                                      <p:to>
+                                        <p:strVal val="visible"/>
+                                      </p:to>
+                                    </p:set>
+                                    <p:animEffect transition="in" filter="fade">
+                                      <p:cBhvr>
+                                        <p:cTn id="24" dur="500"/>
+                                        <p:tgtEl>
+                                          <p:spTgt spid="11"/>
+                                        </p:tgtEl>
+                                      </p:cBhvr>
+                                    </p:animEffect>
+                                  </p:childTnLst>
+                                </p:cTn>
+                              </p:par>
+                            </p:childTnLst>
+                          </p:cTn>
+                        </p:par>
+                        <p:par>
+                          <p:cTn id="25" fill="hold">
+                            <p:stCondLst>
+                              <p:cond delay="0"/>
+                            </p:stCondLst>
+                            <p:childTnLst>
+                              <p:par>
+                                <p:cTn id="26" presetID="10" presetClass="entr" presetSubtype="0" fill="hold" grpId="0" nodeType="withEffect">
+                                  <p:stCondLst>
+                                    <p:cond delay="0"/>
+                                  </p:stCondLst>
+                                  <p:childTnLst>
+                                    <p:set>
+                                      <p:cBhvr>
+                                        <p:cTn id="27" dur="1" fill="hold">
+                                          <p:stCondLst>
+                                            <p:cond delay="0"/>
+                                          </p:stCondLst>
+                                        </p:cTn>
+                                        <p:tgtEl>
+                                          <p:spTgt spid="10"/>
+                                        </p:tgtEl>
+                                        <p:attrNameLst>
+                                          <p:attrName>style.visibility</p:attrName>
+                                        </p:attrNameLst>
+                                      </p:cBhvr>
+                                      <p:to>
+                                        <p:strVal val="visible"/>
+                                      </p:to>
+                                    </p:set>
+                                    <p:animEffect transition="in" filter="fade">
+                                      <p:cBhvr>
+                                        <p:cTn id="28" dur="500"/>
+                                        <p:tgtEl>
+                                          <p:spTgt spid="10"/>
+                                        </p:tgtEl>
+                                      </p:cBhvr>
+                                    </p:animEffect>
+                                  </p:childTnLst>
+                                </p:cTn>
+                              </p:par>
+                            </p:childTnLst>
+                          </p:cTn>
+                        </p:par>
+                      </p:childTnLst>
+                    </p:cTn>
+                  </p:par>
+                </p:childTnLst>
+              </p:cTn>
+              <p:prevCondLst>
+                <p:cond evt="onPrev" delay="0">
+                  <p:tgtEl>
+                    <p:sldTgt/>
+                  </p:tgtEl>
+                </p:cond>
+              </p:prevCondLst>
+              <p:nextCondLst>
+                <p:cond evt="onNext" delay="0">
+                  <p:tgtEl>
+                    <p:sldTgt/>
+                  </p:tgtEl>
+                </p:cond>
+              </p:nextCondLst>
+            </p:seq>
+          </p:childTnLst>
+        </p:cTn>
+      </p:par>
+    </p:tnLst>
+    <p:bldLst>
+      <p:bldP spid="6" grpId="0"/>
+      <p:bldP spid="7" grpId="0"/>
+      <p:bldP spid="8" grpId="0"/>
+      <p:bldP spid="9" grpId="0"/>
+      <p:bldP spid="11" grpId="0"/>
+      <p:bldP spid="10" grpId="0"/>
+    </p:bldLst>
+  </p:timing>
 </p:sld>
 </file>
 
@@ -2806,7 +3126,7 @@
       </p:grpSpPr>
       <p:sp>
         <p:nvSpPr>
-          <p:cNvPr id="2" name="Text 0"/>
+          <p:cNvPr id="2" name="c1-1"/>
           <p:cNvSpPr txBox="1"/>
           <p:nvPr/>
         </p:nvSpPr>
@@ -2842,7 +3162,7 @@
       </p:sp>
       <p:sp>
         <p:nvSpPr>
-          <p:cNvPr id="3" name="Text 1"/>
+          <p:cNvPr id="3" name="c1-2"/>
           <p:cNvSpPr txBox="1"/>
           <p:nvPr/>
         </p:nvSpPr>
@@ -2881,7 +3201,7 @@
       </p:sp>
       <p:sp>
         <p:nvSpPr>
-          <p:cNvPr id="4" name="Shape 2"/>
+          <p:cNvPr id="4" name="c2-3"/>
           <p:cNvSpPr/>
           <p:nvPr/>
         </p:nvSpPr>
@@ -2910,7 +3230,7 @@
       </p:sp>
       <p:sp>
         <p:nvSpPr>
-          <p:cNvPr id="5" name="Shape 3"/>
+          <p:cNvPr id="5" name="c2-4bg"/>
           <p:cNvSpPr/>
           <p:nvPr/>
         </p:nvSpPr>
@@ -2932,7 +3252,7 @@
       </p:sp>
       <p:pic>
         <p:nvPicPr>
-          <p:cNvPr id="6" name="Image 0" descr="preencoded.png">    </p:cNvPr>
+          <p:cNvPr id="6" name="c2-4ic" descr="preencoded.png">    </p:cNvPr>
           <p:cNvPicPr>
             <a:picLocks noChangeAspect="1"/>
           </p:cNvPicPr>
@@ -2956,7 +3276,7 @@
       </p:pic>
       <p:sp>
         <p:nvSpPr>
-          <p:cNvPr id="7" name="Text 4"/>
+          <p:cNvPr id="7" name="c2-5"/>
           <p:cNvSpPr txBox="1"/>
           <p:nvPr/>
         </p:nvSpPr>
@@ -2992,7 +3312,7 @@
       </p:sp>
       <p:sp>
         <p:nvSpPr>
-          <p:cNvPr id="8" name="Text 5"/>
+          <p:cNvPr id="8" name="c2-6"/>
           <p:cNvSpPr txBox="1"/>
           <p:nvPr/>
         </p:nvSpPr>
@@ -3031,7 +3351,7 @@
       </p:sp>
       <p:sp>
         <p:nvSpPr>
-          <p:cNvPr id="9" name="Shape 6"/>
+          <p:cNvPr id="9" name="c3-7"/>
           <p:cNvSpPr/>
           <p:nvPr/>
         </p:nvSpPr>
@@ -3060,7 +3380,7 @@
       </p:sp>
       <p:sp>
         <p:nvSpPr>
-          <p:cNvPr id="10" name="Shape 7"/>
+          <p:cNvPr id="10" name="c3-8bg"/>
           <p:cNvSpPr/>
           <p:nvPr/>
         </p:nvSpPr>
@@ -3082,7 +3402,7 @@
       </p:sp>
       <p:pic>
         <p:nvPicPr>
-          <p:cNvPr id="11" name="Image 1" descr="preencoded.png">    </p:cNvPr>
+          <p:cNvPr id="11" name="c3-8ic" descr="preencoded.png">    </p:cNvPr>
           <p:cNvPicPr>
             <a:picLocks noChangeAspect="1"/>
           </p:cNvPicPr>
@@ -3106,7 +3426,7 @@
       </p:pic>
       <p:sp>
         <p:nvSpPr>
-          <p:cNvPr id="12" name="Text 8"/>
+          <p:cNvPr id="12" name="c3-9"/>
           <p:cNvSpPr txBox="1"/>
           <p:nvPr/>
         </p:nvSpPr>
@@ -3142,7 +3462,7 @@
       </p:sp>
       <p:sp>
         <p:nvSpPr>
-          <p:cNvPr id="13" name="Text 9"/>
+          <p:cNvPr id="13" name="c3-10"/>
           <p:cNvSpPr txBox="1"/>
           <p:nvPr/>
         </p:nvSpPr>
@@ -3181,7 +3501,7 @@
       </p:sp>
       <p:sp>
         <p:nvSpPr>
-          <p:cNvPr id="14" name="Shape 10"/>
+          <p:cNvPr id="14" name="c4-11"/>
           <p:cNvSpPr/>
           <p:nvPr/>
         </p:nvSpPr>
@@ -3210,7 +3530,7 @@
       </p:sp>
       <p:sp>
         <p:nvSpPr>
-          <p:cNvPr id="15" name="Shape 11"/>
+          <p:cNvPr id="15" name="c4-12bg"/>
           <p:cNvSpPr/>
           <p:nvPr/>
         </p:nvSpPr>
@@ -3232,7 +3552,7 @@
       </p:sp>
       <p:pic>
         <p:nvPicPr>
-          <p:cNvPr id="16" name="Image 2" descr="preencoded.png">    </p:cNvPr>
+          <p:cNvPr id="16" name="c4-12ic" descr="preencoded.png">    </p:cNvPr>
           <p:cNvPicPr>
             <a:picLocks noChangeAspect="1"/>
           </p:cNvPicPr>
@@ -3256,7 +3576,7 @@
       </p:pic>
       <p:sp>
         <p:nvSpPr>
-          <p:cNvPr id="17" name="Text 12"/>
+          <p:cNvPr id="17" name="c4-13"/>
           <p:cNvSpPr txBox="1"/>
           <p:nvPr/>
         </p:nvSpPr>
@@ -3292,7 +3612,7 @@
       </p:sp>
       <p:sp>
         <p:nvSpPr>
-          <p:cNvPr id="18" name="Text 13"/>
+          <p:cNvPr id="18" name="c4-14"/>
           <p:cNvSpPr txBox="1"/>
           <p:nvPr/>
         </p:nvSpPr>
@@ -3379,6 +3699,839 @@
   <p:clrMapOvr>
     <a:masterClrMapping/>
   </p:clrMapOvr>
+  <p:timing>
+    <p:tnLst>
+      <p:par>
+        <p:cTn id="1" dur="indefinite" restart="never" nodeType="tmRoot">
+          <p:childTnLst>
+            <p:seq concurrent="1" nextAc="seek">
+              <p:cTn id="2" dur="indefinite" nodeType="mainSeq">
+                <p:childTnLst>
+                  <p:par>
+                    <p:cTn id="3" fill="hold">
+                      <p:stCondLst>
+                        <p:cond delay="indefinite"/>
+                      </p:stCondLst>
+                      <p:childTnLst>
+                        <p:par>
+                          <p:cTn id="4" fill="hold">
+                            <p:stCondLst>
+                              <p:cond delay="0"/>
+                            </p:stCondLst>
+                            <p:childTnLst>
+                              <p:par>
+                                <p:cTn id="5" presetID="10" presetClass="entr" presetSubtype="0" fill="hold" grpId="0" nodeType="clickEffect">
+                                  <p:stCondLst>
+                                    <p:cond delay="0"/>
+                                  </p:stCondLst>
+                                  <p:childTnLst>
+                                    <p:set>
+                                      <p:cBhvr>
+                                        <p:cTn id="6" dur="1" fill="hold">
+                                          <p:stCondLst>
+                                            <p:cond delay="0"/>
+                                          </p:stCondLst>
+                                        </p:cTn>
+                                        <p:tgtEl>
+                                          <p:spTgt spid="2"/>
+                                        </p:tgtEl>
+                                        <p:attrNameLst>
+                                          <p:attrName>style.visibility</p:attrName>
+                                        </p:attrNameLst>
+                                      </p:cBhvr>
+                                      <p:to>
+                                        <p:strVal val="visible"/>
+                                      </p:to>
+                                    </p:set>
+                                    <p:animEffect transition="in" filter="fade">
+                                      <p:cBhvr>
+                                        <p:cTn id="7" dur="500"/>
+                                        <p:tgtEl>
+                                          <p:spTgt spid="2"/>
+                                        </p:tgtEl>
+                                      </p:cBhvr>
+                                    </p:animEffect>
+                                  </p:childTnLst>
+                                </p:cTn>
+                              </p:par>
+                            </p:childTnLst>
+                          </p:cTn>
+                        </p:par>
+                        <p:par>
+                          <p:cTn id="8" fill="hold">
+                            <p:stCondLst>
+                              <p:cond delay="0"/>
+                            </p:stCondLst>
+                            <p:childTnLst>
+                              <p:par>
+                                <p:cTn id="9" presetID="10" presetClass="entr" presetSubtype="0" fill="hold" grpId="0" nodeType="withEffect">
+                                  <p:stCondLst>
+                                    <p:cond delay="0"/>
+                                  </p:stCondLst>
+                                  <p:childTnLst>
+                                    <p:set>
+                                      <p:cBhvr>
+                                        <p:cTn id="10" dur="1" fill="hold">
+                                          <p:stCondLst>
+                                            <p:cond delay="0"/>
+                                          </p:stCondLst>
+                                        </p:cTn>
+                                        <p:tgtEl>
+                                          <p:spTgt spid="3"/>
+                                        </p:tgtEl>
+                                        <p:attrNameLst>
+                                          <p:attrName>style.visibility</p:attrName>
+                                        </p:attrNameLst>
+                                      </p:cBhvr>
+                                      <p:to>
+                                        <p:strVal val="visible"/>
+                                      </p:to>
+                                    </p:set>
+                                    <p:animEffect transition="in" filter="fade">
+                                      <p:cBhvr>
+                                        <p:cTn id="11" dur="500"/>
+                                        <p:tgtEl>
+                                          <p:spTgt spid="3"/>
+                                        </p:tgtEl>
+                                      </p:cBhvr>
+                                    </p:animEffect>
+                                  </p:childTnLst>
+                                </p:cTn>
+                              </p:par>
+                            </p:childTnLst>
+                          </p:cTn>
+                        </p:par>
+                      </p:childTnLst>
+                    </p:cTn>
+                  </p:par>
+                  <p:par>
+                    <p:cTn id="12" fill="hold">
+                      <p:stCondLst>
+                        <p:cond delay="indefinite"/>
+                      </p:stCondLst>
+                      <p:childTnLst>
+                        <p:par>
+                          <p:cTn id="13" fill="hold">
+                            <p:stCondLst>
+                              <p:cond delay="0"/>
+                            </p:stCondLst>
+                            <p:childTnLst>
+                              <p:par>
+                                <p:cTn id="14" presetID="10" presetClass="entr" presetSubtype="0" fill="hold" grpId="0" nodeType="clickEffect">
+                                  <p:stCondLst>
+                                    <p:cond delay="0"/>
+                                  </p:stCondLst>
+                                  <p:childTnLst>
+                                    <p:set>
+                                      <p:cBhvr>
+                                        <p:cTn id="15" dur="1" fill="hold">
+                                          <p:stCondLst>
+                                            <p:cond delay="0"/>
+                                          </p:stCondLst>
+                                        </p:cTn>
+                                        <p:tgtEl>
+                                          <p:spTgt spid="4"/>
+                                        </p:tgtEl>
+                                        <p:attrNameLst>
+                                          <p:attrName>style.visibility</p:attrName>
+                                        </p:attrNameLst>
+                                      </p:cBhvr>
+                                      <p:to>
+                                        <p:strVal val="visible"/>
+                                      </p:to>
+                                    </p:set>
+                                    <p:animEffect transition="in" filter="fade">
+                                      <p:cBhvr>
+                                        <p:cTn id="16" dur="500"/>
+                                        <p:tgtEl>
+                                          <p:spTgt spid="4"/>
+                                        </p:tgtEl>
+                                      </p:cBhvr>
+                                    </p:animEffect>
+                                  </p:childTnLst>
+                                </p:cTn>
+                              </p:par>
+                            </p:childTnLst>
+                          </p:cTn>
+                        </p:par>
+                        <p:par>
+                          <p:cTn id="17" fill="hold">
+                            <p:stCondLst>
+                              <p:cond delay="0"/>
+                            </p:stCondLst>
+                            <p:childTnLst>
+                              <p:par>
+                                <p:cTn id="18" presetID="10" presetClass="entr" presetSubtype="0" fill="hold" grpId="0" nodeType="withEffect">
+                                  <p:stCondLst>
+                                    <p:cond delay="0"/>
+                                  </p:stCondLst>
+                                  <p:childTnLst>
+                                    <p:set>
+                                      <p:cBhvr>
+                                        <p:cTn id="19" dur="1" fill="hold">
+                                          <p:stCondLst>
+                                            <p:cond delay="0"/>
+                                          </p:stCondLst>
+                                        </p:cTn>
+                                        <p:tgtEl>
+                                          <p:spTgt spid="5"/>
+                                        </p:tgtEl>
+                                        <p:attrNameLst>
+                                          <p:attrName>style.visibility</p:attrName>
+                                        </p:attrNameLst>
+                                      </p:cBhvr>
+                                      <p:to>
+                                        <p:strVal val="visible"/>
+                                      </p:to>
+                                    </p:set>
+                                    <p:animEffect transition="in" filter="fade">
+                                      <p:cBhvr>
+                                        <p:cTn id="20" dur="500"/>
+                                        <p:tgtEl>
+                                          <p:spTgt spid="5"/>
+                                        </p:tgtEl>
+                                      </p:cBhvr>
+                                    </p:animEffect>
+                                  </p:childTnLst>
+                                </p:cTn>
+                              </p:par>
+                            </p:childTnLst>
+                          </p:cTn>
+                        </p:par>
+                        <p:par>
+                          <p:cTn id="21" fill="hold">
+                            <p:stCondLst>
+                              <p:cond delay="0"/>
+                            </p:stCondLst>
+                            <p:childTnLst>
+                              <p:par>
+                                <p:cTn id="22" presetID="10" presetClass="entr" presetSubtype="0" fill="hold" grpId="0" nodeType="withEffect">
+                                  <p:stCondLst>
+                                    <p:cond delay="0"/>
+                                  </p:stCondLst>
+                                  <p:childTnLst>
+                                    <p:set>
+                                      <p:cBhvr>
+                                        <p:cTn id="23" dur="1" fill="hold">
+                                          <p:stCondLst>
+                                            <p:cond delay="0"/>
+                                          </p:stCondLst>
+                                        </p:cTn>
+                                        <p:tgtEl>
+                                          <p:spTgt spid="7"/>
+                                        </p:tgtEl>
+                                        <p:attrNameLst>
+                                          <p:attrName>style.visibility</p:attrName>
+                                        </p:attrNameLst>
+                                      </p:cBhvr>
+                                      <p:to>
+                                        <p:strVal val="visible"/>
+                                      </p:to>
+                                    </p:set>
+                                    <p:animEffect transition="in" filter="fade">
+                                      <p:cBhvr>
+                                        <p:cTn id="24" dur="500"/>
+                                        <p:tgtEl>
+                                          <p:spTgt spid="7"/>
+                                        </p:tgtEl>
+                                      </p:cBhvr>
+                                    </p:animEffect>
+                                  </p:childTnLst>
+                                </p:cTn>
+                              </p:par>
+                            </p:childTnLst>
+                          </p:cTn>
+                        </p:par>
+                        <p:par>
+                          <p:cTn id="25" fill="hold">
+                            <p:stCondLst>
+                              <p:cond delay="0"/>
+                            </p:stCondLst>
+                            <p:childTnLst>
+                              <p:par>
+                                <p:cTn id="26" presetID="10" presetClass="entr" presetSubtype="0" fill="hold" grpId="0" nodeType="withEffect">
+                                  <p:stCondLst>
+                                    <p:cond delay="0"/>
+                                  </p:stCondLst>
+                                  <p:childTnLst>
+                                    <p:set>
+                                      <p:cBhvr>
+                                        <p:cTn id="27" dur="1" fill="hold">
+                                          <p:stCondLst>
+                                            <p:cond delay="0"/>
+                                          </p:stCondLst>
+                                        </p:cTn>
+                                        <p:tgtEl>
+                                          <p:spTgt spid="8"/>
+                                        </p:tgtEl>
+                                        <p:attrNameLst>
+                                          <p:attrName>style.visibility</p:attrName>
+                                        </p:attrNameLst>
+                                      </p:cBhvr>
+                                      <p:to>
+                                        <p:strVal val="visible"/>
+                                      </p:to>
+                                    </p:set>
+                                    <p:animEffect transition="in" filter="fade">
+                                      <p:cBhvr>
+                                        <p:cTn id="28" dur="500"/>
+                                        <p:tgtEl>
+                                          <p:spTgt spid="8"/>
+                                        </p:tgtEl>
+                                      </p:cBhvr>
+                                    </p:animEffect>
+                                  </p:childTnLst>
+                                </p:cTn>
+                              </p:par>
+                            </p:childTnLst>
+                          </p:cTn>
+                        </p:par>
+                        <p:par>
+                          <p:cTn id="29" fill="hold">
+                            <p:stCondLst>
+                              <p:cond delay="0"/>
+                            </p:stCondLst>
+                            <p:childTnLst>
+                              <p:par>
+                                <p:cTn id="30" presetID="10" presetClass="entr" presetSubtype="0" fill="hold" grpId="0" nodeType="withEffect">
+                                  <p:stCondLst>
+                                    <p:cond delay="0"/>
+                                  </p:stCondLst>
+                                  <p:childTnLst>
+                                    <p:set>
+                                      <p:cBhvr>
+                                        <p:cTn id="31" dur="1" fill="hold">
+                                          <p:stCondLst>
+                                            <p:cond delay="0"/>
+                                          </p:stCondLst>
+                                        </p:cTn>
+                                        <p:tgtEl>
+                                          <p:spTgt spid="6"/>
+                                        </p:tgtEl>
+                                        <p:attrNameLst>
+                                          <p:attrName>style.visibility</p:attrName>
+                                        </p:attrNameLst>
+                                      </p:cBhvr>
+                                      <p:to>
+                                        <p:strVal val="visible"/>
+                                      </p:to>
+                                    </p:set>
+                                    <p:animEffect transition="in" filter="fade">
+                                      <p:cBhvr>
+                                        <p:cTn id="32" dur="500"/>
+                                        <p:tgtEl>
+                                          <p:spTgt spid="6"/>
+                                        </p:tgtEl>
+                                      </p:cBhvr>
+                                    </p:animEffect>
+                                  </p:childTnLst>
+                                </p:cTn>
+                              </p:par>
+                            </p:childTnLst>
+                          </p:cTn>
+                        </p:par>
+                      </p:childTnLst>
+                    </p:cTn>
+                  </p:par>
+                  <p:par>
+                    <p:cTn id="33" fill="hold">
+                      <p:stCondLst>
+                        <p:cond delay="indefinite"/>
+                      </p:stCondLst>
+                      <p:childTnLst>
+                        <p:par>
+                          <p:cTn id="34" fill="hold">
+                            <p:stCondLst>
+                              <p:cond delay="0"/>
+                            </p:stCondLst>
+                            <p:childTnLst>
+                              <p:par>
+                                <p:cTn id="35" presetID="10" presetClass="entr" presetSubtype="0" fill="hold" grpId="0" nodeType="clickEffect">
+                                  <p:stCondLst>
+                                    <p:cond delay="0"/>
+                                  </p:stCondLst>
+                                  <p:childTnLst>
+                                    <p:set>
+                                      <p:cBhvr>
+                                        <p:cTn id="36" dur="1" fill="hold">
+                                          <p:stCondLst>
+                                            <p:cond delay="0"/>
+                                          </p:stCondLst>
+                                        </p:cTn>
+                                        <p:tgtEl>
+                                          <p:spTgt spid="9"/>
+                                        </p:tgtEl>
+                                        <p:attrNameLst>
+                                          <p:attrName>style.visibility</p:attrName>
+                                        </p:attrNameLst>
+                                      </p:cBhvr>
+                                      <p:to>
+                                        <p:strVal val="visible"/>
+                                      </p:to>
+                                    </p:set>
+                                    <p:animEffect transition="in" filter="fade">
+                                      <p:cBhvr>
+                                        <p:cTn id="37" dur="500"/>
+                                        <p:tgtEl>
+                                          <p:spTgt spid="9"/>
+                                        </p:tgtEl>
+                                      </p:cBhvr>
+                                    </p:animEffect>
+                                  </p:childTnLst>
+                                </p:cTn>
+                              </p:par>
+                            </p:childTnLst>
+                          </p:cTn>
+                        </p:par>
+                        <p:par>
+                          <p:cTn id="38" fill="hold">
+                            <p:stCondLst>
+                              <p:cond delay="0"/>
+                            </p:stCondLst>
+                            <p:childTnLst>
+                              <p:par>
+                                <p:cTn id="39" presetID="10" presetClass="entr" presetSubtype="0" fill="hold" grpId="0" nodeType="withEffect">
+                                  <p:stCondLst>
+                                    <p:cond delay="0"/>
+                                  </p:stCondLst>
+                                  <p:childTnLst>
+                                    <p:set>
+                                      <p:cBhvr>
+                                        <p:cTn id="40" dur="1" fill="hold">
+                                          <p:stCondLst>
+                                            <p:cond delay="0"/>
+                                          </p:stCondLst>
+                                        </p:cTn>
+                                        <p:tgtEl>
+                                          <p:spTgt spid="10"/>
+                                        </p:tgtEl>
+                                        <p:attrNameLst>
+                                          <p:attrName>style.visibility</p:attrName>
+                                        </p:attrNameLst>
+                                      </p:cBhvr>
+                                      <p:to>
+                                        <p:strVal val="visible"/>
+                                      </p:to>
+                                    </p:set>
+                                    <p:animEffect transition="in" filter="fade">
+                                      <p:cBhvr>
+                                        <p:cTn id="41" dur="500"/>
+                                        <p:tgtEl>
+                                          <p:spTgt spid="10"/>
+                                        </p:tgtEl>
+                                      </p:cBhvr>
+                                    </p:animEffect>
+                                  </p:childTnLst>
+                                </p:cTn>
+                              </p:par>
+                            </p:childTnLst>
+                          </p:cTn>
+                        </p:par>
+                        <p:par>
+                          <p:cTn id="42" fill="hold">
+                            <p:stCondLst>
+                              <p:cond delay="0"/>
+                            </p:stCondLst>
+                            <p:childTnLst>
+                              <p:par>
+                                <p:cTn id="43" presetID="10" presetClass="entr" presetSubtype="0" fill="hold" grpId="0" nodeType="withEffect">
+                                  <p:stCondLst>
+                                    <p:cond delay="0"/>
+                                  </p:stCondLst>
+                                  <p:childTnLst>
+                                    <p:set>
+                                      <p:cBhvr>
+                                        <p:cTn id="44" dur="1" fill="hold">
+                                          <p:stCondLst>
+                                            <p:cond delay="0"/>
+                                          </p:stCondLst>
+                                        </p:cTn>
+                                        <p:tgtEl>
+                                          <p:spTgt spid="12"/>
+                                        </p:tgtEl>
+                                        <p:attrNameLst>
+                                          <p:attrName>style.visibility</p:attrName>
+                                        </p:attrNameLst>
+                                      </p:cBhvr>
+                                      <p:to>
+                                        <p:strVal val="visible"/>
+                                      </p:to>
+                                    </p:set>
+                                    <p:animEffect transition="in" filter="fade">
+                                      <p:cBhvr>
+                                        <p:cTn id="45" dur="500"/>
+                                        <p:tgtEl>
+                                          <p:spTgt spid="12"/>
+                                        </p:tgtEl>
+                                      </p:cBhvr>
+                                    </p:animEffect>
+                                  </p:childTnLst>
+                                </p:cTn>
+                              </p:par>
+                            </p:childTnLst>
+                          </p:cTn>
+                        </p:par>
+                        <p:par>
+                          <p:cTn id="46" fill="hold">
+                            <p:stCondLst>
+                              <p:cond delay="0"/>
+                            </p:stCondLst>
+                            <p:childTnLst>
+                              <p:par>
+                                <p:cTn id="47" presetID="10" presetClass="entr" presetSubtype="0" fill="hold" grpId="0" nodeType="withEffect">
+                                  <p:stCondLst>
+                                    <p:cond delay="0"/>
+                                  </p:stCondLst>
+                                  <p:childTnLst>
+                                    <p:set>
+                                      <p:cBhvr>
+                                        <p:cTn id="48" dur="1" fill="hold">
+                                          <p:stCondLst>
+                                            <p:cond delay="0"/>
+                                          </p:stCondLst>
+                                        </p:cTn>
+                                        <p:tgtEl>
+                                          <p:spTgt spid="13"/>
+                                        </p:tgtEl>
+                                        <p:attrNameLst>
+                                          <p:attrName>style.visibility</p:attrName>
+                                        </p:attrNameLst>
+                                      </p:cBhvr>
+                                      <p:to>
+                                        <p:strVal val="visible"/>
+                                      </p:to>
+                                    </p:set>
+                                    <p:animEffect transition="in" filter="fade">
+                                      <p:cBhvr>
+                                        <p:cTn id="49" dur="500"/>
+                                        <p:tgtEl>
+                                          <p:spTgt spid="13"/>
+                                        </p:tgtEl>
+                                      </p:cBhvr>
+                                    </p:animEffect>
+                                  </p:childTnLst>
+                                </p:cTn>
+                              </p:par>
+                            </p:childTnLst>
+                          </p:cTn>
+                        </p:par>
+                        <p:par>
+                          <p:cTn id="50" fill="hold">
+                            <p:stCondLst>
+                              <p:cond delay="0"/>
+                            </p:stCondLst>
+                            <p:childTnLst>
+                              <p:par>
+                                <p:cTn id="51" presetID="10" presetClass="entr" presetSubtype="0" fill="hold" grpId="0" nodeType="withEffect">
+                                  <p:stCondLst>
+                                    <p:cond delay="0"/>
+                                  </p:stCondLst>
+                                  <p:childTnLst>
+                                    <p:set>
+                                      <p:cBhvr>
+                                        <p:cTn id="52" dur="1" fill="hold">
+                                          <p:stCondLst>
+                                            <p:cond delay="0"/>
+                                          </p:stCondLst>
+                                        </p:cTn>
+                                        <p:tgtEl>
+                                          <p:spTgt spid="11"/>
+                                        </p:tgtEl>
+                                        <p:attrNameLst>
+                                          <p:attrName>style.visibility</p:attrName>
+                                        </p:attrNameLst>
+                                      </p:cBhvr>
+                                      <p:to>
+                                        <p:strVal val="visible"/>
+                                      </p:to>
+                                    </p:set>
+                                    <p:animEffect transition="in" filter="fade">
+                                      <p:cBhvr>
+                                        <p:cTn id="53" dur="500"/>
+                                        <p:tgtEl>
+                                          <p:spTgt spid="11"/>
+                                        </p:tgtEl>
+                                      </p:cBhvr>
+                                    </p:animEffect>
+                                  </p:childTnLst>
+                                </p:cTn>
+                              </p:par>
+                            </p:childTnLst>
+                          </p:cTn>
+                        </p:par>
+                      </p:childTnLst>
+                    </p:cTn>
+                  </p:par>
+                  <p:par>
+                    <p:cTn id="54" fill="hold">
+                      <p:stCondLst>
+                        <p:cond delay="indefinite"/>
+                      </p:stCondLst>
+                      <p:childTnLst>
+                        <p:par>
+                          <p:cTn id="55" fill="hold">
+                            <p:stCondLst>
+                              <p:cond delay="0"/>
+                            </p:stCondLst>
+                            <p:childTnLst>
+                              <p:par>
+                                <p:cTn id="56" presetID="10" presetClass="entr" presetSubtype="0" fill="hold" grpId="0" nodeType="clickEffect">
+                                  <p:stCondLst>
+                                    <p:cond delay="0"/>
+                                  </p:stCondLst>
+                                  <p:childTnLst>
+                                    <p:set>
+                                      <p:cBhvr>
+                                        <p:cTn id="57" dur="1" fill="hold">
+                                          <p:stCondLst>
+                                            <p:cond delay="0"/>
+                                          </p:stCondLst>
+                                        </p:cTn>
+                                        <p:tgtEl>
+                                          <p:spTgt spid="14"/>
+                                        </p:tgtEl>
+                                        <p:attrNameLst>
+                                          <p:attrName>style.visibility</p:attrName>
+                                        </p:attrNameLst>
+                                      </p:cBhvr>
+                                      <p:to>
+                                        <p:strVal val="visible"/>
+                                      </p:to>
+                                    </p:set>
+                                    <p:animEffect transition="in" filter="fade">
+                                      <p:cBhvr>
+                                        <p:cTn id="58" dur="500"/>
+                                        <p:tgtEl>
+                                          <p:spTgt spid="14"/>
+                                        </p:tgtEl>
+                                      </p:cBhvr>
+                                    </p:animEffect>
+                                  </p:childTnLst>
+                                </p:cTn>
+                              </p:par>
+                            </p:childTnLst>
+                          </p:cTn>
+                        </p:par>
+                        <p:par>
+                          <p:cTn id="59" fill="hold">
+                            <p:stCondLst>
+                              <p:cond delay="0"/>
+                            </p:stCondLst>
+                            <p:childTnLst>
+                              <p:par>
+                                <p:cTn id="60" presetID="10" presetClass="entr" presetSubtype="0" fill="hold" grpId="0" nodeType="withEffect">
+                                  <p:stCondLst>
+                                    <p:cond delay="0"/>
+                                  </p:stCondLst>
+                                  <p:childTnLst>
+                                    <p:set>
+                                      <p:cBhvr>
+                                        <p:cTn id="61" dur="1" fill="hold">
+                                          <p:stCondLst>
+                                            <p:cond delay="0"/>
+                                          </p:stCondLst>
+                                        </p:cTn>
+                                        <p:tgtEl>
+                                          <p:spTgt spid="15"/>
+                                        </p:tgtEl>
+                                        <p:attrNameLst>
+                                          <p:attrName>style.visibility</p:attrName>
+                                        </p:attrNameLst>
+                                      </p:cBhvr>
+                                      <p:to>
+                                        <p:strVal val="visible"/>
+                                      </p:to>
+                                    </p:set>
+                                    <p:animEffect transition="in" filter="fade">
+                                      <p:cBhvr>
+                                        <p:cTn id="62" dur="500"/>
+                                        <p:tgtEl>
+                                          <p:spTgt spid="15"/>
+                                        </p:tgtEl>
+                                      </p:cBhvr>
+                                    </p:animEffect>
+                                  </p:childTnLst>
+                                </p:cTn>
+                              </p:par>
+                            </p:childTnLst>
+                          </p:cTn>
+                        </p:par>
+                        <p:par>
+                          <p:cTn id="63" fill="hold">
+                            <p:stCondLst>
+                              <p:cond delay="0"/>
+                            </p:stCondLst>
+                            <p:childTnLst>
+                              <p:par>
+                                <p:cTn id="64" presetID="10" presetClass="entr" presetSubtype="0" fill="hold" grpId="0" nodeType="withEffect">
+                                  <p:stCondLst>
+                                    <p:cond delay="0"/>
+                                  </p:stCondLst>
+                                  <p:childTnLst>
+                                    <p:set>
+                                      <p:cBhvr>
+                                        <p:cTn id="65" dur="1" fill="hold">
+                                          <p:stCondLst>
+                                            <p:cond delay="0"/>
+                                          </p:stCondLst>
+                                        </p:cTn>
+                                        <p:tgtEl>
+                                          <p:spTgt spid="17"/>
+                                        </p:tgtEl>
+                                        <p:attrNameLst>
+                                          <p:attrName>style.visibility</p:attrName>
+                                        </p:attrNameLst>
+                                      </p:cBhvr>
+                                      <p:to>
+                                        <p:strVal val="visible"/>
+                                      </p:to>
+                                    </p:set>
+                                    <p:animEffect transition="in" filter="fade">
+                                      <p:cBhvr>
+                                        <p:cTn id="66" dur="500"/>
+                                        <p:tgtEl>
+                                          <p:spTgt spid="17"/>
+                                        </p:tgtEl>
+                                      </p:cBhvr>
+                                    </p:animEffect>
+                                  </p:childTnLst>
+                                </p:cTn>
+                              </p:par>
+                            </p:childTnLst>
+                          </p:cTn>
+                        </p:par>
+                        <p:par>
+                          <p:cTn id="67" fill="hold">
+                            <p:stCondLst>
+                              <p:cond delay="0"/>
+                            </p:stCondLst>
+                            <p:childTnLst>
+                              <p:par>
+                                <p:cTn id="68" presetID="10" presetClass="entr" presetSubtype="0" fill="hold" grpId="0" nodeType="withEffect">
+                                  <p:stCondLst>
+                                    <p:cond delay="0"/>
+                                  </p:stCondLst>
+                                  <p:childTnLst>
+                                    <p:set>
+                                      <p:cBhvr>
+                                        <p:cTn id="69" dur="1" fill="hold">
+                                          <p:stCondLst>
+                                            <p:cond delay="0"/>
+                                          </p:stCondLst>
+                                        </p:cTn>
+                                        <p:tgtEl>
+                                          <p:spTgt spid="18"/>
+                                        </p:tgtEl>
+                                        <p:attrNameLst>
+                                          <p:attrName>style.visibility</p:attrName>
+                                        </p:attrNameLst>
+                                      </p:cBhvr>
+                                      <p:to>
+                                        <p:strVal val="visible"/>
+                                      </p:to>
+                                    </p:set>
+                                    <p:animEffect transition="in" filter="fade">
+                                      <p:cBhvr>
+                                        <p:cTn id="70" dur="500"/>
+                                        <p:tgtEl>
+                                          <p:spTgt spid="18"/>
+                                        </p:tgtEl>
+                                      </p:cBhvr>
+                                    </p:animEffect>
+                                  </p:childTnLst>
+                                </p:cTn>
+                              </p:par>
+                            </p:childTnLst>
+                          </p:cTn>
+                        </p:par>
+                        <p:par>
+                          <p:cTn id="71" fill="hold">
+                            <p:stCondLst>
+                              <p:cond delay="0"/>
+                            </p:stCondLst>
+                            <p:childTnLst>
+                              <p:par>
+                                <p:cTn id="72" presetID="10" presetClass="entr" presetSubtype="0" fill="hold" grpId="0" nodeType="withEffect">
+                                  <p:stCondLst>
+                                    <p:cond delay="0"/>
+                                  </p:stCondLst>
+                                  <p:childTnLst>
+                                    <p:set>
+                                      <p:cBhvr>
+                                        <p:cTn id="73" dur="1" fill="hold">
+                                          <p:stCondLst>
+                                            <p:cond delay="0"/>
+                                          </p:stCondLst>
+                                        </p:cTn>
+                                        <p:tgtEl>
+                                          <p:spTgt spid="16"/>
+                                        </p:tgtEl>
+                                        <p:attrNameLst>
+                                          <p:attrName>style.visibility</p:attrName>
+                                        </p:attrNameLst>
+                                      </p:cBhvr>
+                                      <p:to>
+                                        <p:strVal val="visible"/>
+                                      </p:to>
+                                    </p:set>
+                                    <p:animEffect transition="in" filter="fade">
+                                      <p:cBhvr>
+                                        <p:cTn id="74" dur="500"/>
+                                        <p:tgtEl>
+                                          <p:spTgt spid="16"/>
+                                        </p:tgtEl>
+                                      </p:cBhvr>
+                                    </p:animEffect>
+                                  </p:childTnLst>
+                                </p:cTn>
+                              </p:par>
+                            </p:childTnLst>
+                          </p:cTn>
+                        </p:par>
+                      </p:childTnLst>
+                    </p:cTn>
+                  </p:par>
+                </p:childTnLst>
+              </p:cTn>
+              <p:prevCondLst>
+                <p:cond evt="onPrev" delay="0">
+                  <p:tgtEl>
+                    <p:sldTgt/>
+                  </p:tgtEl>
+                </p:cond>
+              </p:prevCondLst>
+              <p:nextCondLst>
+                <p:cond evt="onNext" delay="0">
+                  <p:tgtEl>
+                    <p:sldTgt/>
+                  </p:tgtEl>
+                </p:cond>
+              </p:nextCondLst>
+            </p:seq>
+          </p:childTnLst>
+        </p:cTn>
+      </p:par>
+    </p:tnLst>
+    <p:bldLst>
+      <p:bldP spid="2" grpId="0"/>
+      <p:bldP spid="3" grpId="0"/>
+      <p:bldP spid="4" grpId="0"/>
+      <p:bldP spid="5" grpId="0"/>
+      <p:bldP spid="7" grpId="0"/>
+      <p:bldP spid="8" grpId="0"/>
+      <p:bldP spid="6" grpId="0"/>
+      <p:bldP spid="9" grpId="0"/>
+      <p:bldP spid="10" grpId="0"/>
+      <p:bldP spid="12" grpId="0"/>
+      <p:bldP spid="13" grpId="0"/>
+      <p:bldP spid="11" grpId="0"/>
+      <p:bldP spid="14" grpId="0"/>
+      <p:bldP spid="15" grpId="0"/>
+      <p:bldP spid="17" grpId="0"/>
+      <p:bldP spid="18" grpId="0"/>
+      <p:bldP spid="16" grpId="0"/>
+    </p:bldLst>
+  </p:timing>
 </p:sld>
 </file>
 
@@ -3455,7 +4608,7 @@
       </p:sp>
       <p:sp>
         <p:nvSpPr>
-          <p:cNvPr id="4" name="Text 2"/>
+          <p:cNvPr id="4" name="c1-1"/>
           <p:cNvSpPr txBox="1"/>
           <p:nvPr/>
         </p:nvSpPr>
@@ -3491,7 +4644,7 @@
       </p:sp>
       <p:sp>
         <p:nvSpPr>
-          <p:cNvPr id="5" name="Text 3"/>
+          <p:cNvPr id="5" name="c1-2"/>
           <p:cNvSpPr txBox="1"/>
           <p:nvPr/>
         </p:nvSpPr>
@@ -3527,7 +4680,7 @@
       </p:sp>
       <p:sp>
         <p:nvSpPr>
-          <p:cNvPr id="6" name="Shape 4"/>
+          <p:cNvPr id="6" name="c2-3"/>
           <p:cNvSpPr/>
           <p:nvPr/>
         </p:nvSpPr>
@@ -3556,7 +4709,7 @@
       </p:sp>
       <p:sp>
         <p:nvSpPr>
-          <p:cNvPr id="7" name="Shape 5"/>
+          <p:cNvPr id="7" name="c2-4bg"/>
           <p:cNvSpPr/>
           <p:nvPr/>
         </p:nvSpPr>
@@ -3578,7 +4731,7 @@
       </p:sp>
       <p:pic>
         <p:nvPicPr>
-          <p:cNvPr id="8" name="Image 0" descr="preencoded.png">    </p:cNvPr>
+          <p:cNvPr id="8" name="c2-4ic" descr="preencoded.png">    </p:cNvPr>
           <p:cNvPicPr>
             <a:picLocks noChangeAspect="1"/>
           </p:cNvPicPr>
@@ -3602,7 +4755,7 @@
       </p:pic>
       <p:sp>
         <p:nvSpPr>
-          <p:cNvPr id="9" name="Text 6"/>
+          <p:cNvPr id="9" name="c2-5"/>
           <p:cNvSpPr txBox="1"/>
           <p:nvPr/>
         </p:nvSpPr>
@@ -3638,7 +4791,7 @@
       </p:sp>
       <p:sp>
         <p:nvSpPr>
-          <p:cNvPr id="10" name="Text 7"/>
+          <p:cNvPr id="10" name="c2-6"/>
           <p:cNvSpPr txBox="1"/>
           <p:nvPr/>
         </p:nvSpPr>
@@ -3674,7 +4827,7 @@
       </p:sp>
       <p:sp>
         <p:nvSpPr>
-          <p:cNvPr id="11" name="Text 8"/>
+          <p:cNvPr id="11" name="c2-7"/>
           <p:cNvSpPr txBox="1"/>
           <p:nvPr/>
         </p:nvSpPr>
@@ -3710,7 +4863,7 @@
       </p:sp>
       <p:sp>
         <p:nvSpPr>
-          <p:cNvPr id="12" name="Shape 9"/>
+          <p:cNvPr id="12" name="c3-8"/>
           <p:cNvSpPr/>
           <p:nvPr/>
         </p:nvSpPr>
@@ -3739,7 +4892,7 @@
       </p:sp>
       <p:sp>
         <p:nvSpPr>
-          <p:cNvPr id="13" name="Shape 10"/>
+          <p:cNvPr id="13" name="c3-9bg"/>
           <p:cNvSpPr/>
           <p:nvPr/>
         </p:nvSpPr>
@@ -3761,7 +4914,7 @@
       </p:sp>
       <p:pic>
         <p:nvPicPr>
-          <p:cNvPr id="14" name="Image 1" descr="preencoded.png">    </p:cNvPr>
+          <p:cNvPr id="14" name="c3-9ic" descr="preencoded.png">    </p:cNvPr>
           <p:cNvPicPr>
             <a:picLocks noChangeAspect="1"/>
           </p:cNvPicPr>
@@ -3785,7 +4938,7 @@
       </p:pic>
       <p:sp>
         <p:nvSpPr>
-          <p:cNvPr id="15" name="Text 11"/>
+          <p:cNvPr id="15" name="c3-10"/>
           <p:cNvSpPr txBox="1"/>
           <p:nvPr/>
         </p:nvSpPr>
@@ -3821,7 +4974,7 @@
       </p:sp>
       <p:sp>
         <p:nvSpPr>
-          <p:cNvPr id="16" name="Text 12"/>
+          <p:cNvPr id="16" name="c3-11"/>
           <p:cNvSpPr txBox="1"/>
           <p:nvPr/>
         </p:nvSpPr>
@@ -3857,7 +5010,7 @@
       </p:sp>
       <p:sp>
         <p:nvSpPr>
-          <p:cNvPr id="17" name="Text 13"/>
+          <p:cNvPr id="17" name="c3-12"/>
           <p:cNvSpPr txBox="1"/>
           <p:nvPr/>
         </p:nvSpPr>
@@ -3893,7 +5046,7 @@
       </p:sp>
       <p:sp>
         <p:nvSpPr>
-          <p:cNvPr id="18" name="Shape 14"/>
+          <p:cNvPr id="18" name="c4-13"/>
           <p:cNvSpPr/>
           <p:nvPr/>
         </p:nvSpPr>
@@ -3922,7 +5075,7 @@
       </p:sp>
       <p:sp>
         <p:nvSpPr>
-          <p:cNvPr id="19" name="Shape 15"/>
+          <p:cNvPr id="19" name="c4-14bg"/>
           <p:cNvSpPr/>
           <p:nvPr/>
         </p:nvSpPr>
@@ -3944,7 +5097,7 @@
       </p:sp>
       <p:pic>
         <p:nvPicPr>
-          <p:cNvPr id="20" name="Image 2" descr="preencoded.png">    </p:cNvPr>
+          <p:cNvPr id="20" name="c4-14ic" descr="preencoded.png">    </p:cNvPr>
           <p:cNvPicPr>
             <a:picLocks noChangeAspect="1"/>
           </p:cNvPicPr>
@@ -3968,7 +5121,7 @@
       </p:pic>
       <p:sp>
         <p:nvSpPr>
-          <p:cNvPr id="21" name="Text 16"/>
+          <p:cNvPr id="21" name="c4-15"/>
           <p:cNvSpPr txBox="1"/>
           <p:nvPr/>
         </p:nvSpPr>
@@ -4004,7 +5157,7 @@
       </p:sp>
       <p:sp>
         <p:nvSpPr>
-          <p:cNvPr id="22" name="Text 17"/>
+          <p:cNvPr id="22" name="c4-16"/>
           <p:cNvSpPr txBox="1"/>
           <p:nvPr/>
         </p:nvSpPr>
@@ -4040,7 +5193,7 @@
       </p:sp>
       <p:sp>
         <p:nvSpPr>
-          <p:cNvPr id="23" name="Text 18"/>
+          <p:cNvPr id="23" name="c4-17"/>
           <p:cNvSpPr txBox="1"/>
           <p:nvPr/>
         </p:nvSpPr>
@@ -4076,7 +5229,7 @@
       </p:sp>
       <p:sp>
         <p:nvSpPr>
-          <p:cNvPr id="24" name="Shape 19"/>
+          <p:cNvPr id="24" name="c5-18"/>
           <p:cNvSpPr/>
           <p:nvPr/>
         </p:nvSpPr>
@@ -4105,7 +5258,7 @@
       </p:sp>
       <p:sp>
         <p:nvSpPr>
-          <p:cNvPr id="25" name="Shape 20"/>
+          <p:cNvPr id="25" name="c5-19bg"/>
           <p:cNvSpPr/>
           <p:nvPr/>
         </p:nvSpPr>
@@ -4127,7 +5280,7 @@
       </p:sp>
       <p:pic>
         <p:nvPicPr>
-          <p:cNvPr id="26" name="Image 3" descr="preencoded.png">    </p:cNvPr>
+          <p:cNvPr id="26" name="c5-19ic" descr="preencoded.png">    </p:cNvPr>
           <p:cNvPicPr>
             <a:picLocks noChangeAspect="1"/>
           </p:cNvPicPr>
@@ -4151,7 +5304,7 @@
       </p:pic>
       <p:sp>
         <p:nvSpPr>
-          <p:cNvPr id="27" name="Text 21"/>
+          <p:cNvPr id="27" name="c5-20"/>
           <p:cNvSpPr txBox="1"/>
           <p:nvPr/>
         </p:nvSpPr>
@@ -4187,7 +5340,7 @@
       </p:sp>
       <p:sp>
         <p:nvSpPr>
-          <p:cNvPr id="28" name="Text 22"/>
+          <p:cNvPr id="28" name="c5-21"/>
           <p:cNvSpPr txBox="1"/>
           <p:nvPr/>
         </p:nvSpPr>
@@ -4223,7 +5376,7 @@
       </p:sp>
       <p:sp>
         <p:nvSpPr>
-          <p:cNvPr id="29" name="Text 23"/>
+          <p:cNvPr id="29" name="c5-22"/>
           <p:cNvSpPr txBox="1"/>
           <p:nvPr/>
         </p:nvSpPr>
@@ -4307,6 +5460,1253 @@
   <p:clrMapOvr>
     <a:masterClrMapping/>
   </p:clrMapOvr>
+  <p:timing>
+    <p:tnLst>
+      <p:par>
+        <p:cTn id="1" dur="indefinite" restart="never" nodeType="tmRoot">
+          <p:childTnLst>
+            <p:seq concurrent="1" nextAc="seek">
+              <p:cTn id="2" dur="indefinite" nodeType="mainSeq">
+                <p:childTnLst>
+                  <p:par>
+                    <p:cTn id="3" fill="hold">
+                      <p:stCondLst>
+                        <p:cond delay="indefinite"/>
+                      </p:stCondLst>
+                      <p:childTnLst>
+                        <p:par>
+                          <p:cTn id="4" fill="hold">
+                            <p:stCondLst>
+                              <p:cond delay="0"/>
+                            </p:stCondLst>
+                            <p:childTnLst>
+                              <p:par>
+                                <p:cTn id="5" presetID="10" presetClass="entr" presetSubtype="0" fill="hold" grpId="0" nodeType="clickEffect">
+                                  <p:stCondLst>
+                                    <p:cond delay="0"/>
+                                  </p:stCondLst>
+                                  <p:childTnLst>
+                                    <p:set>
+                                      <p:cBhvr>
+                                        <p:cTn id="6" dur="1" fill="hold">
+                                          <p:stCondLst>
+                                            <p:cond delay="0"/>
+                                          </p:stCondLst>
+                                        </p:cTn>
+                                        <p:tgtEl>
+                                          <p:spTgt spid="4"/>
+                                        </p:tgtEl>
+                                        <p:attrNameLst>
+                                          <p:attrName>style.visibility</p:attrName>
+                                        </p:attrNameLst>
+                                      </p:cBhvr>
+                                      <p:to>
+                                        <p:strVal val="visible"/>
+                                      </p:to>
+                                    </p:set>
+                                    <p:animEffect transition="in" filter="fade">
+                                      <p:cBhvr>
+                                        <p:cTn id="7" dur="500"/>
+                                        <p:tgtEl>
+                                          <p:spTgt spid="4"/>
+                                        </p:tgtEl>
+                                      </p:cBhvr>
+                                    </p:animEffect>
+                                  </p:childTnLst>
+                                </p:cTn>
+                              </p:par>
+                            </p:childTnLst>
+                          </p:cTn>
+                        </p:par>
+                        <p:par>
+                          <p:cTn id="8" fill="hold">
+                            <p:stCondLst>
+                              <p:cond delay="0"/>
+                            </p:stCondLst>
+                            <p:childTnLst>
+                              <p:par>
+                                <p:cTn id="9" presetID="10" presetClass="entr" presetSubtype="0" fill="hold" grpId="0" nodeType="withEffect">
+                                  <p:stCondLst>
+                                    <p:cond delay="0"/>
+                                  </p:stCondLst>
+                                  <p:childTnLst>
+                                    <p:set>
+                                      <p:cBhvr>
+                                        <p:cTn id="10" dur="1" fill="hold">
+                                          <p:stCondLst>
+                                            <p:cond delay="0"/>
+                                          </p:stCondLst>
+                                        </p:cTn>
+                                        <p:tgtEl>
+                                          <p:spTgt spid="5"/>
+                                        </p:tgtEl>
+                                        <p:attrNameLst>
+                                          <p:attrName>style.visibility</p:attrName>
+                                        </p:attrNameLst>
+                                      </p:cBhvr>
+                                      <p:to>
+                                        <p:strVal val="visible"/>
+                                      </p:to>
+                                    </p:set>
+                                    <p:animEffect transition="in" filter="fade">
+                                      <p:cBhvr>
+                                        <p:cTn id="11" dur="500"/>
+                                        <p:tgtEl>
+                                          <p:spTgt spid="5"/>
+                                        </p:tgtEl>
+                                      </p:cBhvr>
+                                    </p:animEffect>
+                                  </p:childTnLst>
+                                </p:cTn>
+                              </p:par>
+                            </p:childTnLst>
+                          </p:cTn>
+                        </p:par>
+                      </p:childTnLst>
+                    </p:cTn>
+                  </p:par>
+                  <p:par>
+                    <p:cTn id="12" fill="hold">
+                      <p:stCondLst>
+                        <p:cond delay="indefinite"/>
+                      </p:stCondLst>
+                      <p:childTnLst>
+                        <p:par>
+                          <p:cTn id="13" fill="hold">
+                            <p:stCondLst>
+                              <p:cond delay="0"/>
+                            </p:stCondLst>
+                            <p:childTnLst>
+                              <p:par>
+                                <p:cTn id="14" presetID="10" presetClass="entr" presetSubtype="0" fill="hold" grpId="0" nodeType="clickEffect">
+                                  <p:stCondLst>
+                                    <p:cond delay="0"/>
+                                  </p:stCondLst>
+                                  <p:childTnLst>
+                                    <p:set>
+                                      <p:cBhvr>
+                                        <p:cTn id="15" dur="1" fill="hold">
+                                          <p:stCondLst>
+                                            <p:cond delay="0"/>
+                                          </p:stCondLst>
+                                        </p:cTn>
+                                        <p:tgtEl>
+                                          <p:spTgt spid="6"/>
+                                        </p:tgtEl>
+                                        <p:attrNameLst>
+                                          <p:attrName>style.visibility</p:attrName>
+                                        </p:attrNameLst>
+                                      </p:cBhvr>
+                                      <p:to>
+                                        <p:strVal val="visible"/>
+                                      </p:to>
+                                    </p:set>
+                                    <p:animEffect transition="in" filter="fade">
+                                      <p:cBhvr>
+                                        <p:cTn id="16" dur="500"/>
+                                        <p:tgtEl>
+                                          <p:spTgt spid="6"/>
+                                        </p:tgtEl>
+                                      </p:cBhvr>
+                                    </p:animEffect>
+                                  </p:childTnLst>
+                                </p:cTn>
+                              </p:par>
+                            </p:childTnLst>
+                          </p:cTn>
+                        </p:par>
+                        <p:par>
+                          <p:cTn id="17" fill="hold">
+                            <p:stCondLst>
+                              <p:cond delay="0"/>
+                            </p:stCondLst>
+                            <p:childTnLst>
+                              <p:par>
+                                <p:cTn id="18" presetID="10" presetClass="entr" presetSubtype="0" fill="hold" grpId="0" nodeType="withEffect">
+                                  <p:stCondLst>
+                                    <p:cond delay="0"/>
+                                  </p:stCondLst>
+                                  <p:childTnLst>
+                                    <p:set>
+                                      <p:cBhvr>
+                                        <p:cTn id="19" dur="1" fill="hold">
+                                          <p:stCondLst>
+                                            <p:cond delay="0"/>
+                                          </p:stCondLst>
+                                        </p:cTn>
+                                        <p:tgtEl>
+                                          <p:spTgt spid="7"/>
+                                        </p:tgtEl>
+                                        <p:attrNameLst>
+                                          <p:attrName>style.visibility</p:attrName>
+                                        </p:attrNameLst>
+                                      </p:cBhvr>
+                                      <p:to>
+                                        <p:strVal val="visible"/>
+                                      </p:to>
+                                    </p:set>
+                                    <p:animEffect transition="in" filter="fade">
+                                      <p:cBhvr>
+                                        <p:cTn id="20" dur="500"/>
+                                        <p:tgtEl>
+                                          <p:spTgt spid="7"/>
+                                        </p:tgtEl>
+                                      </p:cBhvr>
+                                    </p:animEffect>
+                                  </p:childTnLst>
+                                </p:cTn>
+                              </p:par>
+                            </p:childTnLst>
+                          </p:cTn>
+                        </p:par>
+                        <p:par>
+                          <p:cTn id="21" fill="hold">
+                            <p:stCondLst>
+                              <p:cond delay="0"/>
+                            </p:stCondLst>
+                            <p:childTnLst>
+                              <p:par>
+                                <p:cTn id="22" presetID="10" presetClass="entr" presetSubtype="0" fill="hold" grpId="0" nodeType="withEffect">
+                                  <p:stCondLst>
+                                    <p:cond delay="0"/>
+                                  </p:stCondLst>
+                                  <p:childTnLst>
+                                    <p:set>
+                                      <p:cBhvr>
+                                        <p:cTn id="23" dur="1" fill="hold">
+                                          <p:stCondLst>
+                                            <p:cond delay="0"/>
+                                          </p:stCondLst>
+                                        </p:cTn>
+                                        <p:tgtEl>
+                                          <p:spTgt spid="9"/>
+                                        </p:tgtEl>
+                                        <p:attrNameLst>
+                                          <p:attrName>style.visibility</p:attrName>
+                                        </p:attrNameLst>
+                                      </p:cBhvr>
+                                      <p:to>
+                                        <p:strVal val="visible"/>
+                                      </p:to>
+                                    </p:set>
+                                    <p:animEffect transition="in" filter="fade">
+                                      <p:cBhvr>
+                                        <p:cTn id="24" dur="500"/>
+                                        <p:tgtEl>
+                                          <p:spTgt spid="9"/>
+                                        </p:tgtEl>
+                                      </p:cBhvr>
+                                    </p:animEffect>
+                                  </p:childTnLst>
+                                </p:cTn>
+                              </p:par>
+                            </p:childTnLst>
+                          </p:cTn>
+                        </p:par>
+                        <p:par>
+                          <p:cTn id="25" fill="hold">
+                            <p:stCondLst>
+                              <p:cond delay="0"/>
+                            </p:stCondLst>
+                            <p:childTnLst>
+                              <p:par>
+                                <p:cTn id="26" presetID="10" presetClass="entr" presetSubtype="0" fill="hold" grpId="0" nodeType="withEffect">
+                                  <p:stCondLst>
+                                    <p:cond delay="0"/>
+                                  </p:stCondLst>
+                                  <p:childTnLst>
+                                    <p:set>
+                                      <p:cBhvr>
+                                        <p:cTn id="27" dur="1" fill="hold">
+                                          <p:stCondLst>
+                                            <p:cond delay="0"/>
+                                          </p:stCondLst>
+                                        </p:cTn>
+                                        <p:tgtEl>
+                                          <p:spTgt spid="10"/>
+                                        </p:tgtEl>
+                                        <p:attrNameLst>
+                                          <p:attrName>style.visibility</p:attrName>
+                                        </p:attrNameLst>
+                                      </p:cBhvr>
+                                      <p:to>
+                                        <p:strVal val="visible"/>
+                                      </p:to>
+                                    </p:set>
+                                    <p:animEffect transition="in" filter="fade">
+                                      <p:cBhvr>
+                                        <p:cTn id="28" dur="500"/>
+                                        <p:tgtEl>
+                                          <p:spTgt spid="10"/>
+                                        </p:tgtEl>
+                                      </p:cBhvr>
+                                    </p:animEffect>
+                                  </p:childTnLst>
+                                </p:cTn>
+                              </p:par>
+                            </p:childTnLst>
+                          </p:cTn>
+                        </p:par>
+                        <p:par>
+                          <p:cTn id="29" fill="hold">
+                            <p:stCondLst>
+                              <p:cond delay="0"/>
+                            </p:stCondLst>
+                            <p:childTnLst>
+                              <p:par>
+                                <p:cTn id="30" presetID="10" presetClass="entr" presetSubtype="0" fill="hold" grpId="0" nodeType="withEffect">
+                                  <p:stCondLst>
+                                    <p:cond delay="0"/>
+                                  </p:stCondLst>
+                                  <p:childTnLst>
+                                    <p:set>
+                                      <p:cBhvr>
+                                        <p:cTn id="31" dur="1" fill="hold">
+                                          <p:stCondLst>
+                                            <p:cond delay="0"/>
+                                          </p:stCondLst>
+                                        </p:cTn>
+                                        <p:tgtEl>
+                                          <p:spTgt spid="11"/>
+                                        </p:tgtEl>
+                                        <p:attrNameLst>
+                                          <p:attrName>style.visibility</p:attrName>
+                                        </p:attrNameLst>
+                                      </p:cBhvr>
+                                      <p:to>
+                                        <p:strVal val="visible"/>
+                                      </p:to>
+                                    </p:set>
+                                    <p:animEffect transition="in" filter="fade">
+                                      <p:cBhvr>
+                                        <p:cTn id="32" dur="500"/>
+                                        <p:tgtEl>
+                                          <p:spTgt spid="11"/>
+                                        </p:tgtEl>
+                                      </p:cBhvr>
+                                    </p:animEffect>
+                                  </p:childTnLst>
+                                </p:cTn>
+                              </p:par>
+                            </p:childTnLst>
+                          </p:cTn>
+                        </p:par>
+                        <p:par>
+                          <p:cTn id="33" fill="hold">
+                            <p:stCondLst>
+                              <p:cond delay="0"/>
+                            </p:stCondLst>
+                            <p:childTnLst>
+                              <p:par>
+                                <p:cTn id="34" presetID="10" presetClass="entr" presetSubtype="0" fill="hold" grpId="0" nodeType="withEffect">
+                                  <p:stCondLst>
+                                    <p:cond delay="0"/>
+                                  </p:stCondLst>
+                                  <p:childTnLst>
+                                    <p:set>
+                                      <p:cBhvr>
+                                        <p:cTn id="35" dur="1" fill="hold">
+                                          <p:stCondLst>
+                                            <p:cond delay="0"/>
+                                          </p:stCondLst>
+                                        </p:cTn>
+                                        <p:tgtEl>
+                                          <p:spTgt spid="8"/>
+                                        </p:tgtEl>
+                                        <p:attrNameLst>
+                                          <p:attrName>style.visibility</p:attrName>
+                                        </p:attrNameLst>
+                                      </p:cBhvr>
+                                      <p:to>
+                                        <p:strVal val="visible"/>
+                                      </p:to>
+                                    </p:set>
+                                    <p:animEffect transition="in" filter="fade">
+                                      <p:cBhvr>
+                                        <p:cTn id="36" dur="500"/>
+                                        <p:tgtEl>
+                                          <p:spTgt spid="8"/>
+                                        </p:tgtEl>
+                                      </p:cBhvr>
+                                    </p:animEffect>
+                                  </p:childTnLst>
+                                </p:cTn>
+                              </p:par>
+                            </p:childTnLst>
+                          </p:cTn>
+                        </p:par>
+                      </p:childTnLst>
+                    </p:cTn>
+                  </p:par>
+                  <p:par>
+                    <p:cTn id="37" fill="hold">
+                      <p:stCondLst>
+                        <p:cond delay="indefinite"/>
+                      </p:stCondLst>
+                      <p:childTnLst>
+                        <p:par>
+                          <p:cTn id="38" fill="hold">
+                            <p:stCondLst>
+                              <p:cond delay="0"/>
+                            </p:stCondLst>
+                            <p:childTnLst>
+                              <p:par>
+                                <p:cTn id="39" presetID="10" presetClass="entr" presetSubtype="0" fill="hold" grpId="0" nodeType="clickEffect">
+                                  <p:stCondLst>
+                                    <p:cond delay="0"/>
+                                  </p:stCondLst>
+                                  <p:childTnLst>
+                                    <p:set>
+                                      <p:cBhvr>
+                                        <p:cTn id="40" dur="1" fill="hold">
+                                          <p:stCondLst>
+                                            <p:cond delay="0"/>
+                                          </p:stCondLst>
+                                        </p:cTn>
+                                        <p:tgtEl>
+                                          <p:spTgt spid="12"/>
+                                        </p:tgtEl>
+                                        <p:attrNameLst>
+                                          <p:attrName>style.visibility</p:attrName>
+                                        </p:attrNameLst>
+                                      </p:cBhvr>
+                                      <p:to>
+                                        <p:strVal val="visible"/>
+                                      </p:to>
+                                    </p:set>
+                                    <p:animEffect transition="in" filter="fade">
+                                      <p:cBhvr>
+                                        <p:cTn id="41" dur="500"/>
+                                        <p:tgtEl>
+                                          <p:spTgt spid="12"/>
+                                        </p:tgtEl>
+                                      </p:cBhvr>
+                                    </p:animEffect>
+                                  </p:childTnLst>
+                                </p:cTn>
+                              </p:par>
+                            </p:childTnLst>
+                          </p:cTn>
+                        </p:par>
+                        <p:par>
+                          <p:cTn id="42" fill="hold">
+                            <p:stCondLst>
+                              <p:cond delay="0"/>
+                            </p:stCondLst>
+                            <p:childTnLst>
+                              <p:par>
+                                <p:cTn id="43" presetID="10" presetClass="entr" presetSubtype="0" fill="hold" grpId="0" nodeType="withEffect">
+                                  <p:stCondLst>
+                                    <p:cond delay="0"/>
+                                  </p:stCondLst>
+                                  <p:childTnLst>
+                                    <p:set>
+                                      <p:cBhvr>
+                                        <p:cTn id="44" dur="1" fill="hold">
+                                          <p:stCondLst>
+                                            <p:cond delay="0"/>
+                                          </p:stCondLst>
+                                        </p:cTn>
+                                        <p:tgtEl>
+                                          <p:spTgt spid="13"/>
+                                        </p:tgtEl>
+                                        <p:attrNameLst>
+                                          <p:attrName>style.visibility</p:attrName>
+                                        </p:attrNameLst>
+                                      </p:cBhvr>
+                                      <p:to>
+                                        <p:strVal val="visible"/>
+                                      </p:to>
+                                    </p:set>
+                                    <p:animEffect transition="in" filter="fade">
+                                      <p:cBhvr>
+                                        <p:cTn id="45" dur="500"/>
+                                        <p:tgtEl>
+                                          <p:spTgt spid="13"/>
+                                        </p:tgtEl>
+                                      </p:cBhvr>
+                                    </p:animEffect>
+                                  </p:childTnLst>
+                                </p:cTn>
+                              </p:par>
+                            </p:childTnLst>
+                          </p:cTn>
+                        </p:par>
+                        <p:par>
+                          <p:cTn id="46" fill="hold">
+                            <p:stCondLst>
+                              <p:cond delay="0"/>
+                            </p:stCondLst>
+                            <p:childTnLst>
+                              <p:par>
+                                <p:cTn id="47" presetID="10" presetClass="entr" presetSubtype="0" fill="hold" grpId="0" nodeType="withEffect">
+                                  <p:stCondLst>
+                                    <p:cond delay="0"/>
+                                  </p:stCondLst>
+                                  <p:childTnLst>
+                                    <p:set>
+                                      <p:cBhvr>
+                                        <p:cTn id="48" dur="1" fill="hold">
+                                          <p:stCondLst>
+                                            <p:cond delay="0"/>
+                                          </p:stCondLst>
+                                        </p:cTn>
+                                        <p:tgtEl>
+                                          <p:spTgt spid="15"/>
+                                        </p:tgtEl>
+                                        <p:attrNameLst>
+                                          <p:attrName>style.visibility</p:attrName>
+                                        </p:attrNameLst>
+                                      </p:cBhvr>
+                                      <p:to>
+                                        <p:strVal val="visible"/>
+                                      </p:to>
+                                    </p:set>
+                                    <p:animEffect transition="in" filter="fade">
+                                      <p:cBhvr>
+                                        <p:cTn id="49" dur="500"/>
+                                        <p:tgtEl>
+                                          <p:spTgt spid="15"/>
+                                        </p:tgtEl>
+                                      </p:cBhvr>
+                                    </p:animEffect>
+                                  </p:childTnLst>
+                                </p:cTn>
+                              </p:par>
+                            </p:childTnLst>
+                          </p:cTn>
+                        </p:par>
+                        <p:par>
+                          <p:cTn id="50" fill="hold">
+                            <p:stCondLst>
+                              <p:cond delay="0"/>
+                            </p:stCondLst>
+                            <p:childTnLst>
+                              <p:par>
+                                <p:cTn id="51" presetID="10" presetClass="entr" presetSubtype="0" fill="hold" grpId="0" nodeType="withEffect">
+                                  <p:stCondLst>
+                                    <p:cond delay="0"/>
+                                  </p:stCondLst>
+                                  <p:childTnLst>
+                                    <p:set>
+                                      <p:cBhvr>
+                                        <p:cTn id="52" dur="1" fill="hold">
+                                          <p:stCondLst>
+                                            <p:cond delay="0"/>
+                                          </p:stCondLst>
+                                        </p:cTn>
+                                        <p:tgtEl>
+                                          <p:spTgt spid="16"/>
+                                        </p:tgtEl>
+                                        <p:attrNameLst>
+                                          <p:attrName>style.visibility</p:attrName>
+                                        </p:attrNameLst>
+                                      </p:cBhvr>
+                                      <p:to>
+                                        <p:strVal val="visible"/>
+                                      </p:to>
+                                    </p:set>
+                                    <p:animEffect transition="in" filter="fade">
+                                      <p:cBhvr>
+                                        <p:cTn id="53" dur="500"/>
+                                        <p:tgtEl>
+                                          <p:spTgt spid="16"/>
+                                        </p:tgtEl>
+                                      </p:cBhvr>
+                                    </p:animEffect>
+                                  </p:childTnLst>
+                                </p:cTn>
+                              </p:par>
+                            </p:childTnLst>
+                          </p:cTn>
+                        </p:par>
+                        <p:par>
+                          <p:cTn id="54" fill="hold">
+                            <p:stCondLst>
+                              <p:cond delay="0"/>
+                            </p:stCondLst>
+                            <p:childTnLst>
+                              <p:par>
+                                <p:cTn id="55" presetID="10" presetClass="entr" presetSubtype="0" fill="hold" grpId="0" nodeType="withEffect">
+                                  <p:stCondLst>
+                                    <p:cond delay="0"/>
+                                  </p:stCondLst>
+                                  <p:childTnLst>
+                                    <p:set>
+                                      <p:cBhvr>
+                                        <p:cTn id="56" dur="1" fill="hold">
+                                          <p:stCondLst>
+                                            <p:cond delay="0"/>
+                                          </p:stCondLst>
+                                        </p:cTn>
+                                        <p:tgtEl>
+                                          <p:spTgt spid="17"/>
+                                        </p:tgtEl>
+                                        <p:attrNameLst>
+                                          <p:attrName>style.visibility</p:attrName>
+                                        </p:attrNameLst>
+                                      </p:cBhvr>
+                                      <p:to>
+                                        <p:strVal val="visible"/>
+                                      </p:to>
+                                    </p:set>
+                                    <p:animEffect transition="in" filter="fade">
+                                      <p:cBhvr>
+                                        <p:cTn id="57" dur="500"/>
+                                        <p:tgtEl>
+                                          <p:spTgt spid="17"/>
+                                        </p:tgtEl>
+                                      </p:cBhvr>
+                                    </p:animEffect>
+                                  </p:childTnLst>
+                                </p:cTn>
+                              </p:par>
+                            </p:childTnLst>
+                          </p:cTn>
+                        </p:par>
+                        <p:par>
+                          <p:cTn id="58" fill="hold">
+                            <p:stCondLst>
+                              <p:cond delay="0"/>
+                            </p:stCondLst>
+                            <p:childTnLst>
+                              <p:par>
+                                <p:cTn id="59" presetID="10" presetClass="entr" presetSubtype="0" fill="hold" grpId="0" nodeType="withEffect">
+                                  <p:stCondLst>
+                                    <p:cond delay="0"/>
+                                  </p:stCondLst>
+                                  <p:childTnLst>
+                                    <p:set>
+                                      <p:cBhvr>
+                                        <p:cTn id="60" dur="1" fill="hold">
+                                          <p:stCondLst>
+                                            <p:cond delay="0"/>
+                                          </p:stCondLst>
+                                        </p:cTn>
+                                        <p:tgtEl>
+                                          <p:spTgt spid="14"/>
+                                        </p:tgtEl>
+                                        <p:attrNameLst>
+                                          <p:attrName>style.visibility</p:attrName>
+                                        </p:attrNameLst>
+                                      </p:cBhvr>
+                                      <p:to>
+                                        <p:strVal val="visible"/>
+                                      </p:to>
+                                    </p:set>
+                                    <p:animEffect transition="in" filter="fade">
+                                      <p:cBhvr>
+                                        <p:cTn id="61" dur="500"/>
+                                        <p:tgtEl>
+                                          <p:spTgt spid="14"/>
+                                        </p:tgtEl>
+                                      </p:cBhvr>
+                                    </p:animEffect>
+                                  </p:childTnLst>
+                                </p:cTn>
+                              </p:par>
+                            </p:childTnLst>
+                          </p:cTn>
+                        </p:par>
+                      </p:childTnLst>
+                    </p:cTn>
+                  </p:par>
+                  <p:par>
+                    <p:cTn id="62" fill="hold">
+                      <p:stCondLst>
+                        <p:cond delay="indefinite"/>
+                      </p:stCondLst>
+                      <p:childTnLst>
+                        <p:par>
+                          <p:cTn id="63" fill="hold">
+                            <p:stCondLst>
+                              <p:cond delay="0"/>
+                            </p:stCondLst>
+                            <p:childTnLst>
+                              <p:par>
+                                <p:cTn id="64" presetID="10" presetClass="entr" presetSubtype="0" fill="hold" grpId="0" nodeType="clickEffect">
+                                  <p:stCondLst>
+                                    <p:cond delay="0"/>
+                                  </p:stCondLst>
+                                  <p:childTnLst>
+                                    <p:set>
+                                      <p:cBhvr>
+                                        <p:cTn id="65" dur="1" fill="hold">
+                                          <p:stCondLst>
+                                            <p:cond delay="0"/>
+                                          </p:stCondLst>
+                                        </p:cTn>
+                                        <p:tgtEl>
+                                          <p:spTgt spid="18"/>
+                                        </p:tgtEl>
+                                        <p:attrNameLst>
+                                          <p:attrName>style.visibility</p:attrName>
+                                        </p:attrNameLst>
+                                      </p:cBhvr>
+                                      <p:to>
+                                        <p:strVal val="visible"/>
+                                      </p:to>
+                                    </p:set>
+                                    <p:animEffect transition="in" filter="fade">
+                                      <p:cBhvr>
+                                        <p:cTn id="66" dur="500"/>
+                                        <p:tgtEl>
+                                          <p:spTgt spid="18"/>
+                                        </p:tgtEl>
+                                      </p:cBhvr>
+                                    </p:animEffect>
+                                  </p:childTnLst>
+                                </p:cTn>
+                              </p:par>
+                            </p:childTnLst>
+                          </p:cTn>
+                        </p:par>
+                        <p:par>
+                          <p:cTn id="67" fill="hold">
+                            <p:stCondLst>
+                              <p:cond delay="0"/>
+                            </p:stCondLst>
+                            <p:childTnLst>
+                              <p:par>
+                                <p:cTn id="68" presetID="10" presetClass="entr" presetSubtype="0" fill="hold" grpId="0" nodeType="withEffect">
+                                  <p:stCondLst>
+                                    <p:cond delay="0"/>
+                                  </p:stCondLst>
+                                  <p:childTnLst>
+                                    <p:set>
+                                      <p:cBhvr>
+                                        <p:cTn id="69" dur="1" fill="hold">
+                                          <p:stCondLst>
+                                            <p:cond delay="0"/>
+                                          </p:stCondLst>
+                                        </p:cTn>
+                                        <p:tgtEl>
+                                          <p:spTgt spid="19"/>
+                                        </p:tgtEl>
+                                        <p:attrNameLst>
+                                          <p:attrName>style.visibility</p:attrName>
+                                        </p:attrNameLst>
+                                      </p:cBhvr>
+                                      <p:to>
+                                        <p:strVal val="visible"/>
+                                      </p:to>
+                                    </p:set>
+                                    <p:animEffect transition="in" filter="fade">
+                                      <p:cBhvr>
+                                        <p:cTn id="70" dur="500"/>
+                                        <p:tgtEl>
+                                          <p:spTgt spid="19"/>
+                                        </p:tgtEl>
+                                      </p:cBhvr>
+                                    </p:animEffect>
+                                  </p:childTnLst>
+                                </p:cTn>
+                              </p:par>
+                            </p:childTnLst>
+                          </p:cTn>
+                        </p:par>
+                        <p:par>
+                          <p:cTn id="71" fill="hold">
+                            <p:stCondLst>
+                              <p:cond delay="0"/>
+                            </p:stCondLst>
+                            <p:childTnLst>
+                              <p:par>
+                                <p:cTn id="72" presetID="10" presetClass="entr" presetSubtype="0" fill="hold" grpId="0" nodeType="withEffect">
+                                  <p:stCondLst>
+                                    <p:cond delay="0"/>
+                                  </p:stCondLst>
+                                  <p:childTnLst>
+                                    <p:set>
+                                      <p:cBhvr>
+                                        <p:cTn id="73" dur="1" fill="hold">
+                                          <p:stCondLst>
+                                            <p:cond delay="0"/>
+                                          </p:stCondLst>
+                                        </p:cTn>
+                                        <p:tgtEl>
+                                          <p:spTgt spid="21"/>
+                                        </p:tgtEl>
+                                        <p:attrNameLst>
+                                          <p:attrName>style.visibility</p:attrName>
+                                        </p:attrNameLst>
+                                      </p:cBhvr>
+                                      <p:to>
+                                        <p:strVal val="visible"/>
+                                      </p:to>
+                                    </p:set>
+                                    <p:animEffect transition="in" filter="fade">
+                                      <p:cBhvr>
+                                        <p:cTn id="74" dur="500"/>
+                                        <p:tgtEl>
+                                          <p:spTgt spid="21"/>
+                                        </p:tgtEl>
+                                      </p:cBhvr>
+                                    </p:animEffect>
+                                  </p:childTnLst>
+                                </p:cTn>
+                              </p:par>
+                            </p:childTnLst>
+                          </p:cTn>
+                        </p:par>
+                        <p:par>
+                          <p:cTn id="75" fill="hold">
+                            <p:stCondLst>
+                              <p:cond delay="0"/>
+                            </p:stCondLst>
+                            <p:childTnLst>
+                              <p:par>
+                                <p:cTn id="76" presetID="10" presetClass="entr" presetSubtype="0" fill="hold" grpId="0" nodeType="withEffect">
+                                  <p:stCondLst>
+                                    <p:cond delay="0"/>
+                                  </p:stCondLst>
+                                  <p:childTnLst>
+                                    <p:set>
+                                      <p:cBhvr>
+                                        <p:cTn id="77" dur="1" fill="hold">
+                                          <p:stCondLst>
+                                            <p:cond delay="0"/>
+                                          </p:stCondLst>
+                                        </p:cTn>
+                                        <p:tgtEl>
+                                          <p:spTgt spid="22"/>
+                                        </p:tgtEl>
+                                        <p:attrNameLst>
+                                          <p:attrName>style.visibility</p:attrName>
+                                        </p:attrNameLst>
+                                      </p:cBhvr>
+                                      <p:to>
+                                        <p:strVal val="visible"/>
+                                      </p:to>
+                                    </p:set>
+                                    <p:animEffect transition="in" filter="fade">
+                                      <p:cBhvr>
+                                        <p:cTn id="78" dur="500"/>
+                                        <p:tgtEl>
+                                          <p:spTgt spid="22"/>
+                                        </p:tgtEl>
+                                      </p:cBhvr>
+                                    </p:animEffect>
+                                  </p:childTnLst>
+                                </p:cTn>
+                              </p:par>
+                            </p:childTnLst>
+                          </p:cTn>
+                        </p:par>
+                        <p:par>
+                          <p:cTn id="79" fill="hold">
+                            <p:stCondLst>
+                              <p:cond delay="0"/>
+                            </p:stCondLst>
+                            <p:childTnLst>
+                              <p:par>
+                                <p:cTn id="80" presetID="10" presetClass="entr" presetSubtype="0" fill="hold" grpId="0" nodeType="withEffect">
+                                  <p:stCondLst>
+                                    <p:cond delay="0"/>
+                                  </p:stCondLst>
+                                  <p:childTnLst>
+                                    <p:set>
+                                      <p:cBhvr>
+                                        <p:cTn id="81" dur="1" fill="hold">
+                                          <p:stCondLst>
+                                            <p:cond delay="0"/>
+                                          </p:stCondLst>
+                                        </p:cTn>
+                                        <p:tgtEl>
+                                          <p:spTgt spid="23"/>
+                                        </p:tgtEl>
+                                        <p:attrNameLst>
+                                          <p:attrName>style.visibility</p:attrName>
+                                        </p:attrNameLst>
+                                      </p:cBhvr>
+                                      <p:to>
+                                        <p:strVal val="visible"/>
+                                      </p:to>
+                                    </p:set>
+                                    <p:animEffect transition="in" filter="fade">
+                                      <p:cBhvr>
+                                        <p:cTn id="82" dur="500"/>
+                                        <p:tgtEl>
+                                          <p:spTgt spid="23"/>
+                                        </p:tgtEl>
+                                      </p:cBhvr>
+                                    </p:animEffect>
+                                  </p:childTnLst>
+                                </p:cTn>
+                              </p:par>
+                            </p:childTnLst>
+                          </p:cTn>
+                        </p:par>
+                        <p:par>
+                          <p:cTn id="83" fill="hold">
+                            <p:stCondLst>
+                              <p:cond delay="0"/>
+                            </p:stCondLst>
+                            <p:childTnLst>
+                              <p:par>
+                                <p:cTn id="84" presetID="10" presetClass="entr" presetSubtype="0" fill="hold" grpId="0" nodeType="withEffect">
+                                  <p:stCondLst>
+                                    <p:cond delay="0"/>
+                                  </p:stCondLst>
+                                  <p:childTnLst>
+                                    <p:set>
+                                      <p:cBhvr>
+                                        <p:cTn id="85" dur="1" fill="hold">
+                                          <p:stCondLst>
+                                            <p:cond delay="0"/>
+                                          </p:stCondLst>
+                                        </p:cTn>
+                                        <p:tgtEl>
+                                          <p:spTgt spid="20"/>
+                                        </p:tgtEl>
+                                        <p:attrNameLst>
+                                          <p:attrName>style.visibility</p:attrName>
+                                        </p:attrNameLst>
+                                      </p:cBhvr>
+                                      <p:to>
+                                        <p:strVal val="visible"/>
+                                      </p:to>
+                                    </p:set>
+                                    <p:animEffect transition="in" filter="fade">
+                                      <p:cBhvr>
+                                        <p:cTn id="86" dur="500"/>
+                                        <p:tgtEl>
+                                          <p:spTgt spid="20"/>
+                                        </p:tgtEl>
+                                      </p:cBhvr>
+                                    </p:animEffect>
+                                  </p:childTnLst>
+                                </p:cTn>
+                              </p:par>
+                            </p:childTnLst>
+                          </p:cTn>
+                        </p:par>
+                      </p:childTnLst>
+                    </p:cTn>
+                  </p:par>
+                  <p:par>
+                    <p:cTn id="87" fill="hold">
+                      <p:stCondLst>
+                        <p:cond delay="indefinite"/>
+                      </p:stCondLst>
+                      <p:childTnLst>
+                        <p:par>
+                          <p:cTn id="88" fill="hold">
+                            <p:stCondLst>
+                              <p:cond delay="0"/>
+                            </p:stCondLst>
+                            <p:childTnLst>
+                              <p:par>
+                                <p:cTn id="89" presetID="10" presetClass="entr" presetSubtype="0" fill="hold" grpId="0" nodeType="clickEffect">
+                                  <p:stCondLst>
+                                    <p:cond delay="0"/>
+                                  </p:stCondLst>
+                                  <p:childTnLst>
+                                    <p:set>
+                                      <p:cBhvr>
+                                        <p:cTn id="90" dur="1" fill="hold">
+                                          <p:stCondLst>
+                                            <p:cond delay="0"/>
+                                          </p:stCondLst>
+                                        </p:cTn>
+                                        <p:tgtEl>
+                                          <p:spTgt spid="24"/>
+                                        </p:tgtEl>
+                                        <p:attrNameLst>
+                                          <p:attrName>style.visibility</p:attrName>
+                                        </p:attrNameLst>
+                                      </p:cBhvr>
+                                      <p:to>
+                                        <p:strVal val="visible"/>
+                                      </p:to>
+                                    </p:set>
+                                    <p:animEffect transition="in" filter="fade">
+                                      <p:cBhvr>
+                                        <p:cTn id="91" dur="500"/>
+                                        <p:tgtEl>
+                                          <p:spTgt spid="24"/>
+                                        </p:tgtEl>
+                                      </p:cBhvr>
+                                    </p:animEffect>
+                                  </p:childTnLst>
+                                </p:cTn>
+                              </p:par>
+                            </p:childTnLst>
+                          </p:cTn>
+                        </p:par>
+                        <p:par>
+                          <p:cTn id="92" fill="hold">
+                            <p:stCondLst>
+                              <p:cond delay="0"/>
+                            </p:stCondLst>
+                            <p:childTnLst>
+                              <p:par>
+                                <p:cTn id="93" presetID="10" presetClass="entr" presetSubtype="0" fill="hold" grpId="0" nodeType="withEffect">
+                                  <p:stCondLst>
+                                    <p:cond delay="0"/>
+                                  </p:stCondLst>
+                                  <p:childTnLst>
+                                    <p:set>
+                                      <p:cBhvr>
+                                        <p:cTn id="94" dur="1" fill="hold">
+                                          <p:stCondLst>
+                                            <p:cond delay="0"/>
+                                          </p:stCondLst>
+                                        </p:cTn>
+                                        <p:tgtEl>
+                                          <p:spTgt spid="25"/>
+                                        </p:tgtEl>
+                                        <p:attrNameLst>
+                                          <p:attrName>style.visibility</p:attrName>
+                                        </p:attrNameLst>
+                                      </p:cBhvr>
+                                      <p:to>
+                                        <p:strVal val="visible"/>
+                                      </p:to>
+                                    </p:set>
+                                    <p:animEffect transition="in" filter="fade">
+                                      <p:cBhvr>
+                                        <p:cTn id="95" dur="500"/>
+                                        <p:tgtEl>
+                                          <p:spTgt spid="25"/>
+                                        </p:tgtEl>
+                                      </p:cBhvr>
+                                    </p:animEffect>
+                                  </p:childTnLst>
+                                </p:cTn>
+                              </p:par>
+                            </p:childTnLst>
+                          </p:cTn>
+                        </p:par>
+                        <p:par>
+                          <p:cTn id="96" fill="hold">
+                            <p:stCondLst>
+                              <p:cond delay="0"/>
+                            </p:stCondLst>
+                            <p:childTnLst>
+                              <p:par>
+                                <p:cTn id="97" presetID="10" presetClass="entr" presetSubtype="0" fill="hold" grpId="0" nodeType="withEffect">
+                                  <p:stCondLst>
+                                    <p:cond delay="0"/>
+                                  </p:stCondLst>
+                                  <p:childTnLst>
+                                    <p:set>
+                                      <p:cBhvr>
+                                        <p:cTn id="98" dur="1" fill="hold">
+                                          <p:stCondLst>
+                                            <p:cond delay="0"/>
+                                          </p:stCondLst>
+                                        </p:cTn>
+                                        <p:tgtEl>
+                                          <p:spTgt spid="27"/>
+                                        </p:tgtEl>
+                                        <p:attrNameLst>
+                                          <p:attrName>style.visibility</p:attrName>
+                                        </p:attrNameLst>
+                                      </p:cBhvr>
+                                      <p:to>
+                                        <p:strVal val="visible"/>
+                                      </p:to>
+                                    </p:set>
+                                    <p:animEffect transition="in" filter="fade">
+                                      <p:cBhvr>
+                                        <p:cTn id="99" dur="500"/>
+                                        <p:tgtEl>
+                                          <p:spTgt spid="27"/>
+                                        </p:tgtEl>
+                                      </p:cBhvr>
+                                    </p:animEffect>
+                                  </p:childTnLst>
+                                </p:cTn>
+                              </p:par>
+                            </p:childTnLst>
+                          </p:cTn>
+                        </p:par>
+                        <p:par>
+                          <p:cTn id="100" fill="hold">
+                            <p:stCondLst>
+                              <p:cond delay="0"/>
+                            </p:stCondLst>
+                            <p:childTnLst>
+                              <p:par>
+                                <p:cTn id="101" presetID="10" presetClass="entr" presetSubtype="0" fill="hold" grpId="0" nodeType="withEffect">
+                                  <p:stCondLst>
+                                    <p:cond delay="0"/>
+                                  </p:stCondLst>
+                                  <p:childTnLst>
+                                    <p:set>
+                                      <p:cBhvr>
+                                        <p:cTn id="102" dur="1" fill="hold">
+                                          <p:stCondLst>
+                                            <p:cond delay="0"/>
+                                          </p:stCondLst>
+                                        </p:cTn>
+                                        <p:tgtEl>
+                                          <p:spTgt spid="28"/>
+                                        </p:tgtEl>
+                                        <p:attrNameLst>
+                                          <p:attrName>style.visibility</p:attrName>
+                                        </p:attrNameLst>
+                                      </p:cBhvr>
+                                      <p:to>
+                                        <p:strVal val="visible"/>
+                                      </p:to>
+                                    </p:set>
+                                    <p:animEffect transition="in" filter="fade">
+                                      <p:cBhvr>
+                                        <p:cTn id="103" dur="500"/>
+                                        <p:tgtEl>
+                                          <p:spTgt spid="28"/>
+                                        </p:tgtEl>
+                                      </p:cBhvr>
+                                    </p:animEffect>
+                                  </p:childTnLst>
+                                </p:cTn>
+                              </p:par>
+                            </p:childTnLst>
+                          </p:cTn>
+                        </p:par>
+                        <p:par>
+                          <p:cTn id="104" fill="hold">
+                            <p:stCondLst>
+                              <p:cond delay="0"/>
+                            </p:stCondLst>
+                            <p:childTnLst>
+                              <p:par>
+                                <p:cTn id="105" presetID="10" presetClass="entr" presetSubtype="0" fill="hold" grpId="0" nodeType="withEffect">
+                                  <p:stCondLst>
+                                    <p:cond delay="0"/>
+                                  </p:stCondLst>
+                                  <p:childTnLst>
+                                    <p:set>
+                                      <p:cBhvr>
+                                        <p:cTn id="106" dur="1" fill="hold">
+                                          <p:stCondLst>
+                                            <p:cond delay="0"/>
+                                          </p:stCondLst>
+                                        </p:cTn>
+                                        <p:tgtEl>
+                                          <p:spTgt spid="29"/>
+                                        </p:tgtEl>
+                                        <p:attrNameLst>
+                                          <p:attrName>style.visibility</p:attrName>
+                                        </p:attrNameLst>
+                                      </p:cBhvr>
+                                      <p:to>
+                                        <p:strVal val="visible"/>
+                                      </p:to>
+                                    </p:set>
+                                    <p:animEffect transition="in" filter="fade">
+                                      <p:cBhvr>
+                                        <p:cTn id="107" dur="500"/>
+                                        <p:tgtEl>
+                                          <p:spTgt spid="29"/>
+                                        </p:tgtEl>
+                                      </p:cBhvr>
+                                    </p:animEffect>
+                                  </p:childTnLst>
+                                </p:cTn>
+                              </p:par>
+                            </p:childTnLst>
+                          </p:cTn>
+                        </p:par>
+                        <p:par>
+                          <p:cTn id="108" fill="hold">
+                            <p:stCondLst>
+                              <p:cond delay="0"/>
+                            </p:stCondLst>
+                            <p:childTnLst>
+                              <p:par>
+                                <p:cTn id="109" presetID="10" presetClass="entr" presetSubtype="0" fill="hold" grpId="0" nodeType="withEffect">
+                                  <p:stCondLst>
+                                    <p:cond delay="0"/>
+                                  </p:stCondLst>
+                                  <p:childTnLst>
+                                    <p:set>
+                                      <p:cBhvr>
+                                        <p:cTn id="110" dur="1" fill="hold">
+                                          <p:stCondLst>
+                                            <p:cond delay="0"/>
+                                          </p:stCondLst>
+                                        </p:cTn>
+                                        <p:tgtEl>
+                                          <p:spTgt spid="26"/>
+                                        </p:tgtEl>
+                                        <p:attrNameLst>
+                                          <p:attrName>style.visibility</p:attrName>
+                                        </p:attrNameLst>
+                                      </p:cBhvr>
+                                      <p:to>
+                                        <p:strVal val="visible"/>
+                                      </p:to>
+                                    </p:set>
+                                    <p:animEffect transition="in" filter="fade">
+                                      <p:cBhvr>
+                                        <p:cTn id="111" dur="500"/>
+                                        <p:tgtEl>
+                                          <p:spTgt spid="26"/>
+                                        </p:tgtEl>
+                                      </p:cBhvr>
+                                    </p:animEffect>
+                                  </p:childTnLst>
+                                </p:cTn>
+                              </p:par>
+                            </p:childTnLst>
+                          </p:cTn>
+                        </p:par>
+                      </p:childTnLst>
+                    </p:cTn>
+                  </p:par>
+                </p:childTnLst>
+              </p:cTn>
+              <p:prevCondLst>
+                <p:cond evt="onPrev" delay="0">
+                  <p:tgtEl>
+                    <p:sldTgt/>
+                  </p:tgtEl>
+                </p:cond>
+              </p:prevCondLst>
+              <p:nextCondLst>
+                <p:cond evt="onNext" delay="0">
+                  <p:tgtEl>
+                    <p:sldTgt/>
+                  </p:tgtEl>
+                </p:cond>
+              </p:nextCondLst>
+            </p:seq>
+          </p:childTnLst>
+        </p:cTn>
+      </p:par>
+    </p:tnLst>
+    <p:bldLst>
+      <p:bldP spid="4" grpId="0"/>
+      <p:bldP spid="5" grpId="0"/>
+      <p:bldP spid="6" grpId="0"/>
+      <p:bldP spid="7" grpId="0"/>
+      <p:bldP spid="9" grpId="0"/>
+      <p:bldP spid="10" grpId="0"/>
+      <p:bldP spid="11" grpId="0"/>
+      <p:bldP spid="8" grpId="0"/>
+      <p:bldP spid="12" grpId="0"/>
+      <p:bldP spid="13" grpId="0"/>
+      <p:bldP spid="15" grpId="0"/>
+      <p:bldP spid="16" grpId="0"/>
+      <p:bldP spid="17" grpId="0"/>
+      <p:bldP spid="14" grpId="0"/>
+      <p:bldP spid="18" grpId="0"/>
+      <p:bldP spid="19" grpId="0"/>
+      <p:bldP spid="21" grpId="0"/>
+      <p:bldP spid="22" grpId="0"/>
+      <p:bldP spid="23" grpId="0"/>
+      <p:bldP spid="20" grpId="0"/>
+      <p:bldP spid="24" grpId="0"/>
+      <p:bldP spid="25" grpId="0"/>
+      <p:bldP spid="27" grpId="0"/>
+      <p:bldP spid="28" grpId="0"/>
+      <p:bldP spid="29" grpId="0"/>
+      <p:bldP spid="26" grpId="0"/>
+    </p:bldLst>
+  </p:timing>
 </p:sld>
 </file>
 
@@ -4329,7 +6729,7 @@
       </p:grpSpPr>
       <p:sp>
         <p:nvSpPr>
-          <p:cNvPr id="2" name="Text 0"/>
+          <p:cNvPr id="2" name="c1-1"/>
           <p:cNvSpPr txBox="1"/>
           <p:nvPr/>
         </p:nvSpPr>
@@ -4365,7 +6765,7 @@
       </p:sp>
       <p:graphicFrame>
         <p:nvGraphicFramePr>
-          <p:cNvPr id="3" name="Chart 0" descr=""/>
+          <p:cNvPr id="3" name="c2-2" descr=""/>
           <p:cNvGraphicFramePr/>
           <p:nvPr/>
         </p:nvGraphicFramePr>
@@ -4381,7 +6781,7 @@
       </p:graphicFrame>
       <p:sp>
         <p:nvSpPr>
-          <p:cNvPr id="4" name="Shape 1"/>
+          <p:cNvPr id="4" name="c3-3"/>
           <p:cNvSpPr/>
           <p:nvPr/>
         </p:nvSpPr>
@@ -4410,7 +6810,7 @@
       </p:sp>
       <p:sp>
         <p:nvSpPr>
-          <p:cNvPr id="5" name="Shape 2"/>
+          <p:cNvPr id="5" name="c3-4bg"/>
           <p:cNvSpPr/>
           <p:nvPr/>
         </p:nvSpPr>
@@ -4432,7 +6832,7 @@
       </p:sp>
       <p:pic>
         <p:nvPicPr>
-          <p:cNvPr id="6" name="Image 0" descr="preencoded.png">    </p:cNvPr>
+          <p:cNvPr id="6" name="c3-4ic" descr="preencoded.png">    </p:cNvPr>
           <p:cNvPicPr>
             <a:picLocks noChangeAspect="1"/>
           </p:cNvPicPr>
@@ -4456,7 +6856,7 @@
       </p:pic>
       <p:sp>
         <p:nvSpPr>
-          <p:cNvPr id="7" name="Text 3"/>
+          <p:cNvPr id="7" name="c3-5"/>
           <p:cNvSpPr txBox="1"/>
           <p:nvPr/>
         </p:nvSpPr>
@@ -4495,7 +6895,7 @@
       </p:sp>
       <p:sp>
         <p:nvSpPr>
-          <p:cNvPr id="8" name="Shape 4"/>
+          <p:cNvPr id="8" name="c3-6"/>
           <p:cNvSpPr/>
           <p:nvPr/>
         </p:nvSpPr>
@@ -4524,7 +6924,7 @@
       </p:sp>
       <p:sp>
         <p:nvSpPr>
-          <p:cNvPr id="9" name="Shape 5"/>
+          <p:cNvPr id="9" name="c3-7bg"/>
           <p:cNvSpPr/>
           <p:nvPr/>
         </p:nvSpPr>
@@ -4546,7 +6946,7 @@
       </p:sp>
       <p:pic>
         <p:nvPicPr>
-          <p:cNvPr id="10" name="Image 1" descr="preencoded.png">    </p:cNvPr>
+          <p:cNvPr id="10" name="c3-7ic" descr="preencoded.png">    </p:cNvPr>
           <p:cNvPicPr>
             <a:picLocks noChangeAspect="1"/>
           </p:cNvPicPr>
@@ -4570,7 +6970,7 @@
       </p:pic>
       <p:sp>
         <p:nvSpPr>
-          <p:cNvPr id="11" name="Text 6"/>
+          <p:cNvPr id="11" name="c3-8"/>
           <p:cNvSpPr txBox="1"/>
           <p:nvPr/>
         </p:nvSpPr>
@@ -4609,7 +7009,7 @@
       </p:sp>
       <p:sp>
         <p:nvSpPr>
-          <p:cNvPr id="12" name="Shape 7"/>
+          <p:cNvPr id="12" name="c3-9"/>
           <p:cNvSpPr/>
           <p:nvPr/>
         </p:nvSpPr>
@@ -4638,7 +7038,7 @@
       </p:sp>
       <p:sp>
         <p:nvSpPr>
-          <p:cNvPr id="13" name="Shape 8"/>
+          <p:cNvPr id="13" name="c3-10bg"/>
           <p:cNvSpPr/>
           <p:nvPr/>
         </p:nvSpPr>
@@ -4660,7 +7060,7 @@
       </p:sp>
       <p:pic>
         <p:nvPicPr>
-          <p:cNvPr id="14" name="Image 2" descr="preencoded.png">    </p:cNvPr>
+          <p:cNvPr id="14" name="c3-10ic" descr="preencoded.png">    </p:cNvPr>
           <p:cNvPicPr>
             <a:picLocks noChangeAspect="1"/>
           </p:cNvPicPr>
@@ -4684,7 +7084,7 @@
       </p:pic>
       <p:sp>
         <p:nvSpPr>
-          <p:cNvPr id="15" name="Text 9"/>
+          <p:cNvPr id="15" name="c3-11"/>
           <p:cNvSpPr txBox="1"/>
           <p:nvPr/>
         </p:nvSpPr>
@@ -4771,6 +7171,697 @@
   <p:clrMapOvr>
     <a:masterClrMapping/>
   </p:clrMapOvr>
+  <p:timing>
+    <p:tnLst>
+      <p:par>
+        <p:cTn id="1" dur="indefinite" restart="never" nodeType="tmRoot">
+          <p:childTnLst>
+            <p:seq concurrent="1" nextAc="seek">
+              <p:cTn id="2" dur="indefinite" nodeType="mainSeq">
+                <p:childTnLst>
+                  <p:par>
+                    <p:cTn id="3" fill="hold">
+                      <p:stCondLst>
+                        <p:cond delay="indefinite"/>
+                      </p:stCondLst>
+                      <p:childTnLst>
+                        <p:par>
+                          <p:cTn id="4" fill="hold">
+                            <p:stCondLst>
+                              <p:cond delay="0"/>
+                            </p:stCondLst>
+                            <p:childTnLst>
+                              <p:par>
+                                <p:cTn id="5" presetID="10" presetClass="entr" presetSubtype="0" fill="hold" grpId="0" nodeType="clickEffect">
+                                  <p:stCondLst>
+                                    <p:cond delay="0"/>
+                                  </p:stCondLst>
+                                  <p:childTnLst>
+                                    <p:set>
+                                      <p:cBhvr>
+                                        <p:cTn id="6" dur="1" fill="hold">
+                                          <p:stCondLst>
+                                            <p:cond delay="0"/>
+                                          </p:stCondLst>
+                                        </p:cTn>
+                                        <p:tgtEl>
+                                          <p:spTgt spid="2"/>
+                                        </p:tgtEl>
+                                        <p:attrNameLst>
+                                          <p:attrName>style.visibility</p:attrName>
+                                        </p:attrNameLst>
+                                      </p:cBhvr>
+                                      <p:to>
+                                        <p:strVal val="visible"/>
+                                      </p:to>
+                                    </p:set>
+                                    <p:animEffect transition="in" filter="fade">
+                                      <p:cBhvr>
+                                        <p:cTn id="7" dur="500"/>
+                                        <p:tgtEl>
+                                          <p:spTgt spid="2"/>
+                                        </p:tgtEl>
+                                      </p:cBhvr>
+                                    </p:animEffect>
+                                  </p:childTnLst>
+                                </p:cTn>
+                              </p:par>
+                            </p:childTnLst>
+                          </p:cTn>
+                        </p:par>
+                      </p:childTnLst>
+                    </p:cTn>
+                  </p:par>
+                  <p:par>
+                    <p:cTn id="8" fill="hold">
+                      <p:stCondLst>
+                        <p:cond delay="indefinite"/>
+                      </p:stCondLst>
+                      <p:childTnLst>
+                        <p:par>
+                          <p:cTn id="9" fill="hold">
+                            <p:stCondLst>
+                              <p:cond delay="0"/>
+                            </p:stCondLst>
+                            <p:childTnLst>
+                              <p:par>
+                                <p:cTn id="10" presetID="10" presetClass="entr" presetSubtype="0" fill="hold" grpId="0" nodeType="clickEffect">
+                                  <p:stCondLst>
+                                    <p:cond delay="0"/>
+                                  </p:stCondLst>
+                                  <p:childTnLst>
+                                    <p:set>
+                                      <p:cBhvr>
+                                        <p:cTn id="11" dur="1" fill="hold">
+                                          <p:stCondLst>
+                                            <p:cond delay="0"/>
+                                          </p:stCondLst>
+                                        </p:cTn>
+                                        <p:tgtEl>
+                                          <p:spTgt spid="3"/>
+                                        </p:tgtEl>
+                                        <p:attrNameLst>
+                                          <p:attrName>style.visibility</p:attrName>
+                                        </p:attrNameLst>
+                                      </p:cBhvr>
+                                      <p:to>
+                                        <p:strVal val="visible"/>
+                                      </p:to>
+                                    </p:set>
+                                    <p:animEffect transition="in" filter="fade">
+                                      <p:cBhvr>
+                                        <p:cTn id="12" dur="500"/>
+                                        <p:tgtEl>
+                                          <p:spTgt spid="3"/>
+                                        </p:tgtEl>
+                                      </p:cBhvr>
+                                    </p:animEffect>
+                                  </p:childTnLst>
+                                </p:cTn>
+                              </p:par>
+                            </p:childTnLst>
+                          </p:cTn>
+                        </p:par>
+                      </p:childTnLst>
+                    </p:cTn>
+                  </p:par>
+                  <p:par>
+                    <p:cTn id="13" fill="hold">
+                      <p:stCondLst>
+                        <p:cond delay="indefinite"/>
+                      </p:stCondLst>
+                      <p:childTnLst>
+                        <p:par>
+                          <p:cTn id="14" fill="hold">
+                            <p:stCondLst>
+                              <p:cond delay="0"/>
+                            </p:stCondLst>
+                            <p:childTnLst>
+                              <p:par>
+                                <p:cTn id="15" presetID="10" presetClass="entr" presetSubtype="0" fill="hold" grpId="0" nodeType="clickEffect">
+                                  <p:stCondLst>
+                                    <p:cond delay="0"/>
+                                  </p:stCondLst>
+                                  <p:childTnLst>
+                                    <p:set>
+                                      <p:cBhvr>
+                                        <p:cTn id="16" dur="1" fill="hold">
+                                          <p:stCondLst>
+                                            <p:cond delay="0"/>
+                                          </p:stCondLst>
+                                        </p:cTn>
+                                        <p:tgtEl>
+                                          <p:spTgt spid="4"/>
+                                        </p:tgtEl>
+                                        <p:attrNameLst>
+                                          <p:attrName>style.visibility</p:attrName>
+                                        </p:attrNameLst>
+                                      </p:cBhvr>
+                                      <p:to>
+                                        <p:strVal val="visible"/>
+                                      </p:to>
+                                    </p:set>
+                                    <p:animEffect transition="in" filter="fade">
+                                      <p:cBhvr>
+                                        <p:cTn id="17" dur="500"/>
+                                        <p:tgtEl>
+                                          <p:spTgt spid="4"/>
+                                        </p:tgtEl>
+                                      </p:cBhvr>
+                                    </p:animEffect>
+                                  </p:childTnLst>
+                                </p:cTn>
+                              </p:par>
+                            </p:childTnLst>
+                          </p:cTn>
+                        </p:par>
+                        <p:par>
+                          <p:cTn id="18" fill="hold">
+                            <p:stCondLst>
+                              <p:cond delay="0"/>
+                            </p:stCondLst>
+                            <p:childTnLst>
+                              <p:par>
+                                <p:cTn id="19" presetID="10" presetClass="entr" presetSubtype="0" fill="hold" grpId="0" nodeType="withEffect">
+                                  <p:stCondLst>
+                                    <p:cond delay="0"/>
+                                  </p:stCondLst>
+                                  <p:childTnLst>
+                                    <p:set>
+                                      <p:cBhvr>
+                                        <p:cTn id="20" dur="1" fill="hold">
+                                          <p:stCondLst>
+                                            <p:cond delay="0"/>
+                                          </p:stCondLst>
+                                        </p:cTn>
+                                        <p:tgtEl>
+                                          <p:spTgt spid="5"/>
+                                        </p:tgtEl>
+                                        <p:attrNameLst>
+                                          <p:attrName>style.visibility</p:attrName>
+                                        </p:attrNameLst>
+                                      </p:cBhvr>
+                                      <p:to>
+                                        <p:strVal val="visible"/>
+                                      </p:to>
+                                    </p:set>
+                                    <p:animEffect transition="in" filter="fade">
+                                      <p:cBhvr>
+                                        <p:cTn id="21" dur="500"/>
+                                        <p:tgtEl>
+                                          <p:spTgt spid="5"/>
+                                        </p:tgtEl>
+                                      </p:cBhvr>
+                                    </p:animEffect>
+                                  </p:childTnLst>
+                                </p:cTn>
+                              </p:par>
+                            </p:childTnLst>
+                          </p:cTn>
+                        </p:par>
+                        <p:par>
+                          <p:cTn id="22" fill="hold">
+                            <p:stCondLst>
+                              <p:cond delay="0"/>
+                            </p:stCondLst>
+                            <p:childTnLst>
+                              <p:par>
+                                <p:cTn id="23" presetID="10" presetClass="entr" presetSubtype="0" fill="hold" grpId="0" nodeType="withEffect">
+                                  <p:stCondLst>
+                                    <p:cond delay="0"/>
+                                  </p:stCondLst>
+                                  <p:childTnLst>
+                                    <p:set>
+                                      <p:cBhvr>
+                                        <p:cTn id="24" dur="1" fill="hold">
+                                          <p:stCondLst>
+                                            <p:cond delay="0"/>
+                                          </p:stCondLst>
+                                        </p:cTn>
+                                        <p:tgtEl>
+                                          <p:spTgt spid="7"/>
+                                        </p:tgtEl>
+                                        <p:attrNameLst>
+                                          <p:attrName>style.visibility</p:attrName>
+                                        </p:attrNameLst>
+                                      </p:cBhvr>
+                                      <p:to>
+                                        <p:strVal val="visible"/>
+                                      </p:to>
+                                    </p:set>
+                                    <p:animEffect transition="in" filter="fade">
+                                      <p:cBhvr>
+                                        <p:cTn id="25" dur="500"/>
+                                        <p:tgtEl>
+                                          <p:spTgt spid="7"/>
+                                        </p:tgtEl>
+                                      </p:cBhvr>
+                                    </p:animEffect>
+                                  </p:childTnLst>
+                                </p:cTn>
+                              </p:par>
+                            </p:childTnLst>
+                          </p:cTn>
+                        </p:par>
+                        <p:par>
+                          <p:cTn id="26" fill="hold">
+                            <p:stCondLst>
+                              <p:cond delay="0"/>
+                            </p:stCondLst>
+                            <p:childTnLst>
+                              <p:par>
+                                <p:cTn id="27" presetID="10" presetClass="entr" presetSubtype="0" fill="hold" grpId="0" nodeType="withEffect">
+                                  <p:stCondLst>
+                                    <p:cond delay="0"/>
+                                  </p:stCondLst>
+                                  <p:childTnLst>
+                                    <p:set>
+                                      <p:cBhvr>
+                                        <p:cTn id="28" dur="1" fill="hold">
+                                          <p:stCondLst>
+                                            <p:cond delay="0"/>
+                                          </p:stCondLst>
+                                        </p:cTn>
+                                        <p:tgtEl>
+                                          <p:spTgt spid="8"/>
+                                        </p:tgtEl>
+                                        <p:attrNameLst>
+                                          <p:attrName>style.visibility</p:attrName>
+                                        </p:attrNameLst>
+                                      </p:cBhvr>
+                                      <p:to>
+                                        <p:strVal val="visible"/>
+                                      </p:to>
+                                    </p:set>
+                                    <p:animEffect transition="in" filter="fade">
+                                      <p:cBhvr>
+                                        <p:cTn id="29" dur="500"/>
+                                        <p:tgtEl>
+                                          <p:spTgt spid="8"/>
+                                        </p:tgtEl>
+                                      </p:cBhvr>
+                                    </p:animEffect>
+                                  </p:childTnLst>
+                                </p:cTn>
+                              </p:par>
+                            </p:childTnLst>
+                          </p:cTn>
+                        </p:par>
+                        <p:par>
+                          <p:cTn id="30" fill="hold">
+                            <p:stCondLst>
+                              <p:cond delay="0"/>
+                            </p:stCondLst>
+                            <p:childTnLst>
+                              <p:par>
+                                <p:cTn id="31" presetID="10" presetClass="entr" presetSubtype="0" fill="hold" grpId="0" nodeType="withEffect">
+                                  <p:stCondLst>
+                                    <p:cond delay="0"/>
+                                  </p:stCondLst>
+                                  <p:childTnLst>
+                                    <p:set>
+                                      <p:cBhvr>
+                                        <p:cTn id="32" dur="1" fill="hold">
+                                          <p:stCondLst>
+                                            <p:cond delay="0"/>
+                                          </p:stCondLst>
+                                        </p:cTn>
+                                        <p:tgtEl>
+                                          <p:spTgt spid="9"/>
+                                        </p:tgtEl>
+                                        <p:attrNameLst>
+                                          <p:attrName>style.visibility</p:attrName>
+                                        </p:attrNameLst>
+                                      </p:cBhvr>
+                                      <p:to>
+                                        <p:strVal val="visible"/>
+                                      </p:to>
+                                    </p:set>
+                                    <p:animEffect transition="in" filter="fade">
+                                      <p:cBhvr>
+                                        <p:cTn id="33" dur="500"/>
+                                        <p:tgtEl>
+                                          <p:spTgt spid="9"/>
+                                        </p:tgtEl>
+                                      </p:cBhvr>
+                                    </p:animEffect>
+                                  </p:childTnLst>
+                                </p:cTn>
+                              </p:par>
+                            </p:childTnLst>
+                          </p:cTn>
+                        </p:par>
+                        <p:par>
+                          <p:cTn id="34" fill="hold">
+                            <p:stCondLst>
+                              <p:cond delay="0"/>
+                            </p:stCondLst>
+                            <p:childTnLst>
+                              <p:par>
+                                <p:cTn id="35" presetID="10" presetClass="entr" presetSubtype="0" fill="hold" grpId="0" nodeType="withEffect">
+                                  <p:stCondLst>
+                                    <p:cond delay="0"/>
+                                  </p:stCondLst>
+                                  <p:childTnLst>
+                                    <p:set>
+                                      <p:cBhvr>
+                                        <p:cTn id="36" dur="1" fill="hold">
+                                          <p:stCondLst>
+                                            <p:cond delay="0"/>
+                                          </p:stCondLst>
+                                        </p:cTn>
+                                        <p:tgtEl>
+                                          <p:spTgt spid="11"/>
+                                        </p:tgtEl>
+                                        <p:attrNameLst>
+                                          <p:attrName>style.visibility</p:attrName>
+                                        </p:attrNameLst>
+                                      </p:cBhvr>
+                                      <p:to>
+                                        <p:strVal val="visible"/>
+                                      </p:to>
+                                    </p:set>
+                                    <p:animEffect transition="in" filter="fade">
+                                      <p:cBhvr>
+                                        <p:cTn id="37" dur="500"/>
+                                        <p:tgtEl>
+                                          <p:spTgt spid="11"/>
+                                        </p:tgtEl>
+                                      </p:cBhvr>
+                                    </p:animEffect>
+                                  </p:childTnLst>
+                                </p:cTn>
+                              </p:par>
+                            </p:childTnLst>
+                          </p:cTn>
+                        </p:par>
+                        <p:par>
+                          <p:cTn id="38" fill="hold">
+                            <p:stCondLst>
+                              <p:cond delay="0"/>
+                            </p:stCondLst>
+                            <p:childTnLst>
+                              <p:par>
+                                <p:cTn id="39" presetID="10" presetClass="entr" presetSubtype="0" fill="hold" grpId="0" nodeType="withEffect">
+                                  <p:stCondLst>
+                                    <p:cond delay="0"/>
+                                  </p:stCondLst>
+                                  <p:childTnLst>
+                                    <p:set>
+                                      <p:cBhvr>
+                                        <p:cTn id="40" dur="1" fill="hold">
+                                          <p:stCondLst>
+                                            <p:cond delay="0"/>
+                                          </p:stCondLst>
+                                        </p:cTn>
+                                        <p:tgtEl>
+                                          <p:spTgt spid="12"/>
+                                        </p:tgtEl>
+                                        <p:attrNameLst>
+                                          <p:attrName>style.visibility</p:attrName>
+                                        </p:attrNameLst>
+                                      </p:cBhvr>
+                                      <p:to>
+                                        <p:strVal val="visible"/>
+                                      </p:to>
+                                    </p:set>
+                                    <p:animEffect transition="in" filter="fade">
+                                      <p:cBhvr>
+                                        <p:cTn id="41" dur="500"/>
+                                        <p:tgtEl>
+                                          <p:spTgt spid="12"/>
+                                        </p:tgtEl>
+                                      </p:cBhvr>
+                                    </p:animEffect>
+                                  </p:childTnLst>
+                                </p:cTn>
+                              </p:par>
+                            </p:childTnLst>
+                          </p:cTn>
+                        </p:par>
+                        <p:par>
+                          <p:cTn id="42" fill="hold">
+                            <p:stCondLst>
+                              <p:cond delay="0"/>
+                            </p:stCondLst>
+                            <p:childTnLst>
+                              <p:par>
+                                <p:cTn id="43" presetID="10" presetClass="entr" presetSubtype="0" fill="hold" grpId="0" nodeType="withEffect">
+                                  <p:stCondLst>
+                                    <p:cond delay="0"/>
+                                  </p:stCondLst>
+                                  <p:childTnLst>
+                                    <p:set>
+                                      <p:cBhvr>
+                                        <p:cTn id="44" dur="1" fill="hold">
+                                          <p:stCondLst>
+                                            <p:cond delay="0"/>
+                                          </p:stCondLst>
+                                        </p:cTn>
+                                        <p:tgtEl>
+                                          <p:spTgt spid="13"/>
+                                        </p:tgtEl>
+                                        <p:attrNameLst>
+                                          <p:attrName>style.visibility</p:attrName>
+                                        </p:attrNameLst>
+                                      </p:cBhvr>
+                                      <p:to>
+                                        <p:strVal val="visible"/>
+                                      </p:to>
+                                    </p:set>
+                                    <p:animEffect transition="in" filter="fade">
+                                      <p:cBhvr>
+                                        <p:cTn id="45" dur="500"/>
+                                        <p:tgtEl>
+                                          <p:spTgt spid="13"/>
+                                        </p:tgtEl>
+                                      </p:cBhvr>
+                                    </p:animEffect>
+                                  </p:childTnLst>
+                                </p:cTn>
+                              </p:par>
+                            </p:childTnLst>
+                          </p:cTn>
+                        </p:par>
+                        <p:par>
+                          <p:cTn id="46" fill="hold">
+                            <p:stCondLst>
+                              <p:cond delay="0"/>
+                            </p:stCondLst>
+                            <p:childTnLst>
+                              <p:par>
+                                <p:cTn id="47" presetID="10" presetClass="entr" presetSubtype="0" fill="hold" grpId="0" nodeType="withEffect">
+                                  <p:stCondLst>
+                                    <p:cond delay="0"/>
+                                  </p:stCondLst>
+                                  <p:childTnLst>
+                                    <p:set>
+                                      <p:cBhvr>
+                                        <p:cTn id="48" dur="1" fill="hold">
+                                          <p:stCondLst>
+                                            <p:cond delay="0"/>
+                                          </p:stCondLst>
+                                        </p:cTn>
+                                        <p:tgtEl>
+                                          <p:spTgt spid="15"/>
+                                        </p:tgtEl>
+                                        <p:attrNameLst>
+                                          <p:attrName>style.visibility</p:attrName>
+                                        </p:attrNameLst>
+                                      </p:cBhvr>
+                                      <p:to>
+                                        <p:strVal val="visible"/>
+                                      </p:to>
+                                    </p:set>
+                                    <p:animEffect transition="in" filter="fade">
+                                      <p:cBhvr>
+                                        <p:cTn id="49" dur="500"/>
+                                        <p:tgtEl>
+                                          <p:spTgt spid="15"/>
+                                        </p:tgtEl>
+                                      </p:cBhvr>
+                                    </p:animEffect>
+                                  </p:childTnLst>
+                                </p:cTn>
+                              </p:par>
+                            </p:childTnLst>
+                          </p:cTn>
+                        </p:par>
+                        <p:par>
+                          <p:cTn id="50" fill="hold">
+                            <p:stCondLst>
+                              <p:cond delay="0"/>
+                            </p:stCondLst>
+                            <p:childTnLst>
+                              <p:par>
+                                <p:cTn id="51" presetID="10" presetClass="entr" presetSubtype="0" fill="hold" grpId="0" nodeType="withEffect">
+                                  <p:stCondLst>
+                                    <p:cond delay="0"/>
+                                  </p:stCondLst>
+                                  <p:childTnLst>
+                                    <p:set>
+                                      <p:cBhvr>
+                                        <p:cTn id="52" dur="1" fill="hold">
+                                          <p:stCondLst>
+                                            <p:cond delay="0"/>
+                                          </p:stCondLst>
+                                        </p:cTn>
+                                        <p:tgtEl>
+                                          <p:spTgt spid="6"/>
+                                        </p:tgtEl>
+                                        <p:attrNameLst>
+                                          <p:attrName>style.visibility</p:attrName>
+                                        </p:attrNameLst>
+                                      </p:cBhvr>
+                                      <p:to>
+                                        <p:strVal val="visible"/>
+                                      </p:to>
+                                    </p:set>
+                                    <p:animEffect transition="in" filter="fade">
+                                      <p:cBhvr>
+                                        <p:cTn id="53" dur="500"/>
+                                        <p:tgtEl>
+                                          <p:spTgt spid="6"/>
+                                        </p:tgtEl>
+                                      </p:cBhvr>
+                                    </p:animEffect>
+                                  </p:childTnLst>
+                                </p:cTn>
+                              </p:par>
+                            </p:childTnLst>
+                          </p:cTn>
+                        </p:par>
+                        <p:par>
+                          <p:cTn id="54" fill="hold">
+                            <p:stCondLst>
+                              <p:cond delay="0"/>
+                            </p:stCondLst>
+                            <p:childTnLst>
+                              <p:par>
+                                <p:cTn id="55" presetID="10" presetClass="entr" presetSubtype="0" fill="hold" grpId="0" nodeType="withEffect">
+                                  <p:stCondLst>
+                                    <p:cond delay="0"/>
+                                  </p:stCondLst>
+                                  <p:childTnLst>
+                                    <p:set>
+                                      <p:cBhvr>
+                                        <p:cTn id="56" dur="1" fill="hold">
+                                          <p:stCondLst>
+                                            <p:cond delay="0"/>
+                                          </p:stCondLst>
+                                        </p:cTn>
+                                        <p:tgtEl>
+                                          <p:spTgt spid="10"/>
+                                        </p:tgtEl>
+                                        <p:attrNameLst>
+                                          <p:attrName>style.visibility</p:attrName>
+                                        </p:attrNameLst>
+                                      </p:cBhvr>
+                                      <p:to>
+                                        <p:strVal val="visible"/>
+                                      </p:to>
+                                    </p:set>
+                                    <p:animEffect transition="in" filter="fade">
+                                      <p:cBhvr>
+                                        <p:cTn id="57" dur="500"/>
+                                        <p:tgtEl>
+                                          <p:spTgt spid="10"/>
+                                        </p:tgtEl>
+                                      </p:cBhvr>
+                                    </p:animEffect>
+                                  </p:childTnLst>
+                                </p:cTn>
+                              </p:par>
+                            </p:childTnLst>
+                          </p:cTn>
+                        </p:par>
+                        <p:par>
+                          <p:cTn id="58" fill="hold">
+                            <p:stCondLst>
+                              <p:cond delay="0"/>
+                            </p:stCondLst>
+                            <p:childTnLst>
+                              <p:par>
+                                <p:cTn id="59" presetID="10" presetClass="entr" presetSubtype="0" fill="hold" grpId="0" nodeType="withEffect">
+                                  <p:stCondLst>
+                                    <p:cond delay="0"/>
+                                  </p:stCondLst>
+                                  <p:childTnLst>
+                                    <p:set>
+                                      <p:cBhvr>
+                                        <p:cTn id="60" dur="1" fill="hold">
+                                          <p:stCondLst>
+                                            <p:cond delay="0"/>
+                                          </p:stCondLst>
+                                        </p:cTn>
+                                        <p:tgtEl>
+                                          <p:spTgt spid="14"/>
+                                        </p:tgtEl>
+                                        <p:attrNameLst>
+                                          <p:attrName>style.visibility</p:attrName>
+                                        </p:attrNameLst>
+                                      </p:cBhvr>
+                                      <p:to>
+                                        <p:strVal val="visible"/>
+                                      </p:to>
+                                    </p:set>
+                                    <p:animEffect transition="in" filter="fade">
+                                      <p:cBhvr>
+                                        <p:cTn id="61" dur="500"/>
+                                        <p:tgtEl>
+                                          <p:spTgt spid="14"/>
+                                        </p:tgtEl>
+                                      </p:cBhvr>
+                                    </p:animEffect>
+                                  </p:childTnLst>
+                                </p:cTn>
+                              </p:par>
+                            </p:childTnLst>
+                          </p:cTn>
+                        </p:par>
+                      </p:childTnLst>
+                    </p:cTn>
+                  </p:par>
+                </p:childTnLst>
+              </p:cTn>
+              <p:prevCondLst>
+                <p:cond evt="onPrev" delay="0">
+                  <p:tgtEl>
+                    <p:sldTgt/>
+                  </p:tgtEl>
+                </p:cond>
+              </p:prevCondLst>
+              <p:nextCondLst>
+                <p:cond evt="onNext" delay="0">
+                  <p:tgtEl>
+                    <p:sldTgt/>
+                  </p:tgtEl>
+                </p:cond>
+              </p:nextCondLst>
+            </p:seq>
+          </p:childTnLst>
+        </p:cTn>
+      </p:par>
+    </p:tnLst>
+    <p:bldLst>
+      <p:bldP spid="2" grpId="0"/>
+      <p:bldGraphic spid="3" grpId="0">
+        <p:bldAsOne/>
+      </p:bldGraphic>
+      <p:bldP spid="4" grpId="0"/>
+      <p:bldP spid="5" grpId="0"/>
+      <p:bldP spid="7" grpId="0"/>
+      <p:bldP spid="8" grpId="0"/>
+      <p:bldP spid="9" grpId="0"/>
+      <p:bldP spid="11" grpId="0"/>
+      <p:bldP spid="12" grpId="0"/>
+      <p:bldP spid="13" grpId="0"/>
+      <p:bldP spid="15" grpId="0"/>
+      <p:bldP spid="6" grpId="0"/>
+      <p:bldP spid="10" grpId="0"/>
+      <p:bldP spid="14" grpId="0"/>
+    </p:bldLst>
+  </p:timing>
 </p:sld>
 </file>
 
@@ -4793,7 +7884,7 @@
       </p:grpSpPr>
       <p:sp>
         <p:nvSpPr>
-          <p:cNvPr id="2" name="Text 0"/>
+          <p:cNvPr id="2" name="c1-1"/>
           <p:cNvSpPr txBox="1"/>
           <p:nvPr/>
         </p:nvSpPr>
@@ -4829,7 +7920,7 @@
       </p:sp>
       <p:sp>
         <p:nvSpPr>
-          <p:cNvPr id="3" name="Text 1"/>
+          <p:cNvPr id="3" name="c1-2"/>
           <p:cNvSpPr txBox="1"/>
           <p:nvPr/>
         </p:nvSpPr>
@@ -4865,7 +7956,7 @@
       </p:sp>
       <p:sp>
         <p:nvSpPr>
-          <p:cNvPr id="4" name="Shape 2"/>
+          <p:cNvPr id="4" name="c2-3"/>
           <p:cNvSpPr/>
           <p:nvPr/>
         </p:nvSpPr>
@@ -4894,7 +7985,7 @@
       </p:sp>
       <p:sp>
         <p:nvSpPr>
-          <p:cNvPr id="5" name="Shape 3"/>
+          <p:cNvPr id="5" name="c2-4bg"/>
           <p:cNvSpPr/>
           <p:nvPr/>
         </p:nvSpPr>
@@ -4916,7 +8007,7 @@
       </p:sp>
       <p:pic>
         <p:nvPicPr>
-          <p:cNvPr id="6" name="Image 0" descr="preencoded.png">    </p:cNvPr>
+          <p:cNvPr id="6" name="c2-4ic" descr="preencoded.png">    </p:cNvPr>
           <p:cNvPicPr>
             <a:picLocks noChangeAspect="1"/>
           </p:cNvPicPr>
@@ -4940,7 +8031,7 @@
       </p:pic>
       <p:sp>
         <p:nvSpPr>
-          <p:cNvPr id="7" name="Text 4"/>
+          <p:cNvPr id="7" name="c2-5"/>
           <p:cNvSpPr txBox="1"/>
           <p:nvPr/>
         </p:nvSpPr>
@@ -4976,7 +8067,7 @@
       </p:sp>
       <p:sp>
         <p:nvSpPr>
-          <p:cNvPr id="8" name="Text 5"/>
+          <p:cNvPr id="8" name="c2-6"/>
           <p:cNvSpPr txBox="1"/>
           <p:nvPr/>
         </p:nvSpPr>
@@ -5015,7 +8106,7 @@
       </p:sp>
       <p:sp>
         <p:nvSpPr>
-          <p:cNvPr id="9" name="Shape 6"/>
+          <p:cNvPr id="9" name="c2-7"/>
           <p:cNvSpPr/>
           <p:nvPr/>
         </p:nvSpPr>
@@ -5044,7 +8135,7 @@
       </p:sp>
       <p:sp>
         <p:nvSpPr>
-          <p:cNvPr id="10" name="Shape 7"/>
+          <p:cNvPr id="10" name="c2-8bg"/>
           <p:cNvSpPr/>
           <p:nvPr/>
         </p:nvSpPr>
@@ -5066,7 +8157,7 @@
       </p:sp>
       <p:pic>
         <p:nvPicPr>
-          <p:cNvPr id="11" name="Image 1" descr="preencoded.png">    </p:cNvPr>
+          <p:cNvPr id="11" name="c2-8ic" descr="preencoded.png">    </p:cNvPr>
           <p:cNvPicPr>
             <a:picLocks noChangeAspect="1"/>
           </p:cNvPicPr>
@@ -5090,7 +8181,7 @@
       </p:pic>
       <p:sp>
         <p:nvSpPr>
-          <p:cNvPr id="12" name="Text 8"/>
+          <p:cNvPr id="12" name="c2-9"/>
           <p:cNvSpPr txBox="1"/>
           <p:nvPr/>
         </p:nvSpPr>
@@ -5126,7 +8217,7 @@
       </p:sp>
       <p:sp>
         <p:nvSpPr>
-          <p:cNvPr id="13" name="Text 9"/>
+          <p:cNvPr id="13" name="c2-10"/>
           <p:cNvSpPr txBox="1"/>
           <p:nvPr/>
         </p:nvSpPr>
@@ -5165,7 +8256,7 @@
       </p:sp>
       <p:sp>
         <p:nvSpPr>
-          <p:cNvPr id="14" name="Shape 10"/>
+          <p:cNvPr id="14" name="c3-11"/>
           <p:cNvSpPr/>
           <p:nvPr/>
         </p:nvSpPr>
@@ -5194,7 +8285,7 @@
       </p:sp>
       <p:sp>
         <p:nvSpPr>
-          <p:cNvPr id="15" name="Shape 11"/>
+          <p:cNvPr id="15" name="c3-12bg"/>
           <p:cNvSpPr/>
           <p:nvPr/>
         </p:nvSpPr>
@@ -5216,7 +8307,7 @@
       </p:sp>
       <p:pic>
         <p:nvPicPr>
-          <p:cNvPr id="16" name="Image 2" descr="preencoded.png">    </p:cNvPr>
+          <p:cNvPr id="16" name="c3-12ic" descr="preencoded.png">    </p:cNvPr>
           <p:cNvPicPr>
             <a:picLocks noChangeAspect="1"/>
           </p:cNvPicPr>
@@ -5240,7 +8331,7 @@
       </p:pic>
       <p:sp>
         <p:nvSpPr>
-          <p:cNvPr id="17" name="Text 12"/>
+          <p:cNvPr id="17" name="c3-13"/>
           <p:cNvSpPr txBox="1"/>
           <p:nvPr/>
         </p:nvSpPr>
@@ -5276,7 +8367,7 @@
       </p:sp>
       <p:sp>
         <p:nvSpPr>
-          <p:cNvPr id="18" name="Text 13"/>
+          <p:cNvPr id="18" name="c3-14"/>
           <p:cNvSpPr txBox="1"/>
           <p:nvPr/>
         </p:nvSpPr>
@@ -5315,7 +8406,7 @@
       </p:sp>
       <p:sp>
         <p:nvSpPr>
-          <p:cNvPr id="19" name="Shape 14"/>
+          <p:cNvPr id="19" name="c3-15"/>
           <p:cNvSpPr/>
           <p:nvPr/>
         </p:nvSpPr>
@@ -5344,7 +8435,7 @@
       </p:sp>
       <p:sp>
         <p:nvSpPr>
-          <p:cNvPr id="20" name="Shape 15"/>
+          <p:cNvPr id="20" name="c3-16bg"/>
           <p:cNvSpPr/>
           <p:nvPr/>
         </p:nvSpPr>
@@ -5366,7 +8457,7 @@
       </p:sp>
       <p:pic>
         <p:nvPicPr>
-          <p:cNvPr id="21" name="Image 3" descr="preencoded.png">    </p:cNvPr>
+          <p:cNvPr id="21" name="c3-16ic" descr="preencoded.png">    </p:cNvPr>
           <p:cNvPicPr>
             <a:picLocks noChangeAspect="1"/>
           </p:cNvPicPr>
@@ -5390,7 +8481,7 @@
       </p:pic>
       <p:sp>
         <p:nvSpPr>
-          <p:cNvPr id="22" name="Text 16"/>
+          <p:cNvPr id="22" name="c3-17"/>
           <p:cNvSpPr txBox="1"/>
           <p:nvPr/>
         </p:nvSpPr>
@@ -5426,7 +8517,7 @@
       </p:sp>
       <p:sp>
         <p:nvSpPr>
-          <p:cNvPr id="23" name="Text 17"/>
+          <p:cNvPr id="23" name="c3-18"/>
           <p:cNvSpPr txBox="1"/>
           <p:nvPr/>
         </p:nvSpPr>
@@ -5513,6 +8604,1055 @@
   <p:clrMapOvr>
     <a:masterClrMapping/>
   </p:clrMapOvr>
+  <p:timing>
+    <p:tnLst>
+      <p:par>
+        <p:cTn id="1" dur="indefinite" restart="never" nodeType="tmRoot">
+          <p:childTnLst>
+            <p:seq concurrent="1" nextAc="seek">
+              <p:cTn id="2" dur="indefinite" nodeType="mainSeq">
+                <p:childTnLst>
+                  <p:par>
+                    <p:cTn id="3" fill="hold">
+                      <p:stCondLst>
+                        <p:cond delay="indefinite"/>
+                      </p:stCondLst>
+                      <p:childTnLst>
+                        <p:par>
+                          <p:cTn id="4" fill="hold">
+                            <p:stCondLst>
+                              <p:cond delay="0"/>
+                            </p:stCondLst>
+                            <p:childTnLst>
+                              <p:par>
+                                <p:cTn id="5" presetID="10" presetClass="entr" presetSubtype="0" fill="hold" grpId="0" nodeType="clickEffect">
+                                  <p:stCondLst>
+                                    <p:cond delay="0"/>
+                                  </p:stCondLst>
+                                  <p:childTnLst>
+                                    <p:set>
+                                      <p:cBhvr>
+                                        <p:cTn id="6" dur="1" fill="hold">
+                                          <p:stCondLst>
+                                            <p:cond delay="0"/>
+                                          </p:stCondLst>
+                                        </p:cTn>
+                                        <p:tgtEl>
+                                          <p:spTgt spid="2"/>
+                                        </p:tgtEl>
+                                        <p:attrNameLst>
+                                          <p:attrName>style.visibility</p:attrName>
+                                        </p:attrNameLst>
+                                      </p:cBhvr>
+                                      <p:to>
+                                        <p:strVal val="visible"/>
+                                      </p:to>
+                                    </p:set>
+                                    <p:animEffect transition="in" filter="fade">
+                                      <p:cBhvr>
+                                        <p:cTn id="7" dur="500"/>
+                                        <p:tgtEl>
+                                          <p:spTgt spid="2"/>
+                                        </p:tgtEl>
+                                      </p:cBhvr>
+                                    </p:animEffect>
+                                  </p:childTnLst>
+                                </p:cTn>
+                              </p:par>
+                            </p:childTnLst>
+                          </p:cTn>
+                        </p:par>
+                        <p:par>
+                          <p:cTn id="8" fill="hold">
+                            <p:stCondLst>
+                              <p:cond delay="0"/>
+                            </p:stCondLst>
+                            <p:childTnLst>
+                              <p:par>
+                                <p:cTn id="9" presetID="10" presetClass="entr" presetSubtype="0" fill="hold" grpId="0" nodeType="withEffect">
+                                  <p:stCondLst>
+                                    <p:cond delay="0"/>
+                                  </p:stCondLst>
+                                  <p:childTnLst>
+                                    <p:set>
+                                      <p:cBhvr>
+                                        <p:cTn id="10" dur="1" fill="hold">
+                                          <p:stCondLst>
+                                            <p:cond delay="0"/>
+                                          </p:stCondLst>
+                                        </p:cTn>
+                                        <p:tgtEl>
+                                          <p:spTgt spid="3"/>
+                                        </p:tgtEl>
+                                        <p:attrNameLst>
+                                          <p:attrName>style.visibility</p:attrName>
+                                        </p:attrNameLst>
+                                      </p:cBhvr>
+                                      <p:to>
+                                        <p:strVal val="visible"/>
+                                      </p:to>
+                                    </p:set>
+                                    <p:animEffect transition="in" filter="fade">
+                                      <p:cBhvr>
+                                        <p:cTn id="11" dur="500"/>
+                                        <p:tgtEl>
+                                          <p:spTgt spid="3"/>
+                                        </p:tgtEl>
+                                      </p:cBhvr>
+                                    </p:animEffect>
+                                  </p:childTnLst>
+                                </p:cTn>
+                              </p:par>
+                            </p:childTnLst>
+                          </p:cTn>
+                        </p:par>
+                      </p:childTnLst>
+                    </p:cTn>
+                  </p:par>
+                  <p:par>
+                    <p:cTn id="12" fill="hold">
+                      <p:stCondLst>
+                        <p:cond delay="indefinite"/>
+                      </p:stCondLst>
+                      <p:childTnLst>
+                        <p:par>
+                          <p:cTn id="13" fill="hold">
+                            <p:stCondLst>
+                              <p:cond delay="0"/>
+                            </p:stCondLst>
+                            <p:childTnLst>
+                              <p:par>
+                                <p:cTn id="14" presetID="10" presetClass="entr" presetSubtype="0" fill="hold" grpId="0" nodeType="clickEffect">
+                                  <p:stCondLst>
+                                    <p:cond delay="0"/>
+                                  </p:stCondLst>
+                                  <p:childTnLst>
+                                    <p:set>
+                                      <p:cBhvr>
+                                        <p:cTn id="15" dur="1" fill="hold">
+                                          <p:stCondLst>
+                                            <p:cond delay="0"/>
+                                          </p:stCondLst>
+                                        </p:cTn>
+                                        <p:tgtEl>
+                                          <p:spTgt spid="4"/>
+                                        </p:tgtEl>
+                                        <p:attrNameLst>
+                                          <p:attrName>style.visibility</p:attrName>
+                                        </p:attrNameLst>
+                                      </p:cBhvr>
+                                      <p:to>
+                                        <p:strVal val="visible"/>
+                                      </p:to>
+                                    </p:set>
+                                    <p:animEffect transition="in" filter="fade">
+                                      <p:cBhvr>
+                                        <p:cTn id="16" dur="500"/>
+                                        <p:tgtEl>
+                                          <p:spTgt spid="4"/>
+                                        </p:tgtEl>
+                                      </p:cBhvr>
+                                    </p:animEffect>
+                                  </p:childTnLst>
+                                </p:cTn>
+                              </p:par>
+                            </p:childTnLst>
+                          </p:cTn>
+                        </p:par>
+                        <p:par>
+                          <p:cTn id="17" fill="hold">
+                            <p:stCondLst>
+                              <p:cond delay="0"/>
+                            </p:stCondLst>
+                            <p:childTnLst>
+                              <p:par>
+                                <p:cTn id="18" presetID="10" presetClass="entr" presetSubtype="0" fill="hold" grpId="0" nodeType="withEffect">
+                                  <p:stCondLst>
+                                    <p:cond delay="0"/>
+                                  </p:stCondLst>
+                                  <p:childTnLst>
+                                    <p:set>
+                                      <p:cBhvr>
+                                        <p:cTn id="19" dur="1" fill="hold">
+                                          <p:stCondLst>
+                                            <p:cond delay="0"/>
+                                          </p:stCondLst>
+                                        </p:cTn>
+                                        <p:tgtEl>
+                                          <p:spTgt spid="5"/>
+                                        </p:tgtEl>
+                                        <p:attrNameLst>
+                                          <p:attrName>style.visibility</p:attrName>
+                                        </p:attrNameLst>
+                                      </p:cBhvr>
+                                      <p:to>
+                                        <p:strVal val="visible"/>
+                                      </p:to>
+                                    </p:set>
+                                    <p:animEffect transition="in" filter="fade">
+                                      <p:cBhvr>
+                                        <p:cTn id="20" dur="500"/>
+                                        <p:tgtEl>
+                                          <p:spTgt spid="5"/>
+                                        </p:tgtEl>
+                                      </p:cBhvr>
+                                    </p:animEffect>
+                                  </p:childTnLst>
+                                </p:cTn>
+                              </p:par>
+                            </p:childTnLst>
+                          </p:cTn>
+                        </p:par>
+                        <p:par>
+                          <p:cTn id="21" fill="hold">
+                            <p:stCondLst>
+                              <p:cond delay="0"/>
+                            </p:stCondLst>
+                            <p:childTnLst>
+                              <p:par>
+                                <p:cTn id="22" presetID="10" presetClass="entr" presetSubtype="0" fill="hold" grpId="0" nodeType="withEffect">
+                                  <p:stCondLst>
+                                    <p:cond delay="0"/>
+                                  </p:stCondLst>
+                                  <p:childTnLst>
+                                    <p:set>
+                                      <p:cBhvr>
+                                        <p:cTn id="23" dur="1" fill="hold">
+                                          <p:stCondLst>
+                                            <p:cond delay="0"/>
+                                          </p:stCondLst>
+                                        </p:cTn>
+                                        <p:tgtEl>
+                                          <p:spTgt spid="7"/>
+                                        </p:tgtEl>
+                                        <p:attrNameLst>
+                                          <p:attrName>style.visibility</p:attrName>
+                                        </p:attrNameLst>
+                                      </p:cBhvr>
+                                      <p:to>
+                                        <p:strVal val="visible"/>
+                                      </p:to>
+                                    </p:set>
+                                    <p:animEffect transition="in" filter="fade">
+                                      <p:cBhvr>
+                                        <p:cTn id="24" dur="500"/>
+                                        <p:tgtEl>
+                                          <p:spTgt spid="7"/>
+                                        </p:tgtEl>
+                                      </p:cBhvr>
+                                    </p:animEffect>
+                                  </p:childTnLst>
+                                </p:cTn>
+                              </p:par>
+                            </p:childTnLst>
+                          </p:cTn>
+                        </p:par>
+                        <p:par>
+                          <p:cTn id="25" fill="hold">
+                            <p:stCondLst>
+                              <p:cond delay="0"/>
+                            </p:stCondLst>
+                            <p:childTnLst>
+                              <p:par>
+                                <p:cTn id="26" presetID="10" presetClass="entr" presetSubtype="0" fill="hold" grpId="0" nodeType="withEffect">
+                                  <p:stCondLst>
+                                    <p:cond delay="0"/>
+                                  </p:stCondLst>
+                                  <p:childTnLst>
+                                    <p:set>
+                                      <p:cBhvr>
+                                        <p:cTn id="27" dur="1" fill="hold">
+                                          <p:stCondLst>
+                                            <p:cond delay="0"/>
+                                          </p:stCondLst>
+                                        </p:cTn>
+                                        <p:tgtEl>
+                                          <p:spTgt spid="8"/>
+                                        </p:tgtEl>
+                                        <p:attrNameLst>
+                                          <p:attrName>style.visibility</p:attrName>
+                                        </p:attrNameLst>
+                                      </p:cBhvr>
+                                      <p:to>
+                                        <p:strVal val="visible"/>
+                                      </p:to>
+                                    </p:set>
+                                    <p:animEffect transition="in" filter="fade">
+                                      <p:cBhvr>
+                                        <p:cTn id="28" dur="500"/>
+                                        <p:tgtEl>
+                                          <p:spTgt spid="8"/>
+                                        </p:tgtEl>
+                                      </p:cBhvr>
+                                    </p:animEffect>
+                                  </p:childTnLst>
+                                </p:cTn>
+                              </p:par>
+                            </p:childTnLst>
+                          </p:cTn>
+                        </p:par>
+                        <p:par>
+                          <p:cTn id="29" fill="hold">
+                            <p:stCondLst>
+                              <p:cond delay="0"/>
+                            </p:stCondLst>
+                            <p:childTnLst>
+                              <p:par>
+                                <p:cTn id="30" presetID="10" presetClass="entr" presetSubtype="0" fill="hold" grpId="0" nodeType="withEffect">
+                                  <p:stCondLst>
+                                    <p:cond delay="0"/>
+                                  </p:stCondLst>
+                                  <p:childTnLst>
+                                    <p:set>
+                                      <p:cBhvr>
+                                        <p:cTn id="31" dur="1" fill="hold">
+                                          <p:stCondLst>
+                                            <p:cond delay="0"/>
+                                          </p:stCondLst>
+                                        </p:cTn>
+                                        <p:tgtEl>
+                                          <p:spTgt spid="9"/>
+                                        </p:tgtEl>
+                                        <p:attrNameLst>
+                                          <p:attrName>style.visibility</p:attrName>
+                                        </p:attrNameLst>
+                                      </p:cBhvr>
+                                      <p:to>
+                                        <p:strVal val="visible"/>
+                                      </p:to>
+                                    </p:set>
+                                    <p:animEffect transition="in" filter="fade">
+                                      <p:cBhvr>
+                                        <p:cTn id="32" dur="500"/>
+                                        <p:tgtEl>
+                                          <p:spTgt spid="9"/>
+                                        </p:tgtEl>
+                                      </p:cBhvr>
+                                    </p:animEffect>
+                                  </p:childTnLst>
+                                </p:cTn>
+                              </p:par>
+                            </p:childTnLst>
+                          </p:cTn>
+                        </p:par>
+                        <p:par>
+                          <p:cTn id="33" fill="hold">
+                            <p:stCondLst>
+                              <p:cond delay="0"/>
+                            </p:stCondLst>
+                            <p:childTnLst>
+                              <p:par>
+                                <p:cTn id="34" presetID="10" presetClass="entr" presetSubtype="0" fill="hold" grpId="0" nodeType="withEffect">
+                                  <p:stCondLst>
+                                    <p:cond delay="0"/>
+                                  </p:stCondLst>
+                                  <p:childTnLst>
+                                    <p:set>
+                                      <p:cBhvr>
+                                        <p:cTn id="35" dur="1" fill="hold">
+                                          <p:stCondLst>
+                                            <p:cond delay="0"/>
+                                          </p:stCondLst>
+                                        </p:cTn>
+                                        <p:tgtEl>
+                                          <p:spTgt spid="10"/>
+                                        </p:tgtEl>
+                                        <p:attrNameLst>
+                                          <p:attrName>style.visibility</p:attrName>
+                                        </p:attrNameLst>
+                                      </p:cBhvr>
+                                      <p:to>
+                                        <p:strVal val="visible"/>
+                                      </p:to>
+                                    </p:set>
+                                    <p:animEffect transition="in" filter="fade">
+                                      <p:cBhvr>
+                                        <p:cTn id="36" dur="500"/>
+                                        <p:tgtEl>
+                                          <p:spTgt spid="10"/>
+                                        </p:tgtEl>
+                                      </p:cBhvr>
+                                    </p:animEffect>
+                                  </p:childTnLst>
+                                </p:cTn>
+                              </p:par>
+                            </p:childTnLst>
+                          </p:cTn>
+                        </p:par>
+                        <p:par>
+                          <p:cTn id="37" fill="hold">
+                            <p:stCondLst>
+                              <p:cond delay="0"/>
+                            </p:stCondLst>
+                            <p:childTnLst>
+                              <p:par>
+                                <p:cTn id="38" presetID="10" presetClass="entr" presetSubtype="0" fill="hold" grpId="0" nodeType="withEffect">
+                                  <p:stCondLst>
+                                    <p:cond delay="0"/>
+                                  </p:stCondLst>
+                                  <p:childTnLst>
+                                    <p:set>
+                                      <p:cBhvr>
+                                        <p:cTn id="39" dur="1" fill="hold">
+                                          <p:stCondLst>
+                                            <p:cond delay="0"/>
+                                          </p:stCondLst>
+                                        </p:cTn>
+                                        <p:tgtEl>
+                                          <p:spTgt spid="12"/>
+                                        </p:tgtEl>
+                                        <p:attrNameLst>
+                                          <p:attrName>style.visibility</p:attrName>
+                                        </p:attrNameLst>
+                                      </p:cBhvr>
+                                      <p:to>
+                                        <p:strVal val="visible"/>
+                                      </p:to>
+                                    </p:set>
+                                    <p:animEffect transition="in" filter="fade">
+                                      <p:cBhvr>
+                                        <p:cTn id="40" dur="500"/>
+                                        <p:tgtEl>
+                                          <p:spTgt spid="12"/>
+                                        </p:tgtEl>
+                                      </p:cBhvr>
+                                    </p:animEffect>
+                                  </p:childTnLst>
+                                </p:cTn>
+                              </p:par>
+                            </p:childTnLst>
+                          </p:cTn>
+                        </p:par>
+                        <p:par>
+                          <p:cTn id="41" fill="hold">
+                            <p:stCondLst>
+                              <p:cond delay="0"/>
+                            </p:stCondLst>
+                            <p:childTnLst>
+                              <p:par>
+                                <p:cTn id="42" presetID="10" presetClass="entr" presetSubtype="0" fill="hold" grpId="0" nodeType="withEffect">
+                                  <p:stCondLst>
+                                    <p:cond delay="0"/>
+                                  </p:stCondLst>
+                                  <p:childTnLst>
+                                    <p:set>
+                                      <p:cBhvr>
+                                        <p:cTn id="43" dur="1" fill="hold">
+                                          <p:stCondLst>
+                                            <p:cond delay="0"/>
+                                          </p:stCondLst>
+                                        </p:cTn>
+                                        <p:tgtEl>
+                                          <p:spTgt spid="13"/>
+                                        </p:tgtEl>
+                                        <p:attrNameLst>
+                                          <p:attrName>style.visibility</p:attrName>
+                                        </p:attrNameLst>
+                                      </p:cBhvr>
+                                      <p:to>
+                                        <p:strVal val="visible"/>
+                                      </p:to>
+                                    </p:set>
+                                    <p:animEffect transition="in" filter="fade">
+                                      <p:cBhvr>
+                                        <p:cTn id="44" dur="500"/>
+                                        <p:tgtEl>
+                                          <p:spTgt spid="13"/>
+                                        </p:tgtEl>
+                                      </p:cBhvr>
+                                    </p:animEffect>
+                                  </p:childTnLst>
+                                </p:cTn>
+                              </p:par>
+                            </p:childTnLst>
+                          </p:cTn>
+                        </p:par>
+                        <p:par>
+                          <p:cTn id="45" fill="hold">
+                            <p:stCondLst>
+                              <p:cond delay="0"/>
+                            </p:stCondLst>
+                            <p:childTnLst>
+                              <p:par>
+                                <p:cTn id="46" presetID="10" presetClass="entr" presetSubtype="0" fill="hold" grpId="0" nodeType="withEffect">
+                                  <p:stCondLst>
+                                    <p:cond delay="0"/>
+                                  </p:stCondLst>
+                                  <p:childTnLst>
+                                    <p:set>
+                                      <p:cBhvr>
+                                        <p:cTn id="47" dur="1" fill="hold">
+                                          <p:stCondLst>
+                                            <p:cond delay="0"/>
+                                          </p:stCondLst>
+                                        </p:cTn>
+                                        <p:tgtEl>
+                                          <p:spTgt spid="6"/>
+                                        </p:tgtEl>
+                                        <p:attrNameLst>
+                                          <p:attrName>style.visibility</p:attrName>
+                                        </p:attrNameLst>
+                                      </p:cBhvr>
+                                      <p:to>
+                                        <p:strVal val="visible"/>
+                                      </p:to>
+                                    </p:set>
+                                    <p:animEffect transition="in" filter="fade">
+                                      <p:cBhvr>
+                                        <p:cTn id="48" dur="500"/>
+                                        <p:tgtEl>
+                                          <p:spTgt spid="6"/>
+                                        </p:tgtEl>
+                                      </p:cBhvr>
+                                    </p:animEffect>
+                                  </p:childTnLst>
+                                </p:cTn>
+                              </p:par>
+                            </p:childTnLst>
+                          </p:cTn>
+                        </p:par>
+                        <p:par>
+                          <p:cTn id="49" fill="hold">
+                            <p:stCondLst>
+                              <p:cond delay="0"/>
+                            </p:stCondLst>
+                            <p:childTnLst>
+                              <p:par>
+                                <p:cTn id="50" presetID="10" presetClass="entr" presetSubtype="0" fill="hold" grpId="0" nodeType="withEffect">
+                                  <p:stCondLst>
+                                    <p:cond delay="0"/>
+                                  </p:stCondLst>
+                                  <p:childTnLst>
+                                    <p:set>
+                                      <p:cBhvr>
+                                        <p:cTn id="51" dur="1" fill="hold">
+                                          <p:stCondLst>
+                                            <p:cond delay="0"/>
+                                          </p:stCondLst>
+                                        </p:cTn>
+                                        <p:tgtEl>
+                                          <p:spTgt spid="11"/>
+                                        </p:tgtEl>
+                                        <p:attrNameLst>
+                                          <p:attrName>style.visibility</p:attrName>
+                                        </p:attrNameLst>
+                                      </p:cBhvr>
+                                      <p:to>
+                                        <p:strVal val="visible"/>
+                                      </p:to>
+                                    </p:set>
+                                    <p:animEffect transition="in" filter="fade">
+                                      <p:cBhvr>
+                                        <p:cTn id="52" dur="500"/>
+                                        <p:tgtEl>
+                                          <p:spTgt spid="11"/>
+                                        </p:tgtEl>
+                                      </p:cBhvr>
+                                    </p:animEffect>
+                                  </p:childTnLst>
+                                </p:cTn>
+                              </p:par>
+                            </p:childTnLst>
+                          </p:cTn>
+                        </p:par>
+                      </p:childTnLst>
+                    </p:cTn>
+                  </p:par>
+                  <p:par>
+                    <p:cTn id="53" fill="hold">
+                      <p:stCondLst>
+                        <p:cond delay="indefinite"/>
+                      </p:stCondLst>
+                      <p:childTnLst>
+                        <p:par>
+                          <p:cTn id="54" fill="hold">
+                            <p:stCondLst>
+                              <p:cond delay="0"/>
+                            </p:stCondLst>
+                            <p:childTnLst>
+                              <p:par>
+                                <p:cTn id="55" presetID="10" presetClass="entr" presetSubtype="0" fill="hold" grpId="0" nodeType="clickEffect">
+                                  <p:stCondLst>
+                                    <p:cond delay="0"/>
+                                  </p:stCondLst>
+                                  <p:childTnLst>
+                                    <p:set>
+                                      <p:cBhvr>
+                                        <p:cTn id="56" dur="1" fill="hold">
+                                          <p:stCondLst>
+                                            <p:cond delay="0"/>
+                                          </p:stCondLst>
+                                        </p:cTn>
+                                        <p:tgtEl>
+                                          <p:spTgt spid="14"/>
+                                        </p:tgtEl>
+                                        <p:attrNameLst>
+                                          <p:attrName>style.visibility</p:attrName>
+                                        </p:attrNameLst>
+                                      </p:cBhvr>
+                                      <p:to>
+                                        <p:strVal val="visible"/>
+                                      </p:to>
+                                    </p:set>
+                                    <p:animEffect transition="in" filter="fade">
+                                      <p:cBhvr>
+                                        <p:cTn id="57" dur="500"/>
+                                        <p:tgtEl>
+                                          <p:spTgt spid="14"/>
+                                        </p:tgtEl>
+                                      </p:cBhvr>
+                                    </p:animEffect>
+                                  </p:childTnLst>
+                                </p:cTn>
+                              </p:par>
+                            </p:childTnLst>
+                          </p:cTn>
+                        </p:par>
+                        <p:par>
+                          <p:cTn id="58" fill="hold">
+                            <p:stCondLst>
+                              <p:cond delay="0"/>
+                            </p:stCondLst>
+                            <p:childTnLst>
+                              <p:par>
+                                <p:cTn id="59" presetID="10" presetClass="entr" presetSubtype="0" fill="hold" grpId="0" nodeType="withEffect">
+                                  <p:stCondLst>
+                                    <p:cond delay="0"/>
+                                  </p:stCondLst>
+                                  <p:childTnLst>
+                                    <p:set>
+                                      <p:cBhvr>
+                                        <p:cTn id="60" dur="1" fill="hold">
+                                          <p:stCondLst>
+                                            <p:cond delay="0"/>
+                                          </p:stCondLst>
+                                        </p:cTn>
+                                        <p:tgtEl>
+                                          <p:spTgt spid="15"/>
+                                        </p:tgtEl>
+                                        <p:attrNameLst>
+                                          <p:attrName>style.visibility</p:attrName>
+                                        </p:attrNameLst>
+                                      </p:cBhvr>
+                                      <p:to>
+                                        <p:strVal val="visible"/>
+                                      </p:to>
+                                    </p:set>
+                                    <p:animEffect transition="in" filter="fade">
+                                      <p:cBhvr>
+                                        <p:cTn id="61" dur="500"/>
+                                        <p:tgtEl>
+                                          <p:spTgt spid="15"/>
+                                        </p:tgtEl>
+                                      </p:cBhvr>
+                                    </p:animEffect>
+                                  </p:childTnLst>
+                                </p:cTn>
+                              </p:par>
+                            </p:childTnLst>
+                          </p:cTn>
+                        </p:par>
+                        <p:par>
+                          <p:cTn id="62" fill="hold">
+                            <p:stCondLst>
+                              <p:cond delay="0"/>
+                            </p:stCondLst>
+                            <p:childTnLst>
+                              <p:par>
+                                <p:cTn id="63" presetID="10" presetClass="entr" presetSubtype="0" fill="hold" grpId="0" nodeType="withEffect">
+                                  <p:stCondLst>
+                                    <p:cond delay="0"/>
+                                  </p:stCondLst>
+                                  <p:childTnLst>
+                                    <p:set>
+                                      <p:cBhvr>
+                                        <p:cTn id="64" dur="1" fill="hold">
+                                          <p:stCondLst>
+                                            <p:cond delay="0"/>
+                                          </p:stCondLst>
+                                        </p:cTn>
+                                        <p:tgtEl>
+                                          <p:spTgt spid="17"/>
+                                        </p:tgtEl>
+                                        <p:attrNameLst>
+                                          <p:attrName>style.visibility</p:attrName>
+                                        </p:attrNameLst>
+                                      </p:cBhvr>
+                                      <p:to>
+                                        <p:strVal val="visible"/>
+                                      </p:to>
+                                    </p:set>
+                                    <p:animEffect transition="in" filter="fade">
+                                      <p:cBhvr>
+                                        <p:cTn id="65" dur="500"/>
+                                        <p:tgtEl>
+                                          <p:spTgt spid="17"/>
+                                        </p:tgtEl>
+                                      </p:cBhvr>
+                                    </p:animEffect>
+                                  </p:childTnLst>
+                                </p:cTn>
+                              </p:par>
+                            </p:childTnLst>
+                          </p:cTn>
+                        </p:par>
+                        <p:par>
+                          <p:cTn id="66" fill="hold">
+                            <p:stCondLst>
+                              <p:cond delay="0"/>
+                            </p:stCondLst>
+                            <p:childTnLst>
+                              <p:par>
+                                <p:cTn id="67" presetID="10" presetClass="entr" presetSubtype="0" fill="hold" grpId="0" nodeType="withEffect">
+                                  <p:stCondLst>
+                                    <p:cond delay="0"/>
+                                  </p:stCondLst>
+                                  <p:childTnLst>
+                                    <p:set>
+                                      <p:cBhvr>
+                                        <p:cTn id="68" dur="1" fill="hold">
+                                          <p:stCondLst>
+                                            <p:cond delay="0"/>
+                                          </p:stCondLst>
+                                        </p:cTn>
+                                        <p:tgtEl>
+                                          <p:spTgt spid="18"/>
+                                        </p:tgtEl>
+                                        <p:attrNameLst>
+                                          <p:attrName>style.visibility</p:attrName>
+                                        </p:attrNameLst>
+                                      </p:cBhvr>
+                                      <p:to>
+                                        <p:strVal val="visible"/>
+                                      </p:to>
+                                    </p:set>
+                                    <p:animEffect transition="in" filter="fade">
+                                      <p:cBhvr>
+                                        <p:cTn id="69" dur="500"/>
+                                        <p:tgtEl>
+                                          <p:spTgt spid="18"/>
+                                        </p:tgtEl>
+                                      </p:cBhvr>
+                                    </p:animEffect>
+                                  </p:childTnLst>
+                                </p:cTn>
+                              </p:par>
+                            </p:childTnLst>
+                          </p:cTn>
+                        </p:par>
+                        <p:par>
+                          <p:cTn id="70" fill="hold">
+                            <p:stCondLst>
+                              <p:cond delay="0"/>
+                            </p:stCondLst>
+                            <p:childTnLst>
+                              <p:par>
+                                <p:cTn id="71" presetID="10" presetClass="entr" presetSubtype="0" fill="hold" grpId="0" nodeType="withEffect">
+                                  <p:stCondLst>
+                                    <p:cond delay="0"/>
+                                  </p:stCondLst>
+                                  <p:childTnLst>
+                                    <p:set>
+                                      <p:cBhvr>
+                                        <p:cTn id="72" dur="1" fill="hold">
+                                          <p:stCondLst>
+                                            <p:cond delay="0"/>
+                                          </p:stCondLst>
+                                        </p:cTn>
+                                        <p:tgtEl>
+                                          <p:spTgt spid="19"/>
+                                        </p:tgtEl>
+                                        <p:attrNameLst>
+                                          <p:attrName>style.visibility</p:attrName>
+                                        </p:attrNameLst>
+                                      </p:cBhvr>
+                                      <p:to>
+                                        <p:strVal val="visible"/>
+                                      </p:to>
+                                    </p:set>
+                                    <p:animEffect transition="in" filter="fade">
+                                      <p:cBhvr>
+                                        <p:cTn id="73" dur="500"/>
+                                        <p:tgtEl>
+                                          <p:spTgt spid="19"/>
+                                        </p:tgtEl>
+                                      </p:cBhvr>
+                                    </p:animEffect>
+                                  </p:childTnLst>
+                                </p:cTn>
+                              </p:par>
+                            </p:childTnLst>
+                          </p:cTn>
+                        </p:par>
+                        <p:par>
+                          <p:cTn id="74" fill="hold">
+                            <p:stCondLst>
+                              <p:cond delay="0"/>
+                            </p:stCondLst>
+                            <p:childTnLst>
+                              <p:par>
+                                <p:cTn id="75" presetID="10" presetClass="entr" presetSubtype="0" fill="hold" grpId="0" nodeType="withEffect">
+                                  <p:stCondLst>
+                                    <p:cond delay="0"/>
+                                  </p:stCondLst>
+                                  <p:childTnLst>
+                                    <p:set>
+                                      <p:cBhvr>
+                                        <p:cTn id="76" dur="1" fill="hold">
+                                          <p:stCondLst>
+                                            <p:cond delay="0"/>
+                                          </p:stCondLst>
+                                        </p:cTn>
+                                        <p:tgtEl>
+                                          <p:spTgt spid="20"/>
+                                        </p:tgtEl>
+                                        <p:attrNameLst>
+                                          <p:attrName>style.visibility</p:attrName>
+                                        </p:attrNameLst>
+                                      </p:cBhvr>
+                                      <p:to>
+                                        <p:strVal val="visible"/>
+                                      </p:to>
+                                    </p:set>
+                                    <p:animEffect transition="in" filter="fade">
+                                      <p:cBhvr>
+                                        <p:cTn id="77" dur="500"/>
+                                        <p:tgtEl>
+                                          <p:spTgt spid="20"/>
+                                        </p:tgtEl>
+                                      </p:cBhvr>
+                                    </p:animEffect>
+                                  </p:childTnLst>
+                                </p:cTn>
+                              </p:par>
+                            </p:childTnLst>
+                          </p:cTn>
+                        </p:par>
+                        <p:par>
+                          <p:cTn id="78" fill="hold">
+                            <p:stCondLst>
+                              <p:cond delay="0"/>
+                            </p:stCondLst>
+                            <p:childTnLst>
+                              <p:par>
+                                <p:cTn id="79" presetID="10" presetClass="entr" presetSubtype="0" fill="hold" grpId="0" nodeType="withEffect">
+                                  <p:stCondLst>
+                                    <p:cond delay="0"/>
+                                  </p:stCondLst>
+                                  <p:childTnLst>
+                                    <p:set>
+                                      <p:cBhvr>
+                                        <p:cTn id="80" dur="1" fill="hold">
+                                          <p:stCondLst>
+                                            <p:cond delay="0"/>
+                                          </p:stCondLst>
+                                        </p:cTn>
+                                        <p:tgtEl>
+                                          <p:spTgt spid="22"/>
+                                        </p:tgtEl>
+                                        <p:attrNameLst>
+                                          <p:attrName>style.visibility</p:attrName>
+                                        </p:attrNameLst>
+                                      </p:cBhvr>
+                                      <p:to>
+                                        <p:strVal val="visible"/>
+                                      </p:to>
+                                    </p:set>
+                                    <p:animEffect transition="in" filter="fade">
+                                      <p:cBhvr>
+                                        <p:cTn id="81" dur="500"/>
+                                        <p:tgtEl>
+                                          <p:spTgt spid="22"/>
+                                        </p:tgtEl>
+                                      </p:cBhvr>
+                                    </p:animEffect>
+                                  </p:childTnLst>
+                                </p:cTn>
+                              </p:par>
+                            </p:childTnLst>
+                          </p:cTn>
+                        </p:par>
+                        <p:par>
+                          <p:cTn id="82" fill="hold">
+                            <p:stCondLst>
+                              <p:cond delay="0"/>
+                            </p:stCondLst>
+                            <p:childTnLst>
+                              <p:par>
+                                <p:cTn id="83" presetID="10" presetClass="entr" presetSubtype="0" fill="hold" grpId="0" nodeType="withEffect">
+                                  <p:stCondLst>
+                                    <p:cond delay="0"/>
+                                  </p:stCondLst>
+                                  <p:childTnLst>
+                                    <p:set>
+                                      <p:cBhvr>
+                                        <p:cTn id="84" dur="1" fill="hold">
+                                          <p:stCondLst>
+                                            <p:cond delay="0"/>
+                                          </p:stCondLst>
+                                        </p:cTn>
+                                        <p:tgtEl>
+                                          <p:spTgt spid="23"/>
+                                        </p:tgtEl>
+                                        <p:attrNameLst>
+                                          <p:attrName>style.visibility</p:attrName>
+                                        </p:attrNameLst>
+                                      </p:cBhvr>
+                                      <p:to>
+                                        <p:strVal val="visible"/>
+                                      </p:to>
+                                    </p:set>
+                                    <p:animEffect transition="in" filter="fade">
+                                      <p:cBhvr>
+                                        <p:cTn id="85" dur="500"/>
+                                        <p:tgtEl>
+                                          <p:spTgt spid="23"/>
+                                        </p:tgtEl>
+                                      </p:cBhvr>
+                                    </p:animEffect>
+                                  </p:childTnLst>
+                                </p:cTn>
+                              </p:par>
+                            </p:childTnLst>
+                          </p:cTn>
+                        </p:par>
+                        <p:par>
+                          <p:cTn id="86" fill="hold">
+                            <p:stCondLst>
+                              <p:cond delay="0"/>
+                            </p:stCondLst>
+                            <p:childTnLst>
+                              <p:par>
+                                <p:cTn id="87" presetID="10" presetClass="entr" presetSubtype="0" fill="hold" grpId="0" nodeType="withEffect">
+                                  <p:stCondLst>
+                                    <p:cond delay="0"/>
+                                  </p:stCondLst>
+                                  <p:childTnLst>
+                                    <p:set>
+                                      <p:cBhvr>
+                                        <p:cTn id="88" dur="1" fill="hold">
+                                          <p:stCondLst>
+                                            <p:cond delay="0"/>
+                                          </p:stCondLst>
+                                        </p:cTn>
+                                        <p:tgtEl>
+                                          <p:spTgt spid="16"/>
+                                        </p:tgtEl>
+                                        <p:attrNameLst>
+                                          <p:attrName>style.visibility</p:attrName>
+                                        </p:attrNameLst>
+                                      </p:cBhvr>
+                                      <p:to>
+                                        <p:strVal val="visible"/>
+                                      </p:to>
+                                    </p:set>
+                                    <p:animEffect transition="in" filter="fade">
+                                      <p:cBhvr>
+                                        <p:cTn id="89" dur="500"/>
+                                        <p:tgtEl>
+                                          <p:spTgt spid="16"/>
+                                        </p:tgtEl>
+                                      </p:cBhvr>
+                                    </p:animEffect>
+                                  </p:childTnLst>
+                                </p:cTn>
+                              </p:par>
+                            </p:childTnLst>
+                          </p:cTn>
+                        </p:par>
+                        <p:par>
+                          <p:cTn id="90" fill="hold">
+                            <p:stCondLst>
+                              <p:cond delay="0"/>
+                            </p:stCondLst>
+                            <p:childTnLst>
+                              <p:par>
+                                <p:cTn id="91" presetID="10" presetClass="entr" presetSubtype="0" fill="hold" grpId="0" nodeType="withEffect">
+                                  <p:stCondLst>
+                                    <p:cond delay="0"/>
+                                  </p:stCondLst>
+                                  <p:childTnLst>
+                                    <p:set>
+                                      <p:cBhvr>
+                                        <p:cTn id="92" dur="1" fill="hold">
+                                          <p:stCondLst>
+                                            <p:cond delay="0"/>
+                                          </p:stCondLst>
+                                        </p:cTn>
+                                        <p:tgtEl>
+                                          <p:spTgt spid="21"/>
+                                        </p:tgtEl>
+                                        <p:attrNameLst>
+                                          <p:attrName>style.visibility</p:attrName>
+                                        </p:attrNameLst>
+                                      </p:cBhvr>
+                                      <p:to>
+                                        <p:strVal val="visible"/>
+                                      </p:to>
+                                    </p:set>
+                                    <p:animEffect transition="in" filter="fade">
+                                      <p:cBhvr>
+                                        <p:cTn id="93" dur="500"/>
+                                        <p:tgtEl>
+                                          <p:spTgt spid="21"/>
+                                        </p:tgtEl>
+                                      </p:cBhvr>
+                                    </p:animEffect>
+                                  </p:childTnLst>
+                                </p:cTn>
+                              </p:par>
+                            </p:childTnLst>
+                          </p:cTn>
+                        </p:par>
+                      </p:childTnLst>
+                    </p:cTn>
+                  </p:par>
+                </p:childTnLst>
+              </p:cTn>
+              <p:prevCondLst>
+                <p:cond evt="onPrev" delay="0">
+                  <p:tgtEl>
+                    <p:sldTgt/>
+                  </p:tgtEl>
+                </p:cond>
+              </p:prevCondLst>
+              <p:nextCondLst>
+                <p:cond evt="onNext" delay="0">
+                  <p:tgtEl>
+                    <p:sldTgt/>
+                  </p:tgtEl>
+                </p:cond>
+              </p:nextCondLst>
+            </p:seq>
+          </p:childTnLst>
+        </p:cTn>
+      </p:par>
+    </p:tnLst>
+    <p:bldLst>
+      <p:bldP spid="2" grpId="0"/>
+      <p:bldP spid="3" grpId="0"/>
+      <p:bldP spid="4" grpId="0"/>
+      <p:bldP spid="5" grpId="0"/>
+      <p:bldP spid="7" grpId="0"/>
+      <p:bldP spid="8" grpId="0"/>
+      <p:bldP spid="9" grpId="0"/>
+      <p:bldP spid="10" grpId="0"/>
+      <p:bldP spid="12" grpId="0"/>
+      <p:bldP spid="13" grpId="0"/>
+      <p:bldP spid="6" grpId="0"/>
+      <p:bldP spid="11" grpId="0"/>
+      <p:bldP spid="14" grpId="0"/>
+      <p:bldP spid="15" grpId="0"/>
+      <p:bldP spid="17" grpId="0"/>
+      <p:bldP spid="18" grpId="0"/>
+      <p:bldP spid="19" grpId="0"/>
+      <p:bldP spid="20" grpId="0"/>
+      <p:bldP spid="22" grpId="0"/>
+      <p:bldP spid="23" grpId="0"/>
+      <p:bldP spid="16" grpId="0"/>
+      <p:bldP spid="21" grpId="0"/>
+    </p:bldLst>
+  </p:timing>
 </p:sld>
 </file>
 
@@ -5535,7 +9675,7 @@
       </p:grpSpPr>
       <p:sp>
         <p:nvSpPr>
-          <p:cNvPr id="2" name="Text 0"/>
+          <p:cNvPr id="2" name="c1-1"/>
           <p:cNvSpPr txBox="1"/>
           <p:nvPr/>
         </p:nvSpPr>
@@ -5571,7 +9711,7 @@
       </p:sp>
       <p:sp>
         <p:nvSpPr>
-          <p:cNvPr id="3" name="Shape 1"/>
+          <p:cNvPr id="3" name="c1-2"/>
           <p:cNvSpPr/>
           <p:nvPr/>
         </p:nvSpPr>
@@ -5594,7 +9734,7 @@
       </p:sp>
       <p:sp>
         <p:nvSpPr>
-          <p:cNvPr id="4" name="Shape 2"/>
+          <p:cNvPr id="4" name="c2-3"/>
           <p:cNvSpPr/>
           <p:nvPr/>
         </p:nvSpPr>
@@ -5614,7 +9754,7 @@
       </p:sp>
       <p:sp>
         <p:nvSpPr>
-          <p:cNvPr id="5" name="Text 3"/>
+          <p:cNvPr id="5" name="c2-4"/>
           <p:cNvSpPr txBox="1"/>
           <p:nvPr/>
         </p:nvSpPr>
@@ -5650,7 +9790,7 @@
       </p:sp>
       <p:sp>
         <p:nvSpPr>
-          <p:cNvPr id="6" name="Shape 4"/>
+          <p:cNvPr id="6" name="c2-5"/>
           <p:cNvSpPr/>
           <p:nvPr/>
         </p:nvSpPr>
@@ -5679,7 +9819,7 @@
       </p:sp>
       <p:sp>
         <p:nvSpPr>
-          <p:cNvPr id="7" name="Shape 5"/>
+          <p:cNvPr id="7" name="c2-6bg"/>
           <p:cNvSpPr/>
           <p:nvPr/>
         </p:nvSpPr>
@@ -5701,7 +9841,7 @@
       </p:sp>
       <p:pic>
         <p:nvPicPr>
-          <p:cNvPr id="8" name="Image 0" descr="preencoded.png">    </p:cNvPr>
+          <p:cNvPr id="8" name="c2-6ic" descr="preencoded.png">    </p:cNvPr>
           <p:cNvPicPr>
             <a:picLocks noChangeAspect="1"/>
           </p:cNvPicPr>
@@ -5725,7 +9865,7 @@
       </p:pic>
       <p:sp>
         <p:nvSpPr>
-          <p:cNvPr id="9" name="Text 6"/>
+          <p:cNvPr id="9" name="c2-7"/>
           <p:cNvSpPr txBox="1"/>
           <p:nvPr/>
         </p:nvSpPr>
@@ -5761,7 +9901,7 @@
       </p:sp>
       <p:sp>
         <p:nvSpPr>
-          <p:cNvPr id="10" name="Text 7"/>
+          <p:cNvPr id="10" name="c2-8"/>
           <p:cNvSpPr txBox="1"/>
           <p:nvPr/>
         </p:nvSpPr>
@@ -5837,7 +9977,7 @@
       </p:sp>
       <p:sp>
         <p:nvSpPr>
-          <p:cNvPr id="11" name="Shape 8"/>
+          <p:cNvPr id="11" name="c3-9"/>
           <p:cNvSpPr/>
           <p:nvPr/>
         </p:nvSpPr>
@@ -5857,7 +9997,7 @@
       </p:sp>
       <p:sp>
         <p:nvSpPr>
-          <p:cNvPr id="12" name="Text 9"/>
+          <p:cNvPr id="12" name="c3-10"/>
           <p:cNvSpPr txBox="1"/>
           <p:nvPr/>
         </p:nvSpPr>
@@ -5893,7 +10033,7 @@
       </p:sp>
       <p:sp>
         <p:nvSpPr>
-          <p:cNvPr id="13" name="Shape 10"/>
+          <p:cNvPr id="13" name="c3-11"/>
           <p:cNvSpPr/>
           <p:nvPr/>
         </p:nvSpPr>
@@ -5922,7 +10062,7 @@
       </p:sp>
       <p:sp>
         <p:nvSpPr>
-          <p:cNvPr id="14" name="Shape 11"/>
+          <p:cNvPr id="14" name="c3-12bg"/>
           <p:cNvSpPr/>
           <p:nvPr/>
         </p:nvSpPr>
@@ -5944,7 +10084,7 @@
       </p:sp>
       <p:pic>
         <p:nvPicPr>
-          <p:cNvPr id="15" name="Image 1" descr="preencoded.png">    </p:cNvPr>
+          <p:cNvPr id="15" name="c3-12ic" descr="preencoded.png">    </p:cNvPr>
           <p:cNvPicPr>
             <a:picLocks noChangeAspect="1"/>
           </p:cNvPicPr>
@@ -5968,7 +10108,7 @@
       </p:pic>
       <p:sp>
         <p:nvSpPr>
-          <p:cNvPr id="16" name="Text 12"/>
+          <p:cNvPr id="16" name="c3-13"/>
           <p:cNvSpPr txBox="1"/>
           <p:nvPr/>
         </p:nvSpPr>
@@ -6004,7 +10144,7 @@
       </p:sp>
       <p:sp>
         <p:nvSpPr>
-          <p:cNvPr id="17" name="Text 13"/>
+          <p:cNvPr id="17" name="c3-14"/>
           <p:cNvSpPr txBox="1"/>
           <p:nvPr/>
         </p:nvSpPr>
@@ -6080,7 +10220,7 @@
       </p:sp>
       <p:sp>
         <p:nvSpPr>
-          <p:cNvPr id="18" name="Shape 14"/>
+          <p:cNvPr id="18" name="c4-15"/>
           <p:cNvSpPr/>
           <p:nvPr/>
         </p:nvSpPr>
@@ -6100,7 +10240,7 @@
       </p:sp>
       <p:sp>
         <p:nvSpPr>
-          <p:cNvPr id="19" name="Text 15"/>
+          <p:cNvPr id="19" name="c4-16"/>
           <p:cNvSpPr txBox="1"/>
           <p:nvPr/>
         </p:nvSpPr>
@@ -6136,7 +10276,7 @@
       </p:sp>
       <p:sp>
         <p:nvSpPr>
-          <p:cNvPr id="20" name="Shape 16"/>
+          <p:cNvPr id="20" name="c4-17"/>
           <p:cNvSpPr/>
           <p:nvPr/>
         </p:nvSpPr>
@@ -6165,7 +10305,7 @@
       </p:sp>
       <p:sp>
         <p:nvSpPr>
-          <p:cNvPr id="21" name="Shape 17"/>
+          <p:cNvPr id="21" name="c4-18bg"/>
           <p:cNvSpPr/>
           <p:nvPr/>
         </p:nvSpPr>
@@ -6187,7 +10327,7 @@
       </p:sp>
       <p:pic>
         <p:nvPicPr>
-          <p:cNvPr id="22" name="Image 2" descr="preencoded.png">    </p:cNvPr>
+          <p:cNvPr id="22" name="c4-18ic" descr="preencoded.png">    </p:cNvPr>
           <p:cNvPicPr>
             <a:picLocks noChangeAspect="1"/>
           </p:cNvPicPr>
@@ -6211,7 +10351,7 @@
       </p:pic>
       <p:sp>
         <p:nvSpPr>
-          <p:cNvPr id="23" name="Text 18"/>
+          <p:cNvPr id="23" name="c4-19"/>
           <p:cNvSpPr txBox="1"/>
           <p:nvPr/>
         </p:nvSpPr>
@@ -6247,7 +10387,7 @@
       </p:sp>
       <p:sp>
         <p:nvSpPr>
-          <p:cNvPr id="24" name="Text 19"/>
+          <p:cNvPr id="24" name="c4-20"/>
           <p:cNvSpPr txBox="1"/>
           <p:nvPr/>
         </p:nvSpPr>
@@ -6323,7 +10463,7 @@
       </p:sp>
       <p:sp>
         <p:nvSpPr>
-          <p:cNvPr id="25" name="Shape 20"/>
+          <p:cNvPr id="25" name="c5-21"/>
           <p:cNvSpPr/>
           <p:nvPr/>
         </p:nvSpPr>
@@ -6343,7 +10483,7 @@
       </p:sp>
       <p:sp>
         <p:nvSpPr>
-          <p:cNvPr id="26" name="Text 21"/>
+          <p:cNvPr id="26" name="c5-22"/>
           <p:cNvSpPr txBox="1"/>
           <p:nvPr/>
         </p:nvSpPr>
@@ -6379,7 +10519,7 @@
       </p:sp>
       <p:sp>
         <p:nvSpPr>
-          <p:cNvPr id="27" name="Shape 22"/>
+          <p:cNvPr id="27" name="c5-23"/>
           <p:cNvSpPr/>
           <p:nvPr/>
         </p:nvSpPr>
@@ -6408,7 +10548,7 @@
       </p:sp>
       <p:sp>
         <p:nvSpPr>
-          <p:cNvPr id="28" name="Shape 23"/>
+          <p:cNvPr id="28" name="c5-24bg"/>
           <p:cNvSpPr/>
           <p:nvPr/>
         </p:nvSpPr>
@@ -6430,7 +10570,7 @@
       </p:sp>
       <p:pic>
         <p:nvPicPr>
-          <p:cNvPr id="29" name="Image 3" descr="preencoded.png">    </p:cNvPr>
+          <p:cNvPr id="29" name="c5-24ic" descr="preencoded.png">    </p:cNvPr>
           <p:cNvPicPr>
             <a:picLocks noChangeAspect="1"/>
           </p:cNvPicPr>
@@ -6454,7 +10594,7 @@
       </p:pic>
       <p:sp>
         <p:nvSpPr>
-          <p:cNvPr id="30" name="Text 24"/>
+          <p:cNvPr id="30" name="c5-25"/>
           <p:cNvSpPr txBox="1"/>
           <p:nvPr/>
         </p:nvSpPr>
@@ -6490,7 +10630,7 @@
       </p:sp>
       <p:sp>
         <p:nvSpPr>
-          <p:cNvPr id="31" name="Text 25"/>
+          <p:cNvPr id="31" name="c5-26"/>
           <p:cNvSpPr txBox="1"/>
           <p:nvPr/>
         </p:nvSpPr>
@@ -6614,6 +10754,1433 @@
   <p:clrMapOvr>
     <a:masterClrMapping/>
   </p:clrMapOvr>
+  <p:timing>
+    <p:tnLst>
+      <p:par>
+        <p:cTn id="1" dur="indefinite" restart="never" nodeType="tmRoot">
+          <p:childTnLst>
+            <p:seq concurrent="1" nextAc="seek">
+              <p:cTn id="2" dur="indefinite" nodeType="mainSeq">
+                <p:childTnLst>
+                  <p:par>
+                    <p:cTn id="3" fill="hold">
+                      <p:stCondLst>
+                        <p:cond delay="indefinite"/>
+                      </p:stCondLst>
+                      <p:childTnLst>
+                        <p:par>
+                          <p:cTn id="4" fill="hold">
+                            <p:stCondLst>
+                              <p:cond delay="0"/>
+                            </p:stCondLst>
+                            <p:childTnLst>
+                              <p:par>
+                                <p:cTn id="5" presetID="10" presetClass="entr" presetSubtype="0" fill="hold" grpId="0" nodeType="clickEffect">
+                                  <p:stCondLst>
+                                    <p:cond delay="0"/>
+                                  </p:stCondLst>
+                                  <p:childTnLst>
+                                    <p:set>
+                                      <p:cBhvr>
+                                        <p:cTn id="6" dur="1" fill="hold">
+                                          <p:stCondLst>
+                                            <p:cond delay="0"/>
+                                          </p:stCondLst>
+                                        </p:cTn>
+                                        <p:tgtEl>
+                                          <p:spTgt spid="2"/>
+                                        </p:tgtEl>
+                                        <p:attrNameLst>
+                                          <p:attrName>style.visibility</p:attrName>
+                                        </p:attrNameLst>
+                                      </p:cBhvr>
+                                      <p:to>
+                                        <p:strVal val="visible"/>
+                                      </p:to>
+                                    </p:set>
+                                    <p:animEffect transition="in" filter="fade">
+                                      <p:cBhvr>
+                                        <p:cTn id="7" dur="500"/>
+                                        <p:tgtEl>
+                                          <p:spTgt spid="2"/>
+                                        </p:tgtEl>
+                                      </p:cBhvr>
+                                    </p:animEffect>
+                                  </p:childTnLst>
+                                </p:cTn>
+                              </p:par>
+                            </p:childTnLst>
+                          </p:cTn>
+                        </p:par>
+                        <p:par>
+                          <p:cTn id="8" fill="hold">
+                            <p:stCondLst>
+                              <p:cond delay="0"/>
+                            </p:stCondLst>
+                            <p:childTnLst>
+                              <p:par>
+                                <p:cTn id="9" presetID="10" presetClass="entr" presetSubtype="0" fill="hold" grpId="0" nodeType="withEffect">
+                                  <p:stCondLst>
+                                    <p:cond delay="0"/>
+                                  </p:stCondLst>
+                                  <p:childTnLst>
+                                    <p:set>
+                                      <p:cBhvr>
+                                        <p:cTn id="10" dur="1" fill="hold">
+                                          <p:stCondLst>
+                                            <p:cond delay="0"/>
+                                          </p:stCondLst>
+                                        </p:cTn>
+                                        <p:tgtEl>
+                                          <p:spTgt spid="3"/>
+                                        </p:tgtEl>
+                                        <p:attrNameLst>
+                                          <p:attrName>style.visibility</p:attrName>
+                                        </p:attrNameLst>
+                                      </p:cBhvr>
+                                      <p:to>
+                                        <p:strVal val="visible"/>
+                                      </p:to>
+                                    </p:set>
+                                    <p:animEffect transition="in" filter="fade">
+                                      <p:cBhvr>
+                                        <p:cTn id="11" dur="500"/>
+                                        <p:tgtEl>
+                                          <p:spTgt spid="3"/>
+                                        </p:tgtEl>
+                                      </p:cBhvr>
+                                    </p:animEffect>
+                                  </p:childTnLst>
+                                </p:cTn>
+                              </p:par>
+                            </p:childTnLst>
+                          </p:cTn>
+                        </p:par>
+                      </p:childTnLst>
+                    </p:cTn>
+                  </p:par>
+                  <p:par>
+                    <p:cTn id="12" fill="hold">
+                      <p:stCondLst>
+                        <p:cond delay="indefinite"/>
+                      </p:stCondLst>
+                      <p:childTnLst>
+                        <p:par>
+                          <p:cTn id="13" fill="hold">
+                            <p:stCondLst>
+                              <p:cond delay="0"/>
+                            </p:stCondLst>
+                            <p:childTnLst>
+                              <p:par>
+                                <p:cTn id="14" presetID="10" presetClass="entr" presetSubtype="0" fill="hold" grpId="0" nodeType="clickEffect">
+                                  <p:stCondLst>
+                                    <p:cond delay="0"/>
+                                  </p:stCondLst>
+                                  <p:childTnLst>
+                                    <p:set>
+                                      <p:cBhvr>
+                                        <p:cTn id="15" dur="1" fill="hold">
+                                          <p:stCondLst>
+                                            <p:cond delay="0"/>
+                                          </p:stCondLst>
+                                        </p:cTn>
+                                        <p:tgtEl>
+                                          <p:spTgt spid="4"/>
+                                        </p:tgtEl>
+                                        <p:attrNameLst>
+                                          <p:attrName>style.visibility</p:attrName>
+                                        </p:attrNameLst>
+                                      </p:cBhvr>
+                                      <p:to>
+                                        <p:strVal val="visible"/>
+                                      </p:to>
+                                    </p:set>
+                                    <p:animEffect transition="in" filter="fade">
+                                      <p:cBhvr>
+                                        <p:cTn id="16" dur="500"/>
+                                        <p:tgtEl>
+                                          <p:spTgt spid="4"/>
+                                        </p:tgtEl>
+                                      </p:cBhvr>
+                                    </p:animEffect>
+                                  </p:childTnLst>
+                                </p:cTn>
+                              </p:par>
+                            </p:childTnLst>
+                          </p:cTn>
+                        </p:par>
+                        <p:par>
+                          <p:cTn id="17" fill="hold">
+                            <p:stCondLst>
+                              <p:cond delay="0"/>
+                            </p:stCondLst>
+                            <p:childTnLst>
+                              <p:par>
+                                <p:cTn id="18" presetID="10" presetClass="entr" presetSubtype="0" fill="hold" grpId="0" nodeType="withEffect">
+                                  <p:stCondLst>
+                                    <p:cond delay="0"/>
+                                  </p:stCondLst>
+                                  <p:childTnLst>
+                                    <p:set>
+                                      <p:cBhvr>
+                                        <p:cTn id="19" dur="1" fill="hold">
+                                          <p:stCondLst>
+                                            <p:cond delay="0"/>
+                                          </p:stCondLst>
+                                        </p:cTn>
+                                        <p:tgtEl>
+                                          <p:spTgt spid="5"/>
+                                        </p:tgtEl>
+                                        <p:attrNameLst>
+                                          <p:attrName>style.visibility</p:attrName>
+                                        </p:attrNameLst>
+                                      </p:cBhvr>
+                                      <p:to>
+                                        <p:strVal val="visible"/>
+                                      </p:to>
+                                    </p:set>
+                                    <p:animEffect transition="in" filter="fade">
+                                      <p:cBhvr>
+                                        <p:cTn id="20" dur="500"/>
+                                        <p:tgtEl>
+                                          <p:spTgt spid="5"/>
+                                        </p:tgtEl>
+                                      </p:cBhvr>
+                                    </p:animEffect>
+                                  </p:childTnLst>
+                                </p:cTn>
+                              </p:par>
+                            </p:childTnLst>
+                          </p:cTn>
+                        </p:par>
+                        <p:par>
+                          <p:cTn id="21" fill="hold">
+                            <p:stCondLst>
+                              <p:cond delay="0"/>
+                            </p:stCondLst>
+                            <p:childTnLst>
+                              <p:par>
+                                <p:cTn id="22" presetID="10" presetClass="entr" presetSubtype="0" fill="hold" grpId="0" nodeType="withEffect">
+                                  <p:stCondLst>
+                                    <p:cond delay="0"/>
+                                  </p:stCondLst>
+                                  <p:childTnLst>
+                                    <p:set>
+                                      <p:cBhvr>
+                                        <p:cTn id="23" dur="1" fill="hold">
+                                          <p:stCondLst>
+                                            <p:cond delay="0"/>
+                                          </p:stCondLst>
+                                        </p:cTn>
+                                        <p:tgtEl>
+                                          <p:spTgt spid="6"/>
+                                        </p:tgtEl>
+                                        <p:attrNameLst>
+                                          <p:attrName>style.visibility</p:attrName>
+                                        </p:attrNameLst>
+                                      </p:cBhvr>
+                                      <p:to>
+                                        <p:strVal val="visible"/>
+                                      </p:to>
+                                    </p:set>
+                                    <p:animEffect transition="in" filter="fade">
+                                      <p:cBhvr>
+                                        <p:cTn id="24" dur="500"/>
+                                        <p:tgtEl>
+                                          <p:spTgt spid="6"/>
+                                        </p:tgtEl>
+                                      </p:cBhvr>
+                                    </p:animEffect>
+                                  </p:childTnLst>
+                                </p:cTn>
+                              </p:par>
+                            </p:childTnLst>
+                          </p:cTn>
+                        </p:par>
+                        <p:par>
+                          <p:cTn id="25" fill="hold">
+                            <p:stCondLst>
+                              <p:cond delay="0"/>
+                            </p:stCondLst>
+                            <p:childTnLst>
+                              <p:par>
+                                <p:cTn id="26" presetID="10" presetClass="entr" presetSubtype="0" fill="hold" grpId="0" nodeType="withEffect">
+                                  <p:stCondLst>
+                                    <p:cond delay="0"/>
+                                  </p:stCondLst>
+                                  <p:childTnLst>
+                                    <p:set>
+                                      <p:cBhvr>
+                                        <p:cTn id="27" dur="1" fill="hold">
+                                          <p:stCondLst>
+                                            <p:cond delay="0"/>
+                                          </p:stCondLst>
+                                        </p:cTn>
+                                        <p:tgtEl>
+                                          <p:spTgt spid="7"/>
+                                        </p:tgtEl>
+                                        <p:attrNameLst>
+                                          <p:attrName>style.visibility</p:attrName>
+                                        </p:attrNameLst>
+                                      </p:cBhvr>
+                                      <p:to>
+                                        <p:strVal val="visible"/>
+                                      </p:to>
+                                    </p:set>
+                                    <p:animEffect transition="in" filter="fade">
+                                      <p:cBhvr>
+                                        <p:cTn id="28" dur="500"/>
+                                        <p:tgtEl>
+                                          <p:spTgt spid="7"/>
+                                        </p:tgtEl>
+                                      </p:cBhvr>
+                                    </p:animEffect>
+                                  </p:childTnLst>
+                                </p:cTn>
+                              </p:par>
+                            </p:childTnLst>
+                          </p:cTn>
+                        </p:par>
+                        <p:par>
+                          <p:cTn id="29" fill="hold">
+                            <p:stCondLst>
+                              <p:cond delay="0"/>
+                            </p:stCondLst>
+                            <p:childTnLst>
+                              <p:par>
+                                <p:cTn id="30" presetID="10" presetClass="entr" presetSubtype="0" fill="hold" grpId="0" nodeType="withEffect">
+                                  <p:stCondLst>
+                                    <p:cond delay="0"/>
+                                  </p:stCondLst>
+                                  <p:childTnLst>
+                                    <p:set>
+                                      <p:cBhvr>
+                                        <p:cTn id="31" dur="1" fill="hold">
+                                          <p:stCondLst>
+                                            <p:cond delay="0"/>
+                                          </p:stCondLst>
+                                        </p:cTn>
+                                        <p:tgtEl>
+                                          <p:spTgt spid="9"/>
+                                        </p:tgtEl>
+                                        <p:attrNameLst>
+                                          <p:attrName>style.visibility</p:attrName>
+                                        </p:attrNameLst>
+                                      </p:cBhvr>
+                                      <p:to>
+                                        <p:strVal val="visible"/>
+                                      </p:to>
+                                    </p:set>
+                                    <p:animEffect transition="in" filter="fade">
+                                      <p:cBhvr>
+                                        <p:cTn id="32" dur="500"/>
+                                        <p:tgtEl>
+                                          <p:spTgt spid="9"/>
+                                        </p:tgtEl>
+                                      </p:cBhvr>
+                                    </p:animEffect>
+                                  </p:childTnLst>
+                                </p:cTn>
+                              </p:par>
+                            </p:childTnLst>
+                          </p:cTn>
+                        </p:par>
+                        <p:par>
+                          <p:cTn id="33" fill="hold">
+                            <p:stCondLst>
+                              <p:cond delay="0"/>
+                            </p:stCondLst>
+                            <p:childTnLst>
+                              <p:par>
+                                <p:cTn id="34" presetID="10" presetClass="entr" presetSubtype="0" fill="hold" grpId="0" nodeType="withEffect">
+                                  <p:stCondLst>
+                                    <p:cond delay="0"/>
+                                  </p:stCondLst>
+                                  <p:childTnLst>
+                                    <p:set>
+                                      <p:cBhvr>
+                                        <p:cTn id="35" dur="1" fill="hold">
+                                          <p:stCondLst>
+                                            <p:cond delay="0"/>
+                                          </p:stCondLst>
+                                        </p:cTn>
+                                        <p:tgtEl>
+                                          <p:spTgt spid="10"/>
+                                        </p:tgtEl>
+                                        <p:attrNameLst>
+                                          <p:attrName>style.visibility</p:attrName>
+                                        </p:attrNameLst>
+                                      </p:cBhvr>
+                                      <p:to>
+                                        <p:strVal val="visible"/>
+                                      </p:to>
+                                    </p:set>
+                                    <p:animEffect transition="in" filter="fade">
+                                      <p:cBhvr>
+                                        <p:cTn id="36" dur="500"/>
+                                        <p:tgtEl>
+                                          <p:spTgt spid="10"/>
+                                        </p:tgtEl>
+                                      </p:cBhvr>
+                                    </p:animEffect>
+                                  </p:childTnLst>
+                                </p:cTn>
+                              </p:par>
+                            </p:childTnLst>
+                          </p:cTn>
+                        </p:par>
+                        <p:par>
+                          <p:cTn id="37" fill="hold">
+                            <p:stCondLst>
+                              <p:cond delay="0"/>
+                            </p:stCondLst>
+                            <p:childTnLst>
+                              <p:par>
+                                <p:cTn id="38" presetID="10" presetClass="entr" presetSubtype="0" fill="hold" grpId="0" nodeType="withEffect">
+                                  <p:stCondLst>
+                                    <p:cond delay="0"/>
+                                  </p:stCondLst>
+                                  <p:childTnLst>
+                                    <p:set>
+                                      <p:cBhvr>
+                                        <p:cTn id="39" dur="1" fill="hold">
+                                          <p:stCondLst>
+                                            <p:cond delay="0"/>
+                                          </p:stCondLst>
+                                        </p:cTn>
+                                        <p:tgtEl>
+                                          <p:spTgt spid="8"/>
+                                        </p:tgtEl>
+                                        <p:attrNameLst>
+                                          <p:attrName>style.visibility</p:attrName>
+                                        </p:attrNameLst>
+                                      </p:cBhvr>
+                                      <p:to>
+                                        <p:strVal val="visible"/>
+                                      </p:to>
+                                    </p:set>
+                                    <p:animEffect transition="in" filter="fade">
+                                      <p:cBhvr>
+                                        <p:cTn id="40" dur="500"/>
+                                        <p:tgtEl>
+                                          <p:spTgt spid="8"/>
+                                        </p:tgtEl>
+                                      </p:cBhvr>
+                                    </p:animEffect>
+                                  </p:childTnLst>
+                                </p:cTn>
+                              </p:par>
+                            </p:childTnLst>
+                          </p:cTn>
+                        </p:par>
+                      </p:childTnLst>
+                    </p:cTn>
+                  </p:par>
+                  <p:par>
+                    <p:cTn id="41" fill="hold">
+                      <p:stCondLst>
+                        <p:cond delay="indefinite"/>
+                      </p:stCondLst>
+                      <p:childTnLst>
+                        <p:par>
+                          <p:cTn id="42" fill="hold">
+                            <p:stCondLst>
+                              <p:cond delay="0"/>
+                            </p:stCondLst>
+                            <p:childTnLst>
+                              <p:par>
+                                <p:cTn id="43" presetID="10" presetClass="entr" presetSubtype="0" fill="hold" grpId="0" nodeType="clickEffect">
+                                  <p:stCondLst>
+                                    <p:cond delay="0"/>
+                                  </p:stCondLst>
+                                  <p:childTnLst>
+                                    <p:set>
+                                      <p:cBhvr>
+                                        <p:cTn id="44" dur="1" fill="hold">
+                                          <p:stCondLst>
+                                            <p:cond delay="0"/>
+                                          </p:stCondLst>
+                                        </p:cTn>
+                                        <p:tgtEl>
+                                          <p:spTgt spid="11"/>
+                                        </p:tgtEl>
+                                        <p:attrNameLst>
+                                          <p:attrName>style.visibility</p:attrName>
+                                        </p:attrNameLst>
+                                      </p:cBhvr>
+                                      <p:to>
+                                        <p:strVal val="visible"/>
+                                      </p:to>
+                                    </p:set>
+                                    <p:animEffect transition="in" filter="fade">
+                                      <p:cBhvr>
+                                        <p:cTn id="45" dur="500"/>
+                                        <p:tgtEl>
+                                          <p:spTgt spid="11"/>
+                                        </p:tgtEl>
+                                      </p:cBhvr>
+                                    </p:animEffect>
+                                  </p:childTnLst>
+                                </p:cTn>
+                              </p:par>
+                            </p:childTnLst>
+                          </p:cTn>
+                        </p:par>
+                        <p:par>
+                          <p:cTn id="46" fill="hold">
+                            <p:stCondLst>
+                              <p:cond delay="0"/>
+                            </p:stCondLst>
+                            <p:childTnLst>
+                              <p:par>
+                                <p:cTn id="47" presetID="10" presetClass="entr" presetSubtype="0" fill="hold" grpId="0" nodeType="withEffect">
+                                  <p:stCondLst>
+                                    <p:cond delay="0"/>
+                                  </p:stCondLst>
+                                  <p:childTnLst>
+                                    <p:set>
+                                      <p:cBhvr>
+                                        <p:cTn id="48" dur="1" fill="hold">
+                                          <p:stCondLst>
+                                            <p:cond delay="0"/>
+                                          </p:stCondLst>
+                                        </p:cTn>
+                                        <p:tgtEl>
+                                          <p:spTgt spid="12"/>
+                                        </p:tgtEl>
+                                        <p:attrNameLst>
+                                          <p:attrName>style.visibility</p:attrName>
+                                        </p:attrNameLst>
+                                      </p:cBhvr>
+                                      <p:to>
+                                        <p:strVal val="visible"/>
+                                      </p:to>
+                                    </p:set>
+                                    <p:animEffect transition="in" filter="fade">
+                                      <p:cBhvr>
+                                        <p:cTn id="49" dur="500"/>
+                                        <p:tgtEl>
+                                          <p:spTgt spid="12"/>
+                                        </p:tgtEl>
+                                      </p:cBhvr>
+                                    </p:animEffect>
+                                  </p:childTnLst>
+                                </p:cTn>
+                              </p:par>
+                            </p:childTnLst>
+                          </p:cTn>
+                        </p:par>
+                        <p:par>
+                          <p:cTn id="50" fill="hold">
+                            <p:stCondLst>
+                              <p:cond delay="0"/>
+                            </p:stCondLst>
+                            <p:childTnLst>
+                              <p:par>
+                                <p:cTn id="51" presetID="10" presetClass="entr" presetSubtype="0" fill="hold" grpId="0" nodeType="withEffect">
+                                  <p:stCondLst>
+                                    <p:cond delay="0"/>
+                                  </p:stCondLst>
+                                  <p:childTnLst>
+                                    <p:set>
+                                      <p:cBhvr>
+                                        <p:cTn id="52" dur="1" fill="hold">
+                                          <p:stCondLst>
+                                            <p:cond delay="0"/>
+                                          </p:stCondLst>
+                                        </p:cTn>
+                                        <p:tgtEl>
+                                          <p:spTgt spid="13"/>
+                                        </p:tgtEl>
+                                        <p:attrNameLst>
+                                          <p:attrName>style.visibility</p:attrName>
+                                        </p:attrNameLst>
+                                      </p:cBhvr>
+                                      <p:to>
+                                        <p:strVal val="visible"/>
+                                      </p:to>
+                                    </p:set>
+                                    <p:animEffect transition="in" filter="fade">
+                                      <p:cBhvr>
+                                        <p:cTn id="53" dur="500"/>
+                                        <p:tgtEl>
+                                          <p:spTgt spid="13"/>
+                                        </p:tgtEl>
+                                      </p:cBhvr>
+                                    </p:animEffect>
+                                  </p:childTnLst>
+                                </p:cTn>
+                              </p:par>
+                            </p:childTnLst>
+                          </p:cTn>
+                        </p:par>
+                        <p:par>
+                          <p:cTn id="54" fill="hold">
+                            <p:stCondLst>
+                              <p:cond delay="0"/>
+                            </p:stCondLst>
+                            <p:childTnLst>
+                              <p:par>
+                                <p:cTn id="55" presetID="10" presetClass="entr" presetSubtype="0" fill="hold" grpId="0" nodeType="withEffect">
+                                  <p:stCondLst>
+                                    <p:cond delay="0"/>
+                                  </p:stCondLst>
+                                  <p:childTnLst>
+                                    <p:set>
+                                      <p:cBhvr>
+                                        <p:cTn id="56" dur="1" fill="hold">
+                                          <p:stCondLst>
+                                            <p:cond delay="0"/>
+                                          </p:stCondLst>
+                                        </p:cTn>
+                                        <p:tgtEl>
+                                          <p:spTgt spid="14"/>
+                                        </p:tgtEl>
+                                        <p:attrNameLst>
+                                          <p:attrName>style.visibility</p:attrName>
+                                        </p:attrNameLst>
+                                      </p:cBhvr>
+                                      <p:to>
+                                        <p:strVal val="visible"/>
+                                      </p:to>
+                                    </p:set>
+                                    <p:animEffect transition="in" filter="fade">
+                                      <p:cBhvr>
+                                        <p:cTn id="57" dur="500"/>
+                                        <p:tgtEl>
+                                          <p:spTgt spid="14"/>
+                                        </p:tgtEl>
+                                      </p:cBhvr>
+                                    </p:animEffect>
+                                  </p:childTnLst>
+                                </p:cTn>
+                              </p:par>
+                            </p:childTnLst>
+                          </p:cTn>
+                        </p:par>
+                        <p:par>
+                          <p:cTn id="58" fill="hold">
+                            <p:stCondLst>
+                              <p:cond delay="0"/>
+                            </p:stCondLst>
+                            <p:childTnLst>
+                              <p:par>
+                                <p:cTn id="59" presetID="10" presetClass="entr" presetSubtype="0" fill="hold" grpId="0" nodeType="withEffect">
+                                  <p:stCondLst>
+                                    <p:cond delay="0"/>
+                                  </p:stCondLst>
+                                  <p:childTnLst>
+                                    <p:set>
+                                      <p:cBhvr>
+                                        <p:cTn id="60" dur="1" fill="hold">
+                                          <p:stCondLst>
+                                            <p:cond delay="0"/>
+                                          </p:stCondLst>
+                                        </p:cTn>
+                                        <p:tgtEl>
+                                          <p:spTgt spid="16"/>
+                                        </p:tgtEl>
+                                        <p:attrNameLst>
+                                          <p:attrName>style.visibility</p:attrName>
+                                        </p:attrNameLst>
+                                      </p:cBhvr>
+                                      <p:to>
+                                        <p:strVal val="visible"/>
+                                      </p:to>
+                                    </p:set>
+                                    <p:animEffect transition="in" filter="fade">
+                                      <p:cBhvr>
+                                        <p:cTn id="61" dur="500"/>
+                                        <p:tgtEl>
+                                          <p:spTgt spid="16"/>
+                                        </p:tgtEl>
+                                      </p:cBhvr>
+                                    </p:animEffect>
+                                  </p:childTnLst>
+                                </p:cTn>
+                              </p:par>
+                            </p:childTnLst>
+                          </p:cTn>
+                        </p:par>
+                        <p:par>
+                          <p:cTn id="62" fill="hold">
+                            <p:stCondLst>
+                              <p:cond delay="0"/>
+                            </p:stCondLst>
+                            <p:childTnLst>
+                              <p:par>
+                                <p:cTn id="63" presetID="10" presetClass="entr" presetSubtype="0" fill="hold" grpId="0" nodeType="withEffect">
+                                  <p:stCondLst>
+                                    <p:cond delay="0"/>
+                                  </p:stCondLst>
+                                  <p:childTnLst>
+                                    <p:set>
+                                      <p:cBhvr>
+                                        <p:cTn id="64" dur="1" fill="hold">
+                                          <p:stCondLst>
+                                            <p:cond delay="0"/>
+                                          </p:stCondLst>
+                                        </p:cTn>
+                                        <p:tgtEl>
+                                          <p:spTgt spid="17"/>
+                                        </p:tgtEl>
+                                        <p:attrNameLst>
+                                          <p:attrName>style.visibility</p:attrName>
+                                        </p:attrNameLst>
+                                      </p:cBhvr>
+                                      <p:to>
+                                        <p:strVal val="visible"/>
+                                      </p:to>
+                                    </p:set>
+                                    <p:animEffect transition="in" filter="fade">
+                                      <p:cBhvr>
+                                        <p:cTn id="65" dur="500"/>
+                                        <p:tgtEl>
+                                          <p:spTgt spid="17"/>
+                                        </p:tgtEl>
+                                      </p:cBhvr>
+                                    </p:animEffect>
+                                  </p:childTnLst>
+                                </p:cTn>
+                              </p:par>
+                            </p:childTnLst>
+                          </p:cTn>
+                        </p:par>
+                        <p:par>
+                          <p:cTn id="66" fill="hold">
+                            <p:stCondLst>
+                              <p:cond delay="0"/>
+                            </p:stCondLst>
+                            <p:childTnLst>
+                              <p:par>
+                                <p:cTn id="67" presetID="10" presetClass="entr" presetSubtype="0" fill="hold" grpId="0" nodeType="withEffect">
+                                  <p:stCondLst>
+                                    <p:cond delay="0"/>
+                                  </p:stCondLst>
+                                  <p:childTnLst>
+                                    <p:set>
+                                      <p:cBhvr>
+                                        <p:cTn id="68" dur="1" fill="hold">
+                                          <p:stCondLst>
+                                            <p:cond delay="0"/>
+                                          </p:stCondLst>
+                                        </p:cTn>
+                                        <p:tgtEl>
+                                          <p:spTgt spid="15"/>
+                                        </p:tgtEl>
+                                        <p:attrNameLst>
+                                          <p:attrName>style.visibility</p:attrName>
+                                        </p:attrNameLst>
+                                      </p:cBhvr>
+                                      <p:to>
+                                        <p:strVal val="visible"/>
+                                      </p:to>
+                                    </p:set>
+                                    <p:animEffect transition="in" filter="fade">
+                                      <p:cBhvr>
+                                        <p:cTn id="69" dur="500"/>
+                                        <p:tgtEl>
+                                          <p:spTgt spid="15"/>
+                                        </p:tgtEl>
+                                      </p:cBhvr>
+                                    </p:animEffect>
+                                  </p:childTnLst>
+                                </p:cTn>
+                              </p:par>
+                            </p:childTnLst>
+                          </p:cTn>
+                        </p:par>
+                      </p:childTnLst>
+                    </p:cTn>
+                  </p:par>
+                  <p:par>
+                    <p:cTn id="70" fill="hold">
+                      <p:stCondLst>
+                        <p:cond delay="indefinite"/>
+                      </p:stCondLst>
+                      <p:childTnLst>
+                        <p:par>
+                          <p:cTn id="71" fill="hold">
+                            <p:stCondLst>
+                              <p:cond delay="0"/>
+                            </p:stCondLst>
+                            <p:childTnLst>
+                              <p:par>
+                                <p:cTn id="72" presetID="10" presetClass="entr" presetSubtype="0" fill="hold" grpId="0" nodeType="clickEffect">
+                                  <p:stCondLst>
+                                    <p:cond delay="0"/>
+                                  </p:stCondLst>
+                                  <p:childTnLst>
+                                    <p:set>
+                                      <p:cBhvr>
+                                        <p:cTn id="73" dur="1" fill="hold">
+                                          <p:stCondLst>
+                                            <p:cond delay="0"/>
+                                          </p:stCondLst>
+                                        </p:cTn>
+                                        <p:tgtEl>
+                                          <p:spTgt spid="18"/>
+                                        </p:tgtEl>
+                                        <p:attrNameLst>
+                                          <p:attrName>style.visibility</p:attrName>
+                                        </p:attrNameLst>
+                                      </p:cBhvr>
+                                      <p:to>
+                                        <p:strVal val="visible"/>
+                                      </p:to>
+                                    </p:set>
+                                    <p:animEffect transition="in" filter="fade">
+                                      <p:cBhvr>
+                                        <p:cTn id="74" dur="500"/>
+                                        <p:tgtEl>
+                                          <p:spTgt spid="18"/>
+                                        </p:tgtEl>
+                                      </p:cBhvr>
+                                    </p:animEffect>
+                                  </p:childTnLst>
+                                </p:cTn>
+                              </p:par>
+                            </p:childTnLst>
+                          </p:cTn>
+                        </p:par>
+                        <p:par>
+                          <p:cTn id="75" fill="hold">
+                            <p:stCondLst>
+                              <p:cond delay="0"/>
+                            </p:stCondLst>
+                            <p:childTnLst>
+                              <p:par>
+                                <p:cTn id="76" presetID="10" presetClass="entr" presetSubtype="0" fill="hold" grpId="0" nodeType="withEffect">
+                                  <p:stCondLst>
+                                    <p:cond delay="0"/>
+                                  </p:stCondLst>
+                                  <p:childTnLst>
+                                    <p:set>
+                                      <p:cBhvr>
+                                        <p:cTn id="77" dur="1" fill="hold">
+                                          <p:stCondLst>
+                                            <p:cond delay="0"/>
+                                          </p:stCondLst>
+                                        </p:cTn>
+                                        <p:tgtEl>
+                                          <p:spTgt spid="19"/>
+                                        </p:tgtEl>
+                                        <p:attrNameLst>
+                                          <p:attrName>style.visibility</p:attrName>
+                                        </p:attrNameLst>
+                                      </p:cBhvr>
+                                      <p:to>
+                                        <p:strVal val="visible"/>
+                                      </p:to>
+                                    </p:set>
+                                    <p:animEffect transition="in" filter="fade">
+                                      <p:cBhvr>
+                                        <p:cTn id="78" dur="500"/>
+                                        <p:tgtEl>
+                                          <p:spTgt spid="19"/>
+                                        </p:tgtEl>
+                                      </p:cBhvr>
+                                    </p:animEffect>
+                                  </p:childTnLst>
+                                </p:cTn>
+                              </p:par>
+                            </p:childTnLst>
+                          </p:cTn>
+                        </p:par>
+                        <p:par>
+                          <p:cTn id="79" fill="hold">
+                            <p:stCondLst>
+                              <p:cond delay="0"/>
+                            </p:stCondLst>
+                            <p:childTnLst>
+                              <p:par>
+                                <p:cTn id="80" presetID="10" presetClass="entr" presetSubtype="0" fill="hold" grpId="0" nodeType="withEffect">
+                                  <p:stCondLst>
+                                    <p:cond delay="0"/>
+                                  </p:stCondLst>
+                                  <p:childTnLst>
+                                    <p:set>
+                                      <p:cBhvr>
+                                        <p:cTn id="81" dur="1" fill="hold">
+                                          <p:stCondLst>
+                                            <p:cond delay="0"/>
+                                          </p:stCondLst>
+                                        </p:cTn>
+                                        <p:tgtEl>
+                                          <p:spTgt spid="20"/>
+                                        </p:tgtEl>
+                                        <p:attrNameLst>
+                                          <p:attrName>style.visibility</p:attrName>
+                                        </p:attrNameLst>
+                                      </p:cBhvr>
+                                      <p:to>
+                                        <p:strVal val="visible"/>
+                                      </p:to>
+                                    </p:set>
+                                    <p:animEffect transition="in" filter="fade">
+                                      <p:cBhvr>
+                                        <p:cTn id="82" dur="500"/>
+                                        <p:tgtEl>
+                                          <p:spTgt spid="20"/>
+                                        </p:tgtEl>
+                                      </p:cBhvr>
+                                    </p:animEffect>
+                                  </p:childTnLst>
+                                </p:cTn>
+                              </p:par>
+                            </p:childTnLst>
+                          </p:cTn>
+                        </p:par>
+                        <p:par>
+                          <p:cTn id="83" fill="hold">
+                            <p:stCondLst>
+                              <p:cond delay="0"/>
+                            </p:stCondLst>
+                            <p:childTnLst>
+                              <p:par>
+                                <p:cTn id="84" presetID="10" presetClass="entr" presetSubtype="0" fill="hold" grpId="0" nodeType="withEffect">
+                                  <p:stCondLst>
+                                    <p:cond delay="0"/>
+                                  </p:stCondLst>
+                                  <p:childTnLst>
+                                    <p:set>
+                                      <p:cBhvr>
+                                        <p:cTn id="85" dur="1" fill="hold">
+                                          <p:stCondLst>
+                                            <p:cond delay="0"/>
+                                          </p:stCondLst>
+                                        </p:cTn>
+                                        <p:tgtEl>
+                                          <p:spTgt spid="21"/>
+                                        </p:tgtEl>
+                                        <p:attrNameLst>
+                                          <p:attrName>style.visibility</p:attrName>
+                                        </p:attrNameLst>
+                                      </p:cBhvr>
+                                      <p:to>
+                                        <p:strVal val="visible"/>
+                                      </p:to>
+                                    </p:set>
+                                    <p:animEffect transition="in" filter="fade">
+                                      <p:cBhvr>
+                                        <p:cTn id="86" dur="500"/>
+                                        <p:tgtEl>
+                                          <p:spTgt spid="21"/>
+                                        </p:tgtEl>
+                                      </p:cBhvr>
+                                    </p:animEffect>
+                                  </p:childTnLst>
+                                </p:cTn>
+                              </p:par>
+                            </p:childTnLst>
+                          </p:cTn>
+                        </p:par>
+                        <p:par>
+                          <p:cTn id="87" fill="hold">
+                            <p:stCondLst>
+                              <p:cond delay="0"/>
+                            </p:stCondLst>
+                            <p:childTnLst>
+                              <p:par>
+                                <p:cTn id="88" presetID="10" presetClass="entr" presetSubtype="0" fill="hold" grpId="0" nodeType="withEffect">
+                                  <p:stCondLst>
+                                    <p:cond delay="0"/>
+                                  </p:stCondLst>
+                                  <p:childTnLst>
+                                    <p:set>
+                                      <p:cBhvr>
+                                        <p:cTn id="89" dur="1" fill="hold">
+                                          <p:stCondLst>
+                                            <p:cond delay="0"/>
+                                          </p:stCondLst>
+                                        </p:cTn>
+                                        <p:tgtEl>
+                                          <p:spTgt spid="23"/>
+                                        </p:tgtEl>
+                                        <p:attrNameLst>
+                                          <p:attrName>style.visibility</p:attrName>
+                                        </p:attrNameLst>
+                                      </p:cBhvr>
+                                      <p:to>
+                                        <p:strVal val="visible"/>
+                                      </p:to>
+                                    </p:set>
+                                    <p:animEffect transition="in" filter="fade">
+                                      <p:cBhvr>
+                                        <p:cTn id="90" dur="500"/>
+                                        <p:tgtEl>
+                                          <p:spTgt spid="23"/>
+                                        </p:tgtEl>
+                                      </p:cBhvr>
+                                    </p:animEffect>
+                                  </p:childTnLst>
+                                </p:cTn>
+                              </p:par>
+                            </p:childTnLst>
+                          </p:cTn>
+                        </p:par>
+                        <p:par>
+                          <p:cTn id="91" fill="hold">
+                            <p:stCondLst>
+                              <p:cond delay="0"/>
+                            </p:stCondLst>
+                            <p:childTnLst>
+                              <p:par>
+                                <p:cTn id="92" presetID="10" presetClass="entr" presetSubtype="0" fill="hold" grpId="0" nodeType="withEffect">
+                                  <p:stCondLst>
+                                    <p:cond delay="0"/>
+                                  </p:stCondLst>
+                                  <p:childTnLst>
+                                    <p:set>
+                                      <p:cBhvr>
+                                        <p:cTn id="93" dur="1" fill="hold">
+                                          <p:stCondLst>
+                                            <p:cond delay="0"/>
+                                          </p:stCondLst>
+                                        </p:cTn>
+                                        <p:tgtEl>
+                                          <p:spTgt spid="24"/>
+                                        </p:tgtEl>
+                                        <p:attrNameLst>
+                                          <p:attrName>style.visibility</p:attrName>
+                                        </p:attrNameLst>
+                                      </p:cBhvr>
+                                      <p:to>
+                                        <p:strVal val="visible"/>
+                                      </p:to>
+                                    </p:set>
+                                    <p:animEffect transition="in" filter="fade">
+                                      <p:cBhvr>
+                                        <p:cTn id="94" dur="500"/>
+                                        <p:tgtEl>
+                                          <p:spTgt spid="24"/>
+                                        </p:tgtEl>
+                                      </p:cBhvr>
+                                    </p:animEffect>
+                                  </p:childTnLst>
+                                </p:cTn>
+                              </p:par>
+                            </p:childTnLst>
+                          </p:cTn>
+                        </p:par>
+                        <p:par>
+                          <p:cTn id="95" fill="hold">
+                            <p:stCondLst>
+                              <p:cond delay="0"/>
+                            </p:stCondLst>
+                            <p:childTnLst>
+                              <p:par>
+                                <p:cTn id="96" presetID="10" presetClass="entr" presetSubtype="0" fill="hold" grpId="0" nodeType="withEffect">
+                                  <p:stCondLst>
+                                    <p:cond delay="0"/>
+                                  </p:stCondLst>
+                                  <p:childTnLst>
+                                    <p:set>
+                                      <p:cBhvr>
+                                        <p:cTn id="97" dur="1" fill="hold">
+                                          <p:stCondLst>
+                                            <p:cond delay="0"/>
+                                          </p:stCondLst>
+                                        </p:cTn>
+                                        <p:tgtEl>
+                                          <p:spTgt spid="22"/>
+                                        </p:tgtEl>
+                                        <p:attrNameLst>
+                                          <p:attrName>style.visibility</p:attrName>
+                                        </p:attrNameLst>
+                                      </p:cBhvr>
+                                      <p:to>
+                                        <p:strVal val="visible"/>
+                                      </p:to>
+                                    </p:set>
+                                    <p:animEffect transition="in" filter="fade">
+                                      <p:cBhvr>
+                                        <p:cTn id="98" dur="500"/>
+                                        <p:tgtEl>
+                                          <p:spTgt spid="22"/>
+                                        </p:tgtEl>
+                                      </p:cBhvr>
+                                    </p:animEffect>
+                                  </p:childTnLst>
+                                </p:cTn>
+                              </p:par>
+                            </p:childTnLst>
+                          </p:cTn>
+                        </p:par>
+                      </p:childTnLst>
+                    </p:cTn>
+                  </p:par>
+                  <p:par>
+                    <p:cTn id="99" fill="hold">
+                      <p:stCondLst>
+                        <p:cond delay="indefinite"/>
+                      </p:stCondLst>
+                      <p:childTnLst>
+                        <p:par>
+                          <p:cTn id="100" fill="hold">
+                            <p:stCondLst>
+                              <p:cond delay="0"/>
+                            </p:stCondLst>
+                            <p:childTnLst>
+                              <p:par>
+                                <p:cTn id="101" presetID="10" presetClass="entr" presetSubtype="0" fill="hold" grpId="0" nodeType="clickEffect">
+                                  <p:stCondLst>
+                                    <p:cond delay="0"/>
+                                  </p:stCondLst>
+                                  <p:childTnLst>
+                                    <p:set>
+                                      <p:cBhvr>
+                                        <p:cTn id="102" dur="1" fill="hold">
+                                          <p:stCondLst>
+                                            <p:cond delay="0"/>
+                                          </p:stCondLst>
+                                        </p:cTn>
+                                        <p:tgtEl>
+                                          <p:spTgt spid="25"/>
+                                        </p:tgtEl>
+                                        <p:attrNameLst>
+                                          <p:attrName>style.visibility</p:attrName>
+                                        </p:attrNameLst>
+                                      </p:cBhvr>
+                                      <p:to>
+                                        <p:strVal val="visible"/>
+                                      </p:to>
+                                    </p:set>
+                                    <p:animEffect transition="in" filter="fade">
+                                      <p:cBhvr>
+                                        <p:cTn id="103" dur="500"/>
+                                        <p:tgtEl>
+                                          <p:spTgt spid="25"/>
+                                        </p:tgtEl>
+                                      </p:cBhvr>
+                                    </p:animEffect>
+                                  </p:childTnLst>
+                                </p:cTn>
+                              </p:par>
+                            </p:childTnLst>
+                          </p:cTn>
+                        </p:par>
+                        <p:par>
+                          <p:cTn id="104" fill="hold">
+                            <p:stCondLst>
+                              <p:cond delay="0"/>
+                            </p:stCondLst>
+                            <p:childTnLst>
+                              <p:par>
+                                <p:cTn id="105" presetID="10" presetClass="entr" presetSubtype="0" fill="hold" grpId="0" nodeType="withEffect">
+                                  <p:stCondLst>
+                                    <p:cond delay="0"/>
+                                  </p:stCondLst>
+                                  <p:childTnLst>
+                                    <p:set>
+                                      <p:cBhvr>
+                                        <p:cTn id="106" dur="1" fill="hold">
+                                          <p:stCondLst>
+                                            <p:cond delay="0"/>
+                                          </p:stCondLst>
+                                        </p:cTn>
+                                        <p:tgtEl>
+                                          <p:spTgt spid="26"/>
+                                        </p:tgtEl>
+                                        <p:attrNameLst>
+                                          <p:attrName>style.visibility</p:attrName>
+                                        </p:attrNameLst>
+                                      </p:cBhvr>
+                                      <p:to>
+                                        <p:strVal val="visible"/>
+                                      </p:to>
+                                    </p:set>
+                                    <p:animEffect transition="in" filter="fade">
+                                      <p:cBhvr>
+                                        <p:cTn id="107" dur="500"/>
+                                        <p:tgtEl>
+                                          <p:spTgt spid="26"/>
+                                        </p:tgtEl>
+                                      </p:cBhvr>
+                                    </p:animEffect>
+                                  </p:childTnLst>
+                                </p:cTn>
+                              </p:par>
+                            </p:childTnLst>
+                          </p:cTn>
+                        </p:par>
+                        <p:par>
+                          <p:cTn id="108" fill="hold">
+                            <p:stCondLst>
+                              <p:cond delay="0"/>
+                            </p:stCondLst>
+                            <p:childTnLst>
+                              <p:par>
+                                <p:cTn id="109" presetID="10" presetClass="entr" presetSubtype="0" fill="hold" grpId="0" nodeType="withEffect">
+                                  <p:stCondLst>
+                                    <p:cond delay="0"/>
+                                  </p:stCondLst>
+                                  <p:childTnLst>
+                                    <p:set>
+                                      <p:cBhvr>
+                                        <p:cTn id="110" dur="1" fill="hold">
+                                          <p:stCondLst>
+                                            <p:cond delay="0"/>
+                                          </p:stCondLst>
+                                        </p:cTn>
+                                        <p:tgtEl>
+                                          <p:spTgt spid="27"/>
+                                        </p:tgtEl>
+                                        <p:attrNameLst>
+                                          <p:attrName>style.visibility</p:attrName>
+                                        </p:attrNameLst>
+                                      </p:cBhvr>
+                                      <p:to>
+                                        <p:strVal val="visible"/>
+                                      </p:to>
+                                    </p:set>
+                                    <p:animEffect transition="in" filter="fade">
+                                      <p:cBhvr>
+                                        <p:cTn id="111" dur="500"/>
+                                        <p:tgtEl>
+                                          <p:spTgt spid="27"/>
+                                        </p:tgtEl>
+                                      </p:cBhvr>
+                                    </p:animEffect>
+                                  </p:childTnLst>
+                                </p:cTn>
+                              </p:par>
+                            </p:childTnLst>
+                          </p:cTn>
+                        </p:par>
+                        <p:par>
+                          <p:cTn id="112" fill="hold">
+                            <p:stCondLst>
+                              <p:cond delay="0"/>
+                            </p:stCondLst>
+                            <p:childTnLst>
+                              <p:par>
+                                <p:cTn id="113" presetID="10" presetClass="entr" presetSubtype="0" fill="hold" grpId="0" nodeType="withEffect">
+                                  <p:stCondLst>
+                                    <p:cond delay="0"/>
+                                  </p:stCondLst>
+                                  <p:childTnLst>
+                                    <p:set>
+                                      <p:cBhvr>
+                                        <p:cTn id="114" dur="1" fill="hold">
+                                          <p:stCondLst>
+                                            <p:cond delay="0"/>
+                                          </p:stCondLst>
+                                        </p:cTn>
+                                        <p:tgtEl>
+                                          <p:spTgt spid="28"/>
+                                        </p:tgtEl>
+                                        <p:attrNameLst>
+                                          <p:attrName>style.visibility</p:attrName>
+                                        </p:attrNameLst>
+                                      </p:cBhvr>
+                                      <p:to>
+                                        <p:strVal val="visible"/>
+                                      </p:to>
+                                    </p:set>
+                                    <p:animEffect transition="in" filter="fade">
+                                      <p:cBhvr>
+                                        <p:cTn id="115" dur="500"/>
+                                        <p:tgtEl>
+                                          <p:spTgt spid="28"/>
+                                        </p:tgtEl>
+                                      </p:cBhvr>
+                                    </p:animEffect>
+                                  </p:childTnLst>
+                                </p:cTn>
+                              </p:par>
+                            </p:childTnLst>
+                          </p:cTn>
+                        </p:par>
+                        <p:par>
+                          <p:cTn id="116" fill="hold">
+                            <p:stCondLst>
+                              <p:cond delay="0"/>
+                            </p:stCondLst>
+                            <p:childTnLst>
+                              <p:par>
+                                <p:cTn id="117" presetID="10" presetClass="entr" presetSubtype="0" fill="hold" grpId="0" nodeType="withEffect">
+                                  <p:stCondLst>
+                                    <p:cond delay="0"/>
+                                  </p:stCondLst>
+                                  <p:childTnLst>
+                                    <p:set>
+                                      <p:cBhvr>
+                                        <p:cTn id="118" dur="1" fill="hold">
+                                          <p:stCondLst>
+                                            <p:cond delay="0"/>
+                                          </p:stCondLst>
+                                        </p:cTn>
+                                        <p:tgtEl>
+                                          <p:spTgt spid="30"/>
+                                        </p:tgtEl>
+                                        <p:attrNameLst>
+                                          <p:attrName>style.visibility</p:attrName>
+                                        </p:attrNameLst>
+                                      </p:cBhvr>
+                                      <p:to>
+                                        <p:strVal val="visible"/>
+                                      </p:to>
+                                    </p:set>
+                                    <p:animEffect transition="in" filter="fade">
+                                      <p:cBhvr>
+                                        <p:cTn id="119" dur="500"/>
+                                        <p:tgtEl>
+                                          <p:spTgt spid="30"/>
+                                        </p:tgtEl>
+                                      </p:cBhvr>
+                                    </p:animEffect>
+                                  </p:childTnLst>
+                                </p:cTn>
+                              </p:par>
+                            </p:childTnLst>
+                          </p:cTn>
+                        </p:par>
+                        <p:par>
+                          <p:cTn id="120" fill="hold">
+                            <p:stCondLst>
+                              <p:cond delay="0"/>
+                            </p:stCondLst>
+                            <p:childTnLst>
+                              <p:par>
+                                <p:cTn id="121" presetID="10" presetClass="entr" presetSubtype="0" fill="hold" grpId="0" nodeType="withEffect">
+                                  <p:stCondLst>
+                                    <p:cond delay="0"/>
+                                  </p:stCondLst>
+                                  <p:childTnLst>
+                                    <p:set>
+                                      <p:cBhvr>
+                                        <p:cTn id="122" dur="1" fill="hold">
+                                          <p:stCondLst>
+                                            <p:cond delay="0"/>
+                                          </p:stCondLst>
+                                        </p:cTn>
+                                        <p:tgtEl>
+                                          <p:spTgt spid="31"/>
+                                        </p:tgtEl>
+                                        <p:attrNameLst>
+                                          <p:attrName>style.visibility</p:attrName>
+                                        </p:attrNameLst>
+                                      </p:cBhvr>
+                                      <p:to>
+                                        <p:strVal val="visible"/>
+                                      </p:to>
+                                    </p:set>
+                                    <p:animEffect transition="in" filter="fade">
+                                      <p:cBhvr>
+                                        <p:cTn id="123" dur="500"/>
+                                        <p:tgtEl>
+                                          <p:spTgt spid="31"/>
+                                        </p:tgtEl>
+                                      </p:cBhvr>
+                                    </p:animEffect>
+                                  </p:childTnLst>
+                                </p:cTn>
+                              </p:par>
+                            </p:childTnLst>
+                          </p:cTn>
+                        </p:par>
+                        <p:par>
+                          <p:cTn id="124" fill="hold">
+                            <p:stCondLst>
+                              <p:cond delay="0"/>
+                            </p:stCondLst>
+                            <p:childTnLst>
+                              <p:par>
+                                <p:cTn id="125" presetID="10" presetClass="entr" presetSubtype="0" fill="hold" grpId="0" nodeType="withEffect">
+                                  <p:stCondLst>
+                                    <p:cond delay="0"/>
+                                  </p:stCondLst>
+                                  <p:childTnLst>
+                                    <p:set>
+                                      <p:cBhvr>
+                                        <p:cTn id="126" dur="1" fill="hold">
+                                          <p:stCondLst>
+                                            <p:cond delay="0"/>
+                                          </p:stCondLst>
+                                        </p:cTn>
+                                        <p:tgtEl>
+                                          <p:spTgt spid="29"/>
+                                        </p:tgtEl>
+                                        <p:attrNameLst>
+                                          <p:attrName>style.visibility</p:attrName>
+                                        </p:attrNameLst>
+                                      </p:cBhvr>
+                                      <p:to>
+                                        <p:strVal val="visible"/>
+                                      </p:to>
+                                    </p:set>
+                                    <p:animEffect transition="in" filter="fade">
+                                      <p:cBhvr>
+                                        <p:cTn id="127" dur="500"/>
+                                        <p:tgtEl>
+                                          <p:spTgt spid="29"/>
+                                        </p:tgtEl>
+                                      </p:cBhvr>
+                                    </p:animEffect>
+                                  </p:childTnLst>
+                                </p:cTn>
+                              </p:par>
+                            </p:childTnLst>
+                          </p:cTn>
+                        </p:par>
+                      </p:childTnLst>
+                    </p:cTn>
+                  </p:par>
+                </p:childTnLst>
+              </p:cTn>
+              <p:prevCondLst>
+                <p:cond evt="onPrev" delay="0">
+                  <p:tgtEl>
+                    <p:sldTgt/>
+                  </p:tgtEl>
+                </p:cond>
+              </p:prevCondLst>
+              <p:nextCondLst>
+                <p:cond evt="onNext" delay="0">
+                  <p:tgtEl>
+                    <p:sldTgt/>
+                  </p:tgtEl>
+                </p:cond>
+              </p:nextCondLst>
+            </p:seq>
+          </p:childTnLst>
+        </p:cTn>
+      </p:par>
+    </p:tnLst>
+    <p:bldLst>
+      <p:bldP spid="2" grpId="0"/>
+      <p:bldP spid="3" grpId="0"/>
+      <p:bldP spid="4" grpId="0"/>
+      <p:bldP spid="5" grpId="0"/>
+      <p:bldP spid="6" grpId="0"/>
+      <p:bldP spid="7" grpId="0"/>
+      <p:bldP spid="9" grpId="0"/>
+      <p:bldP spid="10" grpId="0"/>
+      <p:bldP spid="8" grpId="0"/>
+      <p:bldP spid="11" grpId="0"/>
+      <p:bldP spid="12" grpId="0"/>
+      <p:bldP spid="13" grpId="0"/>
+      <p:bldP spid="14" grpId="0"/>
+      <p:bldP spid="16" grpId="0"/>
+      <p:bldP spid="17" grpId="0"/>
+      <p:bldP spid="15" grpId="0"/>
+      <p:bldP spid="18" grpId="0"/>
+      <p:bldP spid="19" grpId="0"/>
+      <p:bldP spid="20" grpId="0"/>
+      <p:bldP spid="21" grpId="0"/>
+      <p:bldP spid="23" grpId="0"/>
+      <p:bldP spid="24" grpId="0"/>
+      <p:bldP spid="22" grpId="0"/>
+      <p:bldP spid="25" grpId="0"/>
+      <p:bldP spid="26" grpId="0"/>
+      <p:bldP spid="27" grpId="0"/>
+      <p:bldP spid="28" grpId="0"/>
+      <p:bldP spid="30" grpId="0"/>
+      <p:bldP spid="31" grpId="0"/>
+      <p:bldP spid="29" grpId="0"/>
+    </p:bldLst>
+  </p:timing>
 </p:sld>
 </file>
 
@@ -6636,7 +12203,7 @@
       </p:grpSpPr>
       <p:sp>
         <p:nvSpPr>
-          <p:cNvPr id="2" name="Text 0"/>
+          <p:cNvPr id="2" name="c1-1"/>
           <p:cNvSpPr txBox="1"/>
           <p:nvPr/>
         </p:nvSpPr>
@@ -6672,7 +12239,7 @@
       </p:sp>
       <p:graphicFrame>
         <p:nvGraphicFramePr>
-          <p:cNvPr id="3" name="Chart 0" descr=""/>
+          <p:cNvPr id="3" name="c2-2" descr=""/>
           <p:cNvGraphicFramePr/>
           <p:nvPr/>
         </p:nvGraphicFramePr>
@@ -6688,7 +12255,7 @@
       </p:graphicFrame>
       <p:sp>
         <p:nvSpPr>
-          <p:cNvPr id="4" name="Shape 1"/>
+          <p:cNvPr id="4" name="c3-3"/>
           <p:cNvSpPr/>
           <p:nvPr/>
         </p:nvSpPr>
@@ -6717,7 +12284,7 @@
       </p:sp>
       <p:sp>
         <p:nvSpPr>
-          <p:cNvPr id="5" name="Shape 2"/>
+          <p:cNvPr id="5" name="c3-4bg"/>
           <p:cNvSpPr/>
           <p:nvPr/>
         </p:nvSpPr>
@@ -6739,7 +12306,7 @@
       </p:sp>
       <p:pic>
         <p:nvPicPr>
-          <p:cNvPr id="6" name="Image 0" descr="preencoded.png">    </p:cNvPr>
+          <p:cNvPr id="6" name="c3-4ic" descr="preencoded.png">    </p:cNvPr>
           <p:cNvPicPr>
             <a:picLocks noChangeAspect="1"/>
           </p:cNvPicPr>
@@ -6763,7 +12330,7 @@
       </p:pic>
       <p:sp>
         <p:nvSpPr>
-          <p:cNvPr id="7" name="Text 3"/>
+          <p:cNvPr id="7" name="c3-5"/>
           <p:cNvSpPr txBox="1"/>
           <p:nvPr/>
         </p:nvSpPr>
@@ -6799,7 +12366,7 @@
       </p:sp>
       <p:sp>
         <p:nvSpPr>
-          <p:cNvPr id="8" name="Text 4"/>
+          <p:cNvPr id="8" name="c3-6"/>
           <p:cNvSpPr txBox="1"/>
           <p:nvPr/>
         </p:nvSpPr>
@@ -6835,7 +12402,7 @@
       </p:sp>
       <p:sp>
         <p:nvSpPr>
-          <p:cNvPr id="9" name="Shape 5"/>
+          <p:cNvPr id="9" name="c3-7"/>
           <p:cNvSpPr/>
           <p:nvPr/>
         </p:nvSpPr>
@@ -6864,7 +12431,7 @@
       </p:sp>
       <p:sp>
         <p:nvSpPr>
-          <p:cNvPr id="10" name="Shape 6"/>
+          <p:cNvPr id="10" name="c3-8bg"/>
           <p:cNvSpPr/>
           <p:nvPr/>
         </p:nvSpPr>
@@ -6886,7 +12453,7 @@
       </p:sp>
       <p:pic>
         <p:nvPicPr>
-          <p:cNvPr id="11" name="Image 1" descr="preencoded.png">    </p:cNvPr>
+          <p:cNvPr id="11" name="c3-8ic" descr="preencoded.png">    </p:cNvPr>
           <p:cNvPicPr>
             <a:picLocks noChangeAspect="1"/>
           </p:cNvPicPr>
@@ -6910,7 +12477,7 @@
       </p:pic>
       <p:sp>
         <p:nvSpPr>
-          <p:cNvPr id="12" name="Text 7"/>
+          <p:cNvPr id="12" name="c3-9"/>
           <p:cNvSpPr txBox="1"/>
           <p:nvPr/>
         </p:nvSpPr>
@@ -6946,7 +12513,7 @@
       </p:sp>
       <p:sp>
         <p:nvSpPr>
-          <p:cNvPr id="13" name="Text 8"/>
+          <p:cNvPr id="13" name="c3-10"/>
           <p:cNvSpPr txBox="1"/>
           <p:nvPr/>
         </p:nvSpPr>
@@ -6982,7 +12549,7 @@
       </p:sp>
       <p:sp>
         <p:nvSpPr>
-          <p:cNvPr id="14" name="Shape 9"/>
+          <p:cNvPr id="14" name="c3-11"/>
           <p:cNvSpPr/>
           <p:nvPr/>
         </p:nvSpPr>
@@ -7011,7 +12578,7 @@
       </p:sp>
       <p:sp>
         <p:nvSpPr>
-          <p:cNvPr id="15" name="Shape 10"/>
+          <p:cNvPr id="15" name="c3-12bg"/>
           <p:cNvSpPr/>
           <p:nvPr/>
         </p:nvSpPr>
@@ -7033,7 +12600,7 @@
       </p:sp>
       <p:pic>
         <p:nvPicPr>
-          <p:cNvPr id="16" name="Image 2" descr="preencoded.png">    </p:cNvPr>
+          <p:cNvPr id="16" name="c3-12ic" descr="preencoded.png">    </p:cNvPr>
           <p:cNvPicPr>
             <a:picLocks noChangeAspect="1"/>
           </p:cNvPicPr>
@@ -7057,7 +12624,7 @@
       </p:pic>
       <p:sp>
         <p:nvSpPr>
-          <p:cNvPr id="17" name="Text 11"/>
+          <p:cNvPr id="17" name="c3-13"/>
           <p:cNvSpPr txBox="1"/>
           <p:nvPr/>
         </p:nvSpPr>
@@ -7093,7 +12660,7 @@
       </p:sp>
       <p:sp>
         <p:nvSpPr>
-          <p:cNvPr id="18" name="Text 12"/>
+          <p:cNvPr id="18" name="c3-14"/>
           <p:cNvSpPr txBox="1"/>
           <p:nvPr/>
         </p:nvSpPr>
@@ -7177,6 +12744,832 @@
   <p:clrMapOvr>
     <a:masterClrMapping/>
   </p:clrMapOvr>
+  <p:timing>
+    <p:tnLst>
+      <p:par>
+        <p:cTn id="1" dur="indefinite" restart="never" nodeType="tmRoot">
+          <p:childTnLst>
+            <p:seq concurrent="1" nextAc="seek">
+              <p:cTn id="2" dur="indefinite" nodeType="mainSeq">
+                <p:childTnLst>
+                  <p:par>
+                    <p:cTn id="3" fill="hold">
+                      <p:stCondLst>
+                        <p:cond delay="indefinite"/>
+                      </p:stCondLst>
+                      <p:childTnLst>
+                        <p:par>
+                          <p:cTn id="4" fill="hold">
+                            <p:stCondLst>
+                              <p:cond delay="0"/>
+                            </p:stCondLst>
+                            <p:childTnLst>
+                              <p:par>
+                                <p:cTn id="5" presetID="10" presetClass="entr" presetSubtype="0" fill="hold" grpId="0" nodeType="clickEffect">
+                                  <p:stCondLst>
+                                    <p:cond delay="0"/>
+                                  </p:stCondLst>
+                                  <p:childTnLst>
+                                    <p:set>
+                                      <p:cBhvr>
+                                        <p:cTn id="6" dur="1" fill="hold">
+                                          <p:stCondLst>
+                                            <p:cond delay="0"/>
+                                          </p:stCondLst>
+                                        </p:cTn>
+                                        <p:tgtEl>
+                                          <p:spTgt spid="2"/>
+                                        </p:tgtEl>
+                                        <p:attrNameLst>
+                                          <p:attrName>style.visibility</p:attrName>
+                                        </p:attrNameLst>
+                                      </p:cBhvr>
+                                      <p:to>
+                                        <p:strVal val="visible"/>
+                                      </p:to>
+                                    </p:set>
+                                    <p:animEffect transition="in" filter="fade">
+                                      <p:cBhvr>
+                                        <p:cTn id="7" dur="500"/>
+                                        <p:tgtEl>
+                                          <p:spTgt spid="2"/>
+                                        </p:tgtEl>
+                                      </p:cBhvr>
+                                    </p:animEffect>
+                                  </p:childTnLst>
+                                </p:cTn>
+                              </p:par>
+                            </p:childTnLst>
+                          </p:cTn>
+                        </p:par>
+                      </p:childTnLst>
+                    </p:cTn>
+                  </p:par>
+                  <p:par>
+                    <p:cTn id="8" fill="hold">
+                      <p:stCondLst>
+                        <p:cond delay="indefinite"/>
+                      </p:stCondLst>
+                      <p:childTnLst>
+                        <p:par>
+                          <p:cTn id="9" fill="hold">
+                            <p:stCondLst>
+                              <p:cond delay="0"/>
+                            </p:stCondLst>
+                            <p:childTnLst>
+                              <p:par>
+                                <p:cTn id="10" presetID="10" presetClass="entr" presetSubtype="0" fill="hold" grpId="0" nodeType="clickEffect">
+                                  <p:stCondLst>
+                                    <p:cond delay="0"/>
+                                  </p:stCondLst>
+                                  <p:childTnLst>
+                                    <p:set>
+                                      <p:cBhvr>
+                                        <p:cTn id="11" dur="1" fill="hold">
+                                          <p:stCondLst>
+                                            <p:cond delay="0"/>
+                                          </p:stCondLst>
+                                        </p:cTn>
+                                        <p:tgtEl>
+                                          <p:spTgt spid="3"/>
+                                        </p:tgtEl>
+                                        <p:attrNameLst>
+                                          <p:attrName>style.visibility</p:attrName>
+                                        </p:attrNameLst>
+                                      </p:cBhvr>
+                                      <p:to>
+                                        <p:strVal val="visible"/>
+                                      </p:to>
+                                    </p:set>
+                                    <p:animEffect transition="in" filter="fade">
+                                      <p:cBhvr>
+                                        <p:cTn id="12" dur="500"/>
+                                        <p:tgtEl>
+                                          <p:spTgt spid="3"/>
+                                        </p:tgtEl>
+                                      </p:cBhvr>
+                                    </p:animEffect>
+                                  </p:childTnLst>
+                                </p:cTn>
+                              </p:par>
+                            </p:childTnLst>
+                          </p:cTn>
+                        </p:par>
+                      </p:childTnLst>
+                    </p:cTn>
+                  </p:par>
+                  <p:par>
+                    <p:cTn id="13" fill="hold">
+                      <p:stCondLst>
+                        <p:cond delay="indefinite"/>
+                      </p:stCondLst>
+                      <p:childTnLst>
+                        <p:par>
+                          <p:cTn id="14" fill="hold">
+                            <p:stCondLst>
+                              <p:cond delay="0"/>
+                            </p:stCondLst>
+                            <p:childTnLst>
+                              <p:par>
+                                <p:cTn id="15" presetID="10" presetClass="entr" presetSubtype="0" fill="hold" grpId="0" nodeType="clickEffect">
+                                  <p:stCondLst>
+                                    <p:cond delay="0"/>
+                                  </p:stCondLst>
+                                  <p:childTnLst>
+                                    <p:set>
+                                      <p:cBhvr>
+                                        <p:cTn id="16" dur="1" fill="hold">
+                                          <p:stCondLst>
+                                            <p:cond delay="0"/>
+                                          </p:stCondLst>
+                                        </p:cTn>
+                                        <p:tgtEl>
+                                          <p:spTgt spid="4"/>
+                                        </p:tgtEl>
+                                        <p:attrNameLst>
+                                          <p:attrName>style.visibility</p:attrName>
+                                        </p:attrNameLst>
+                                      </p:cBhvr>
+                                      <p:to>
+                                        <p:strVal val="visible"/>
+                                      </p:to>
+                                    </p:set>
+                                    <p:animEffect transition="in" filter="fade">
+                                      <p:cBhvr>
+                                        <p:cTn id="17" dur="500"/>
+                                        <p:tgtEl>
+                                          <p:spTgt spid="4"/>
+                                        </p:tgtEl>
+                                      </p:cBhvr>
+                                    </p:animEffect>
+                                  </p:childTnLst>
+                                </p:cTn>
+                              </p:par>
+                            </p:childTnLst>
+                          </p:cTn>
+                        </p:par>
+                        <p:par>
+                          <p:cTn id="18" fill="hold">
+                            <p:stCondLst>
+                              <p:cond delay="0"/>
+                            </p:stCondLst>
+                            <p:childTnLst>
+                              <p:par>
+                                <p:cTn id="19" presetID="10" presetClass="entr" presetSubtype="0" fill="hold" grpId="0" nodeType="withEffect">
+                                  <p:stCondLst>
+                                    <p:cond delay="0"/>
+                                  </p:stCondLst>
+                                  <p:childTnLst>
+                                    <p:set>
+                                      <p:cBhvr>
+                                        <p:cTn id="20" dur="1" fill="hold">
+                                          <p:stCondLst>
+                                            <p:cond delay="0"/>
+                                          </p:stCondLst>
+                                        </p:cTn>
+                                        <p:tgtEl>
+                                          <p:spTgt spid="5"/>
+                                        </p:tgtEl>
+                                        <p:attrNameLst>
+                                          <p:attrName>style.visibility</p:attrName>
+                                        </p:attrNameLst>
+                                      </p:cBhvr>
+                                      <p:to>
+                                        <p:strVal val="visible"/>
+                                      </p:to>
+                                    </p:set>
+                                    <p:animEffect transition="in" filter="fade">
+                                      <p:cBhvr>
+                                        <p:cTn id="21" dur="500"/>
+                                        <p:tgtEl>
+                                          <p:spTgt spid="5"/>
+                                        </p:tgtEl>
+                                      </p:cBhvr>
+                                    </p:animEffect>
+                                  </p:childTnLst>
+                                </p:cTn>
+                              </p:par>
+                            </p:childTnLst>
+                          </p:cTn>
+                        </p:par>
+                        <p:par>
+                          <p:cTn id="22" fill="hold">
+                            <p:stCondLst>
+                              <p:cond delay="0"/>
+                            </p:stCondLst>
+                            <p:childTnLst>
+                              <p:par>
+                                <p:cTn id="23" presetID="10" presetClass="entr" presetSubtype="0" fill="hold" grpId="0" nodeType="withEffect">
+                                  <p:stCondLst>
+                                    <p:cond delay="0"/>
+                                  </p:stCondLst>
+                                  <p:childTnLst>
+                                    <p:set>
+                                      <p:cBhvr>
+                                        <p:cTn id="24" dur="1" fill="hold">
+                                          <p:stCondLst>
+                                            <p:cond delay="0"/>
+                                          </p:stCondLst>
+                                        </p:cTn>
+                                        <p:tgtEl>
+                                          <p:spTgt spid="7"/>
+                                        </p:tgtEl>
+                                        <p:attrNameLst>
+                                          <p:attrName>style.visibility</p:attrName>
+                                        </p:attrNameLst>
+                                      </p:cBhvr>
+                                      <p:to>
+                                        <p:strVal val="visible"/>
+                                      </p:to>
+                                    </p:set>
+                                    <p:animEffect transition="in" filter="fade">
+                                      <p:cBhvr>
+                                        <p:cTn id="25" dur="500"/>
+                                        <p:tgtEl>
+                                          <p:spTgt spid="7"/>
+                                        </p:tgtEl>
+                                      </p:cBhvr>
+                                    </p:animEffect>
+                                  </p:childTnLst>
+                                </p:cTn>
+                              </p:par>
+                            </p:childTnLst>
+                          </p:cTn>
+                        </p:par>
+                        <p:par>
+                          <p:cTn id="26" fill="hold">
+                            <p:stCondLst>
+                              <p:cond delay="0"/>
+                            </p:stCondLst>
+                            <p:childTnLst>
+                              <p:par>
+                                <p:cTn id="27" presetID="10" presetClass="entr" presetSubtype="0" fill="hold" grpId="0" nodeType="withEffect">
+                                  <p:stCondLst>
+                                    <p:cond delay="0"/>
+                                  </p:stCondLst>
+                                  <p:childTnLst>
+                                    <p:set>
+                                      <p:cBhvr>
+                                        <p:cTn id="28" dur="1" fill="hold">
+                                          <p:stCondLst>
+                                            <p:cond delay="0"/>
+                                          </p:stCondLst>
+                                        </p:cTn>
+                                        <p:tgtEl>
+                                          <p:spTgt spid="8"/>
+                                        </p:tgtEl>
+                                        <p:attrNameLst>
+                                          <p:attrName>style.visibility</p:attrName>
+                                        </p:attrNameLst>
+                                      </p:cBhvr>
+                                      <p:to>
+                                        <p:strVal val="visible"/>
+                                      </p:to>
+                                    </p:set>
+                                    <p:animEffect transition="in" filter="fade">
+                                      <p:cBhvr>
+                                        <p:cTn id="29" dur="500"/>
+                                        <p:tgtEl>
+                                          <p:spTgt spid="8"/>
+                                        </p:tgtEl>
+                                      </p:cBhvr>
+                                    </p:animEffect>
+                                  </p:childTnLst>
+                                </p:cTn>
+                              </p:par>
+                            </p:childTnLst>
+                          </p:cTn>
+                        </p:par>
+                        <p:par>
+                          <p:cTn id="30" fill="hold">
+                            <p:stCondLst>
+                              <p:cond delay="0"/>
+                            </p:stCondLst>
+                            <p:childTnLst>
+                              <p:par>
+                                <p:cTn id="31" presetID="10" presetClass="entr" presetSubtype="0" fill="hold" grpId="0" nodeType="withEffect">
+                                  <p:stCondLst>
+                                    <p:cond delay="0"/>
+                                  </p:stCondLst>
+                                  <p:childTnLst>
+                                    <p:set>
+                                      <p:cBhvr>
+                                        <p:cTn id="32" dur="1" fill="hold">
+                                          <p:stCondLst>
+                                            <p:cond delay="0"/>
+                                          </p:stCondLst>
+                                        </p:cTn>
+                                        <p:tgtEl>
+                                          <p:spTgt spid="9"/>
+                                        </p:tgtEl>
+                                        <p:attrNameLst>
+                                          <p:attrName>style.visibility</p:attrName>
+                                        </p:attrNameLst>
+                                      </p:cBhvr>
+                                      <p:to>
+                                        <p:strVal val="visible"/>
+                                      </p:to>
+                                    </p:set>
+                                    <p:animEffect transition="in" filter="fade">
+                                      <p:cBhvr>
+                                        <p:cTn id="33" dur="500"/>
+                                        <p:tgtEl>
+                                          <p:spTgt spid="9"/>
+                                        </p:tgtEl>
+                                      </p:cBhvr>
+                                    </p:animEffect>
+                                  </p:childTnLst>
+                                </p:cTn>
+                              </p:par>
+                            </p:childTnLst>
+                          </p:cTn>
+                        </p:par>
+                        <p:par>
+                          <p:cTn id="34" fill="hold">
+                            <p:stCondLst>
+                              <p:cond delay="0"/>
+                            </p:stCondLst>
+                            <p:childTnLst>
+                              <p:par>
+                                <p:cTn id="35" presetID="10" presetClass="entr" presetSubtype="0" fill="hold" grpId="0" nodeType="withEffect">
+                                  <p:stCondLst>
+                                    <p:cond delay="0"/>
+                                  </p:stCondLst>
+                                  <p:childTnLst>
+                                    <p:set>
+                                      <p:cBhvr>
+                                        <p:cTn id="36" dur="1" fill="hold">
+                                          <p:stCondLst>
+                                            <p:cond delay="0"/>
+                                          </p:stCondLst>
+                                        </p:cTn>
+                                        <p:tgtEl>
+                                          <p:spTgt spid="10"/>
+                                        </p:tgtEl>
+                                        <p:attrNameLst>
+                                          <p:attrName>style.visibility</p:attrName>
+                                        </p:attrNameLst>
+                                      </p:cBhvr>
+                                      <p:to>
+                                        <p:strVal val="visible"/>
+                                      </p:to>
+                                    </p:set>
+                                    <p:animEffect transition="in" filter="fade">
+                                      <p:cBhvr>
+                                        <p:cTn id="37" dur="500"/>
+                                        <p:tgtEl>
+                                          <p:spTgt spid="10"/>
+                                        </p:tgtEl>
+                                      </p:cBhvr>
+                                    </p:animEffect>
+                                  </p:childTnLst>
+                                </p:cTn>
+                              </p:par>
+                            </p:childTnLst>
+                          </p:cTn>
+                        </p:par>
+                        <p:par>
+                          <p:cTn id="38" fill="hold">
+                            <p:stCondLst>
+                              <p:cond delay="0"/>
+                            </p:stCondLst>
+                            <p:childTnLst>
+                              <p:par>
+                                <p:cTn id="39" presetID="10" presetClass="entr" presetSubtype="0" fill="hold" grpId="0" nodeType="withEffect">
+                                  <p:stCondLst>
+                                    <p:cond delay="0"/>
+                                  </p:stCondLst>
+                                  <p:childTnLst>
+                                    <p:set>
+                                      <p:cBhvr>
+                                        <p:cTn id="40" dur="1" fill="hold">
+                                          <p:stCondLst>
+                                            <p:cond delay="0"/>
+                                          </p:stCondLst>
+                                        </p:cTn>
+                                        <p:tgtEl>
+                                          <p:spTgt spid="12"/>
+                                        </p:tgtEl>
+                                        <p:attrNameLst>
+                                          <p:attrName>style.visibility</p:attrName>
+                                        </p:attrNameLst>
+                                      </p:cBhvr>
+                                      <p:to>
+                                        <p:strVal val="visible"/>
+                                      </p:to>
+                                    </p:set>
+                                    <p:animEffect transition="in" filter="fade">
+                                      <p:cBhvr>
+                                        <p:cTn id="41" dur="500"/>
+                                        <p:tgtEl>
+                                          <p:spTgt spid="12"/>
+                                        </p:tgtEl>
+                                      </p:cBhvr>
+                                    </p:animEffect>
+                                  </p:childTnLst>
+                                </p:cTn>
+                              </p:par>
+                            </p:childTnLst>
+                          </p:cTn>
+                        </p:par>
+                        <p:par>
+                          <p:cTn id="42" fill="hold">
+                            <p:stCondLst>
+                              <p:cond delay="0"/>
+                            </p:stCondLst>
+                            <p:childTnLst>
+                              <p:par>
+                                <p:cTn id="43" presetID="10" presetClass="entr" presetSubtype="0" fill="hold" grpId="0" nodeType="withEffect">
+                                  <p:stCondLst>
+                                    <p:cond delay="0"/>
+                                  </p:stCondLst>
+                                  <p:childTnLst>
+                                    <p:set>
+                                      <p:cBhvr>
+                                        <p:cTn id="44" dur="1" fill="hold">
+                                          <p:stCondLst>
+                                            <p:cond delay="0"/>
+                                          </p:stCondLst>
+                                        </p:cTn>
+                                        <p:tgtEl>
+                                          <p:spTgt spid="13"/>
+                                        </p:tgtEl>
+                                        <p:attrNameLst>
+                                          <p:attrName>style.visibility</p:attrName>
+                                        </p:attrNameLst>
+                                      </p:cBhvr>
+                                      <p:to>
+                                        <p:strVal val="visible"/>
+                                      </p:to>
+                                    </p:set>
+                                    <p:animEffect transition="in" filter="fade">
+                                      <p:cBhvr>
+                                        <p:cTn id="45" dur="500"/>
+                                        <p:tgtEl>
+                                          <p:spTgt spid="13"/>
+                                        </p:tgtEl>
+                                      </p:cBhvr>
+                                    </p:animEffect>
+                                  </p:childTnLst>
+                                </p:cTn>
+                              </p:par>
+                            </p:childTnLst>
+                          </p:cTn>
+                        </p:par>
+                        <p:par>
+                          <p:cTn id="46" fill="hold">
+                            <p:stCondLst>
+                              <p:cond delay="0"/>
+                            </p:stCondLst>
+                            <p:childTnLst>
+                              <p:par>
+                                <p:cTn id="47" presetID="10" presetClass="entr" presetSubtype="0" fill="hold" grpId="0" nodeType="withEffect">
+                                  <p:stCondLst>
+                                    <p:cond delay="0"/>
+                                  </p:stCondLst>
+                                  <p:childTnLst>
+                                    <p:set>
+                                      <p:cBhvr>
+                                        <p:cTn id="48" dur="1" fill="hold">
+                                          <p:stCondLst>
+                                            <p:cond delay="0"/>
+                                          </p:stCondLst>
+                                        </p:cTn>
+                                        <p:tgtEl>
+                                          <p:spTgt spid="14"/>
+                                        </p:tgtEl>
+                                        <p:attrNameLst>
+                                          <p:attrName>style.visibility</p:attrName>
+                                        </p:attrNameLst>
+                                      </p:cBhvr>
+                                      <p:to>
+                                        <p:strVal val="visible"/>
+                                      </p:to>
+                                    </p:set>
+                                    <p:animEffect transition="in" filter="fade">
+                                      <p:cBhvr>
+                                        <p:cTn id="49" dur="500"/>
+                                        <p:tgtEl>
+                                          <p:spTgt spid="14"/>
+                                        </p:tgtEl>
+                                      </p:cBhvr>
+                                    </p:animEffect>
+                                  </p:childTnLst>
+                                </p:cTn>
+                              </p:par>
+                            </p:childTnLst>
+                          </p:cTn>
+                        </p:par>
+                        <p:par>
+                          <p:cTn id="50" fill="hold">
+                            <p:stCondLst>
+                              <p:cond delay="0"/>
+                            </p:stCondLst>
+                            <p:childTnLst>
+                              <p:par>
+                                <p:cTn id="51" presetID="10" presetClass="entr" presetSubtype="0" fill="hold" grpId="0" nodeType="withEffect">
+                                  <p:stCondLst>
+                                    <p:cond delay="0"/>
+                                  </p:stCondLst>
+                                  <p:childTnLst>
+                                    <p:set>
+                                      <p:cBhvr>
+                                        <p:cTn id="52" dur="1" fill="hold">
+                                          <p:stCondLst>
+                                            <p:cond delay="0"/>
+                                          </p:stCondLst>
+                                        </p:cTn>
+                                        <p:tgtEl>
+                                          <p:spTgt spid="15"/>
+                                        </p:tgtEl>
+                                        <p:attrNameLst>
+                                          <p:attrName>style.visibility</p:attrName>
+                                        </p:attrNameLst>
+                                      </p:cBhvr>
+                                      <p:to>
+                                        <p:strVal val="visible"/>
+                                      </p:to>
+                                    </p:set>
+                                    <p:animEffect transition="in" filter="fade">
+                                      <p:cBhvr>
+                                        <p:cTn id="53" dur="500"/>
+                                        <p:tgtEl>
+                                          <p:spTgt spid="15"/>
+                                        </p:tgtEl>
+                                      </p:cBhvr>
+                                    </p:animEffect>
+                                  </p:childTnLst>
+                                </p:cTn>
+                              </p:par>
+                            </p:childTnLst>
+                          </p:cTn>
+                        </p:par>
+                        <p:par>
+                          <p:cTn id="54" fill="hold">
+                            <p:stCondLst>
+                              <p:cond delay="0"/>
+                            </p:stCondLst>
+                            <p:childTnLst>
+                              <p:par>
+                                <p:cTn id="55" presetID="10" presetClass="entr" presetSubtype="0" fill="hold" grpId="0" nodeType="withEffect">
+                                  <p:stCondLst>
+                                    <p:cond delay="0"/>
+                                  </p:stCondLst>
+                                  <p:childTnLst>
+                                    <p:set>
+                                      <p:cBhvr>
+                                        <p:cTn id="56" dur="1" fill="hold">
+                                          <p:stCondLst>
+                                            <p:cond delay="0"/>
+                                          </p:stCondLst>
+                                        </p:cTn>
+                                        <p:tgtEl>
+                                          <p:spTgt spid="17"/>
+                                        </p:tgtEl>
+                                        <p:attrNameLst>
+                                          <p:attrName>style.visibility</p:attrName>
+                                        </p:attrNameLst>
+                                      </p:cBhvr>
+                                      <p:to>
+                                        <p:strVal val="visible"/>
+                                      </p:to>
+                                    </p:set>
+                                    <p:animEffect transition="in" filter="fade">
+                                      <p:cBhvr>
+                                        <p:cTn id="57" dur="500"/>
+                                        <p:tgtEl>
+                                          <p:spTgt spid="17"/>
+                                        </p:tgtEl>
+                                      </p:cBhvr>
+                                    </p:animEffect>
+                                  </p:childTnLst>
+                                </p:cTn>
+                              </p:par>
+                            </p:childTnLst>
+                          </p:cTn>
+                        </p:par>
+                        <p:par>
+                          <p:cTn id="58" fill="hold">
+                            <p:stCondLst>
+                              <p:cond delay="0"/>
+                            </p:stCondLst>
+                            <p:childTnLst>
+                              <p:par>
+                                <p:cTn id="59" presetID="10" presetClass="entr" presetSubtype="0" fill="hold" grpId="0" nodeType="withEffect">
+                                  <p:stCondLst>
+                                    <p:cond delay="0"/>
+                                  </p:stCondLst>
+                                  <p:childTnLst>
+                                    <p:set>
+                                      <p:cBhvr>
+                                        <p:cTn id="60" dur="1" fill="hold">
+                                          <p:stCondLst>
+                                            <p:cond delay="0"/>
+                                          </p:stCondLst>
+                                        </p:cTn>
+                                        <p:tgtEl>
+                                          <p:spTgt spid="18"/>
+                                        </p:tgtEl>
+                                        <p:attrNameLst>
+                                          <p:attrName>style.visibility</p:attrName>
+                                        </p:attrNameLst>
+                                      </p:cBhvr>
+                                      <p:to>
+                                        <p:strVal val="visible"/>
+                                      </p:to>
+                                    </p:set>
+                                    <p:animEffect transition="in" filter="fade">
+                                      <p:cBhvr>
+                                        <p:cTn id="61" dur="500"/>
+                                        <p:tgtEl>
+                                          <p:spTgt spid="18"/>
+                                        </p:tgtEl>
+                                      </p:cBhvr>
+                                    </p:animEffect>
+                                  </p:childTnLst>
+                                </p:cTn>
+                              </p:par>
+                            </p:childTnLst>
+                          </p:cTn>
+                        </p:par>
+                        <p:par>
+                          <p:cTn id="62" fill="hold">
+                            <p:stCondLst>
+                              <p:cond delay="0"/>
+                            </p:stCondLst>
+                            <p:childTnLst>
+                              <p:par>
+                                <p:cTn id="63" presetID="10" presetClass="entr" presetSubtype="0" fill="hold" grpId="0" nodeType="withEffect">
+                                  <p:stCondLst>
+                                    <p:cond delay="0"/>
+                                  </p:stCondLst>
+                                  <p:childTnLst>
+                                    <p:set>
+                                      <p:cBhvr>
+                                        <p:cTn id="64" dur="1" fill="hold">
+                                          <p:stCondLst>
+                                            <p:cond delay="0"/>
+                                          </p:stCondLst>
+                                        </p:cTn>
+                                        <p:tgtEl>
+                                          <p:spTgt spid="6"/>
+                                        </p:tgtEl>
+                                        <p:attrNameLst>
+                                          <p:attrName>style.visibility</p:attrName>
+                                        </p:attrNameLst>
+                                      </p:cBhvr>
+                                      <p:to>
+                                        <p:strVal val="visible"/>
+                                      </p:to>
+                                    </p:set>
+                                    <p:animEffect transition="in" filter="fade">
+                                      <p:cBhvr>
+                                        <p:cTn id="65" dur="500"/>
+                                        <p:tgtEl>
+                                          <p:spTgt spid="6"/>
+                                        </p:tgtEl>
+                                      </p:cBhvr>
+                                    </p:animEffect>
+                                  </p:childTnLst>
+                                </p:cTn>
+                              </p:par>
+                            </p:childTnLst>
+                          </p:cTn>
+                        </p:par>
+                        <p:par>
+                          <p:cTn id="66" fill="hold">
+                            <p:stCondLst>
+                              <p:cond delay="0"/>
+                            </p:stCondLst>
+                            <p:childTnLst>
+                              <p:par>
+                                <p:cTn id="67" presetID="10" presetClass="entr" presetSubtype="0" fill="hold" grpId="0" nodeType="withEffect">
+                                  <p:stCondLst>
+                                    <p:cond delay="0"/>
+                                  </p:stCondLst>
+                                  <p:childTnLst>
+                                    <p:set>
+                                      <p:cBhvr>
+                                        <p:cTn id="68" dur="1" fill="hold">
+                                          <p:stCondLst>
+                                            <p:cond delay="0"/>
+                                          </p:stCondLst>
+                                        </p:cTn>
+                                        <p:tgtEl>
+                                          <p:spTgt spid="11"/>
+                                        </p:tgtEl>
+                                        <p:attrNameLst>
+                                          <p:attrName>style.visibility</p:attrName>
+                                        </p:attrNameLst>
+                                      </p:cBhvr>
+                                      <p:to>
+                                        <p:strVal val="visible"/>
+                                      </p:to>
+                                    </p:set>
+                                    <p:animEffect transition="in" filter="fade">
+                                      <p:cBhvr>
+                                        <p:cTn id="69" dur="500"/>
+                                        <p:tgtEl>
+                                          <p:spTgt spid="11"/>
+                                        </p:tgtEl>
+                                      </p:cBhvr>
+                                    </p:animEffect>
+                                  </p:childTnLst>
+                                </p:cTn>
+                              </p:par>
+                            </p:childTnLst>
+                          </p:cTn>
+                        </p:par>
+                        <p:par>
+                          <p:cTn id="70" fill="hold">
+                            <p:stCondLst>
+                              <p:cond delay="0"/>
+                            </p:stCondLst>
+                            <p:childTnLst>
+                              <p:par>
+                                <p:cTn id="71" presetID="10" presetClass="entr" presetSubtype="0" fill="hold" grpId="0" nodeType="withEffect">
+                                  <p:stCondLst>
+                                    <p:cond delay="0"/>
+                                  </p:stCondLst>
+                                  <p:childTnLst>
+                                    <p:set>
+                                      <p:cBhvr>
+                                        <p:cTn id="72" dur="1" fill="hold">
+                                          <p:stCondLst>
+                                            <p:cond delay="0"/>
+                                          </p:stCondLst>
+                                        </p:cTn>
+                                        <p:tgtEl>
+                                          <p:spTgt spid="16"/>
+                                        </p:tgtEl>
+                                        <p:attrNameLst>
+                                          <p:attrName>style.visibility</p:attrName>
+                                        </p:attrNameLst>
+                                      </p:cBhvr>
+                                      <p:to>
+                                        <p:strVal val="visible"/>
+                                      </p:to>
+                                    </p:set>
+                                    <p:animEffect transition="in" filter="fade">
+                                      <p:cBhvr>
+                                        <p:cTn id="73" dur="500"/>
+                                        <p:tgtEl>
+                                          <p:spTgt spid="16"/>
+                                        </p:tgtEl>
+                                      </p:cBhvr>
+                                    </p:animEffect>
+                                  </p:childTnLst>
+                                </p:cTn>
+                              </p:par>
+                            </p:childTnLst>
+                          </p:cTn>
+                        </p:par>
+                      </p:childTnLst>
+                    </p:cTn>
+                  </p:par>
+                </p:childTnLst>
+              </p:cTn>
+              <p:prevCondLst>
+                <p:cond evt="onPrev" delay="0">
+                  <p:tgtEl>
+                    <p:sldTgt/>
+                  </p:tgtEl>
+                </p:cond>
+              </p:prevCondLst>
+              <p:nextCondLst>
+                <p:cond evt="onNext" delay="0">
+                  <p:tgtEl>
+                    <p:sldTgt/>
+                  </p:tgtEl>
+                </p:cond>
+              </p:nextCondLst>
+            </p:seq>
+          </p:childTnLst>
+        </p:cTn>
+      </p:par>
+    </p:tnLst>
+    <p:bldLst>
+      <p:bldP spid="2" grpId="0"/>
+      <p:bldGraphic spid="3" grpId="0">
+        <p:bldAsOne/>
+      </p:bldGraphic>
+      <p:bldP spid="4" grpId="0"/>
+      <p:bldP spid="5" grpId="0"/>
+      <p:bldP spid="7" grpId="0"/>
+      <p:bldP spid="8" grpId="0"/>
+      <p:bldP spid="9" grpId="0"/>
+      <p:bldP spid="10" grpId="0"/>
+      <p:bldP spid="12" grpId="0"/>
+      <p:bldP spid="13" grpId="0"/>
+      <p:bldP spid="14" grpId="0"/>
+      <p:bldP spid="15" grpId="0"/>
+      <p:bldP spid="17" grpId="0"/>
+      <p:bldP spid="18" grpId="0"/>
+      <p:bldP spid="6" grpId="0"/>
+      <p:bldP spid="11" grpId="0"/>
+      <p:bldP spid="16" grpId="0"/>
+    </p:bldLst>
+  </p:timing>
 </p:sld>
 </file>
 
@@ -7253,7 +13646,7 @@
       </p:sp>
       <p:sp>
         <p:nvSpPr>
-          <p:cNvPr id="4" name="Text 2"/>
+          <p:cNvPr id="4" name="c1-1"/>
           <p:cNvSpPr txBox="1"/>
           <p:nvPr/>
         </p:nvSpPr>
@@ -7289,7 +13682,7 @@
       </p:sp>
       <p:sp>
         <p:nvSpPr>
-          <p:cNvPr id="5" name="Text 3"/>
+          <p:cNvPr id="5" name="c1-2"/>
           <p:cNvSpPr txBox="1"/>
           <p:nvPr/>
         </p:nvSpPr>
@@ -7325,7 +13718,7 @@
       </p:sp>
       <p:sp>
         <p:nvSpPr>
-          <p:cNvPr id="6" name="Shape 4"/>
+          <p:cNvPr id="6" name="c2-3"/>
           <p:cNvSpPr/>
           <p:nvPr/>
         </p:nvSpPr>
@@ -7354,7 +13747,7 @@
       </p:sp>
       <p:sp>
         <p:nvSpPr>
-          <p:cNvPr id="7" name="Shape 5"/>
+          <p:cNvPr id="7" name="c2-4"/>
           <p:cNvSpPr/>
           <p:nvPr/>
         </p:nvSpPr>
@@ -7378,7 +13771,7 @@
       </p:sp>
       <p:sp>
         <p:nvSpPr>
-          <p:cNvPr id="8" name="Text 6"/>
+          <p:cNvPr id="8" name="c2-5"/>
           <p:cNvSpPr txBox="1"/>
           <p:nvPr/>
         </p:nvSpPr>
@@ -7414,7 +13807,7 @@
       </p:sp>
       <p:pic>
         <p:nvPicPr>
-          <p:cNvPr id="9" name="Image 0" descr="preencoded.png">    </p:cNvPr>
+          <p:cNvPr id="9" name="c2-6" descr="preencoded.png">    </p:cNvPr>
           <p:cNvPicPr>
             <a:picLocks noChangeAspect="1"/>
           </p:cNvPicPr>
@@ -7438,7 +13831,7 @@
       </p:pic>
       <p:sp>
         <p:nvSpPr>
-          <p:cNvPr id="10" name="Text 7"/>
+          <p:cNvPr id="10" name="c2-7"/>
           <p:cNvSpPr txBox="1"/>
           <p:nvPr/>
         </p:nvSpPr>
@@ -7474,7 +13867,7 @@
       </p:sp>
       <p:sp>
         <p:nvSpPr>
-          <p:cNvPr id="11" name="Text 8"/>
+          <p:cNvPr id="11" name="c2-8"/>
           <p:cNvSpPr txBox="1"/>
           <p:nvPr/>
         </p:nvSpPr>
@@ -7510,7 +13903,7 @@
       </p:sp>
       <p:sp>
         <p:nvSpPr>
-          <p:cNvPr id="12" name="Shape 9"/>
+          <p:cNvPr id="12" name="c3-9"/>
           <p:cNvSpPr/>
           <p:nvPr/>
         </p:nvSpPr>
@@ -7539,7 +13932,7 @@
       </p:sp>
       <p:sp>
         <p:nvSpPr>
-          <p:cNvPr id="13" name="Shape 10"/>
+          <p:cNvPr id="13" name="c3-10"/>
           <p:cNvSpPr/>
           <p:nvPr/>
         </p:nvSpPr>
@@ -7563,7 +13956,7 @@
       </p:sp>
       <p:sp>
         <p:nvSpPr>
-          <p:cNvPr id="14" name="Text 11"/>
+          <p:cNvPr id="14" name="c3-11"/>
           <p:cNvSpPr txBox="1"/>
           <p:nvPr/>
         </p:nvSpPr>
@@ -7599,7 +13992,7 @@
       </p:sp>
       <p:pic>
         <p:nvPicPr>
-          <p:cNvPr id="15" name="Image 1" descr="preencoded.png">    </p:cNvPr>
+          <p:cNvPr id="15" name="c3-12" descr="preencoded.png">    </p:cNvPr>
           <p:cNvPicPr>
             <a:picLocks noChangeAspect="1"/>
           </p:cNvPicPr>
@@ -7623,7 +14016,7 @@
       </p:pic>
       <p:sp>
         <p:nvSpPr>
-          <p:cNvPr id="16" name="Text 12"/>
+          <p:cNvPr id="16" name="c3-13"/>
           <p:cNvSpPr txBox="1"/>
           <p:nvPr/>
         </p:nvSpPr>
@@ -7659,7 +14052,7 @@
       </p:sp>
       <p:sp>
         <p:nvSpPr>
-          <p:cNvPr id="17" name="Text 13"/>
+          <p:cNvPr id="17" name="c3-14"/>
           <p:cNvSpPr txBox="1"/>
           <p:nvPr/>
         </p:nvSpPr>
@@ -7695,7 +14088,7 @@
       </p:sp>
       <p:sp>
         <p:nvSpPr>
-          <p:cNvPr id="18" name="Shape 14"/>
+          <p:cNvPr id="18" name="c4-15"/>
           <p:cNvSpPr/>
           <p:nvPr/>
         </p:nvSpPr>
@@ -7724,7 +14117,7 @@
       </p:sp>
       <p:sp>
         <p:nvSpPr>
-          <p:cNvPr id="19" name="Shape 15"/>
+          <p:cNvPr id="19" name="c4-16"/>
           <p:cNvSpPr/>
           <p:nvPr/>
         </p:nvSpPr>
@@ -7748,7 +14141,7 @@
       </p:sp>
       <p:sp>
         <p:nvSpPr>
-          <p:cNvPr id="20" name="Text 16"/>
+          <p:cNvPr id="20" name="c4-17"/>
           <p:cNvSpPr txBox="1"/>
           <p:nvPr/>
         </p:nvSpPr>
@@ -7784,7 +14177,7 @@
       </p:sp>
       <p:pic>
         <p:nvPicPr>
-          <p:cNvPr id="21" name="Image 2" descr="preencoded.png">    </p:cNvPr>
+          <p:cNvPr id="21" name="c4-18" descr="preencoded.png">    </p:cNvPr>
           <p:cNvPicPr>
             <a:picLocks noChangeAspect="1"/>
           </p:cNvPicPr>
@@ -7808,7 +14201,7 @@
       </p:pic>
       <p:sp>
         <p:nvSpPr>
-          <p:cNvPr id="22" name="Text 17"/>
+          <p:cNvPr id="22" name="c4-19"/>
           <p:cNvSpPr txBox="1"/>
           <p:nvPr/>
         </p:nvSpPr>
@@ -7844,7 +14237,7 @@
       </p:sp>
       <p:sp>
         <p:nvSpPr>
-          <p:cNvPr id="23" name="Text 18"/>
+          <p:cNvPr id="23" name="c4-20"/>
           <p:cNvSpPr txBox="1"/>
           <p:nvPr/>
         </p:nvSpPr>
@@ -7880,7 +14273,7 @@
       </p:sp>
       <p:sp>
         <p:nvSpPr>
-          <p:cNvPr id="24" name="Shape 19"/>
+          <p:cNvPr id="24" name="c5-21"/>
           <p:cNvSpPr/>
           <p:nvPr/>
         </p:nvSpPr>
@@ -7909,7 +14302,7 @@
       </p:sp>
       <p:sp>
         <p:nvSpPr>
-          <p:cNvPr id="25" name="Shape 20"/>
+          <p:cNvPr id="25" name="c5-22"/>
           <p:cNvSpPr/>
           <p:nvPr/>
         </p:nvSpPr>
@@ -7933,7 +14326,7 @@
       </p:sp>
       <p:sp>
         <p:nvSpPr>
-          <p:cNvPr id="26" name="Text 21"/>
+          <p:cNvPr id="26" name="c5-23"/>
           <p:cNvSpPr txBox="1"/>
           <p:nvPr/>
         </p:nvSpPr>
@@ -7969,7 +14362,7 @@
       </p:sp>
       <p:pic>
         <p:nvPicPr>
-          <p:cNvPr id="27" name="Image 3" descr="preencoded.png">    </p:cNvPr>
+          <p:cNvPr id="27" name="c5-24" descr="preencoded.png">    </p:cNvPr>
           <p:cNvPicPr>
             <a:picLocks noChangeAspect="1"/>
           </p:cNvPicPr>
@@ -7993,7 +14386,7 @@
       </p:pic>
       <p:sp>
         <p:nvSpPr>
-          <p:cNvPr id="28" name="Text 22"/>
+          <p:cNvPr id="28" name="c5-25"/>
           <p:cNvSpPr txBox="1"/>
           <p:nvPr/>
         </p:nvSpPr>
@@ -8029,7 +14422,7 @@
       </p:sp>
       <p:sp>
         <p:nvSpPr>
-          <p:cNvPr id="29" name="Text 23"/>
+          <p:cNvPr id="29" name="c5-26"/>
           <p:cNvSpPr txBox="1"/>
           <p:nvPr/>
         </p:nvSpPr>
@@ -8113,6 +14506,1253 @@
   <p:clrMapOvr>
     <a:masterClrMapping/>
   </p:clrMapOvr>
+  <p:timing>
+    <p:tnLst>
+      <p:par>
+        <p:cTn id="1" dur="indefinite" restart="never" nodeType="tmRoot">
+          <p:childTnLst>
+            <p:seq concurrent="1" nextAc="seek">
+              <p:cTn id="2" dur="indefinite" nodeType="mainSeq">
+                <p:childTnLst>
+                  <p:par>
+                    <p:cTn id="3" fill="hold">
+                      <p:stCondLst>
+                        <p:cond delay="indefinite"/>
+                      </p:stCondLst>
+                      <p:childTnLst>
+                        <p:par>
+                          <p:cTn id="4" fill="hold">
+                            <p:stCondLst>
+                              <p:cond delay="0"/>
+                            </p:stCondLst>
+                            <p:childTnLst>
+                              <p:par>
+                                <p:cTn id="5" presetID="10" presetClass="entr" presetSubtype="0" fill="hold" grpId="0" nodeType="clickEffect">
+                                  <p:stCondLst>
+                                    <p:cond delay="0"/>
+                                  </p:stCondLst>
+                                  <p:childTnLst>
+                                    <p:set>
+                                      <p:cBhvr>
+                                        <p:cTn id="6" dur="1" fill="hold">
+                                          <p:stCondLst>
+                                            <p:cond delay="0"/>
+                                          </p:stCondLst>
+                                        </p:cTn>
+                                        <p:tgtEl>
+                                          <p:spTgt spid="4"/>
+                                        </p:tgtEl>
+                                        <p:attrNameLst>
+                                          <p:attrName>style.visibility</p:attrName>
+                                        </p:attrNameLst>
+                                      </p:cBhvr>
+                                      <p:to>
+                                        <p:strVal val="visible"/>
+                                      </p:to>
+                                    </p:set>
+                                    <p:animEffect transition="in" filter="fade">
+                                      <p:cBhvr>
+                                        <p:cTn id="7" dur="500"/>
+                                        <p:tgtEl>
+                                          <p:spTgt spid="4"/>
+                                        </p:tgtEl>
+                                      </p:cBhvr>
+                                    </p:animEffect>
+                                  </p:childTnLst>
+                                </p:cTn>
+                              </p:par>
+                            </p:childTnLst>
+                          </p:cTn>
+                        </p:par>
+                        <p:par>
+                          <p:cTn id="8" fill="hold">
+                            <p:stCondLst>
+                              <p:cond delay="0"/>
+                            </p:stCondLst>
+                            <p:childTnLst>
+                              <p:par>
+                                <p:cTn id="9" presetID="10" presetClass="entr" presetSubtype="0" fill="hold" grpId="0" nodeType="withEffect">
+                                  <p:stCondLst>
+                                    <p:cond delay="0"/>
+                                  </p:stCondLst>
+                                  <p:childTnLst>
+                                    <p:set>
+                                      <p:cBhvr>
+                                        <p:cTn id="10" dur="1" fill="hold">
+                                          <p:stCondLst>
+                                            <p:cond delay="0"/>
+                                          </p:stCondLst>
+                                        </p:cTn>
+                                        <p:tgtEl>
+                                          <p:spTgt spid="5"/>
+                                        </p:tgtEl>
+                                        <p:attrNameLst>
+                                          <p:attrName>style.visibility</p:attrName>
+                                        </p:attrNameLst>
+                                      </p:cBhvr>
+                                      <p:to>
+                                        <p:strVal val="visible"/>
+                                      </p:to>
+                                    </p:set>
+                                    <p:animEffect transition="in" filter="fade">
+                                      <p:cBhvr>
+                                        <p:cTn id="11" dur="500"/>
+                                        <p:tgtEl>
+                                          <p:spTgt spid="5"/>
+                                        </p:tgtEl>
+                                      </p:cBhvr>
+                                    </p:animEffect>
+                                  </p:childTnLst>
+                                </p:cTn>
+                              </p:par>
+                            </p:childTnLst>
+                          </p:cTn>
+                        </p:par>
+                      </p:childTnLst>
+                    </p:cTn>
+                  </p:par>
+                  <p:par>
+                    <p:cTn id="12" fill="hold">
+                      <p:stCondLst>
+                        <p:cond delay="indefinite"/>
+                      </p:stCondLst>
+                      <p:childTnLst>
+                        <p:par>
+                          <p:cTn id="13" fill="hold">
+                            <p:stCondLst>
+                              <p:cond delay="0"/>
+                            </p:stCondLst>
+                            <p:childTnLst>
+                              <p:par>
+                                <p:cTn id="14" presetID="10" presetClass="entr" presetSubtype="0" fill="hold" grpId="0" nodeType="clickEffect">
+                                  <p:stCondLst>
+                                    <p:cond delay="0"/>
+                                  </p:stCondLst>
+                                  <p:childTnLst>
+                                    <p:set>
+                                      <p:cBhvr>
+                                        <p:cTn id="15" dur="1" fill="hold">
+                                          <p:stCondLst>
+                                            <p:cond delay="0"/>
+                                          </p:stCondLst>
+                                        </p:cTn>
+                                        <p:tgtEl>
+                                          <p:spTgt spid="6"/>
+                                        </p:tgtEl>
+                                        <p:attrNameLst>
+                                          <p:attrName>style.visibility</p:attrName>
+                                        </p:attrNameLst>
+                                      </p:cBhvr>
+                                      <p:to>
+                                        <p:strVal val="visible"/>
+                                      </p:to>
+                                    </p:set>
+                                    <p:animEffect transition="in" filter="fade">
+                                      <p:cBhvr>
+                                        <p:cTn id="16" dur="500"/>
+                                        <p:tgtEl>
+                                          <p:spTgt spid="6"/>
+                                        </p:tgtEl>
+                                      </p:cBhvr>
+                                    </p:animEffect>
+                                  </p:childTnLst>
+                                </p:cTn>
+                              </p:par>
+                            </p:childTnLst>
+                          </p:cTn>
+                        </p:par>
+                        <p:par>
+                          <p:cTn id="17" fill="hold">
+                            <p:stCondLst>
+                              <p:cond delay="0"/>
+                            </p:stCondLst>
+                            <p:childTnLst>
+                              <p:par>
+                                <p:cTn id="18" presetID="10" presetClass="entr" presetSubtype="0" fill="hold" grpId="0" nodeType="withEffect">
+                                  <p:stCondLst>
+                                    <p:cond delay="0"/>
+                                  </p:stCondLst>
+                                  <p:childTnLst>
+                                    <p:set>
+                                      <p:cBhvr>
+                                        <p:cTn id="19" dur="1" fill="hold">
+                                          <p:stCondLst>
+                                            <p:cond delay="0"/>
+                                          </p:stCondLst>
+                                        </p:cTn>
+                                        <p:tgtEl>
+                                          <p:spTgt spid="7"/>
+                                        </p:tgtEl>
+                                        <p:attrNameLst>
+                                          <p:attrName>style.visibility</p:attrName>
+                                        </p:attrNameLst>
+                                      </p:cBhvr>
+                                      <p:to>
+                                        <p:strVal val="visible"/>
+                                      </p:to>
+                                    </p:set>
+                                    <p:animEffect transition="in" filter="fade">
+                                      <p:cBhvr>
+                                        <p:cTn id="20" dur="500"/>
+                                        <p:tgtEl>
+                                          <p:spTgt spid="7"/>
+                                        </p:tgtEl>
+                                      </p:cBhvr>
+                                    </p:animEffect>
+                                  </p:childTnLst>
+                                </p:cTn>
+                              </p:par>
+                            </p:childTnLst>
+                          </p:cTn>
+                        </p:par>
+                        <p:par>
+                          <p:cTn id="21" fill="hold">
+                            <p:stCondLst>
+                              <p:cond delay="0"/>
+                            </p:stCondLst>
+                            <p:childTnLst>
+                              <p:par>
+                                <p:cTn id="22" presetID="10" presetClass="entr" presetSubtype="0" fill="hold" grpId="0" nodeType="withEffect">
+                                  <p:stCondLst>
+                                    <p:cond delay="0"/>
+                                  </p:stCondLst>
+                                  <p:childTnLst>
+                                    <p:set>
+                                      <p:cBhvr>
+                                        <p:cTn id="23" dur="1" fill="hold">
+                                          <p:stCondLst>
+                                            <p:cond delay="0"/>
+                                          </p:stCondLst>
+                                        </p:cTn>
+                                        <p:tgtEl>
+                                          <p:spTgt spid="8"/>
+                                        </p:tgtEl>
+                                        <p:attrNameLst>
+                                          <p:attrName>style.visibility</p:attrName>
+                                        </p:attrNameLst>
+                                      </p:cBhvr>
+                                      <p:to>
+                                        <p:strVal val="visible"/>
+                                      </p:to>
+                                    </p:set>
+                                    <p:animEffect transition="in" filter="fade">
+                                      <p:cBhvr>
+                                        <p:cTn id="24" dur="500"/>
+                                        <p:tgtEl>
+                                          <p:spTgt spid="8"/>
+                                        </p:tgtEl>
+                                      </p:cBhvr>
+                                    </p:animEffect>
+                                  </p:childTnLst>
+                                </p:cTn>
+                              </p:par>
+                            </p:childTnLst>
+                          </p:cTn>
+                        </p:par>
+                        <p:par>
+                          <p:cTn id="25" fill="hold">
+                            <p:stCondLst>
+                              <p:cond delay="0"/>
+                            </p:stCondLst>
+                            <p:childTnLst>
+                              <p:par>
+                                <p:cTn id="26" presetID="10" presetClass="entr" presetSubtype="0" fill="hold" grpId="0" nodeType="withEffect">
+                                  <p:stCondLst>
+                                    <p:cond delay="0"/>
+                                  </p:stCondLst>
+                                  <p:childTnLst>
+                                    <p:set>
+                                      <p:cBhvr>
+                                        <p:cTn id="27" dur="1" fill="hold">
+                                          <p:stCondLst>
+                                            <p:cond delay="0"/>
+                                          </p:stCondLst>
+                                        </p:cTn>
+                                        <p:tgtEl>
+                                          <p:spTgt spid="10"/>
+                                        </p:tgtEl>
+                                        <p:attrNameLst>
+                                          <p:attrName>style.visibility</p:attrName>
+                                        </p:attrNameLst>
+                                      </p:cBhvr>
+                                      <p:to>
+                                        <p:strVal val="visible"/>
+                                      </p:to>
+                                    </p:set>
+                                    <p:animEffect transition="in" filter="fade">
+                                      <p:cBhvr>
+                                        <p:cTn id="28" dur="500"/>
+                                        <p:tgtEl>
+                                          <p:spTgt spid="10"/>
+                                        </p:tgtEl>
+                                      </p:cBhvr>
+                                    </p:animEffect>
+                                  </p:childTnLst>
+                                </p:cTn>
+                              </p:par>
+                            </p:childTnLst>
+                          </p:cTn>
+                        </p:par>
+                        <p:par>
+                          <p:cTn id="29" fill="hold">
+                            <p:stCondLst>
+                              <p:cond delay="0"/>
+                            </p:stCondLst>
+                            <p:childTnLst>
+                              <p:par>
+                                <p:cTn id="30" presetID="10" presetClass="entr" presetSubtype="0" fill="hold" grpId="0" nodeType="withEffect">
+                                  <p:stCondLst>
+                                    <p:cond delay="0"/>
+                                  </p:stCondLst>
+                                  <p:childTnLst>
+                                    <p:set>
+                                      <p:cBhvr>
+                                        <p:cTn id="31" dur="1" fill="hold">
+                                          <p:stCondLst>
+                                            <p:cond delay="0"/>
+                                          </p:stCondLst>
+                                        </p:cTn>
+                                        <p:tgtEl>
+                                          <p:spTgt spid="11"/>
+                                        </p:tgtEl>
+                                        <p:attrNameLst>
+                                          <p:attrName>style.visibility</p:attrName>
+                                        </p:attrNameLst>
+                                      </p:cBhvr>
+                                      <p:to>
+                                        <p:strVal val="visible"/>
+                                      </p:to>
+                                    </p:set>
+                                    <p:animEffect transition="in" filter="fade">
+                                      <p:cBhvr>
+                                        <p:cTn id="32" dur="500"/>
+                                        <p:tgtEl>
+                                          <p:spTgt spid="11"/>
+                                        </p:tgtEl>
+                                      </p:cBhvr>
+                                    </p:animEffect>
+                                  </p:childTnLst>
+                                </p:cTn>
+                              </p:par>
+                            </p:childTnLst>
+                          </p:cTn>
+                        </p:par>
+                        <p:par>
+                          <p:cTn id="33" fill="hold">
+                            <p:stCondLst>
+                              <p:cond delay="0"/>
+                            </p:stCondLst>
+                            <p:childTnLst>
+                              <p:par>
+                                <p:cTn id="34" presetID="10" presetClass="entr" presetSubtype="0" fill="hold" grpId="0" nodeType="withEffect">
+                                  <p:stCondLst>
+                                    <p:cond delay="0"/>
+                                  </p:stCondLst>
+                                  <p:childTnLst>
+                                    <p:set>
+                                      <p:cBhvr>
+                                        <p:cTn id="35" dur="1" fill="hold">
+                                          <p:stCondLst>
+                                            <p:cond delay="0"/>
+                                          </p:stCondLst>
+                                        </p:cTn>
+                                        <p:tgtEl>
+                                          <p:spTgt spid="9"/>
+                                        </p:tgtEl>
+                                        <p:attrNameLst>
+                                          <p:attrName>style.visibility</p:attrName>
+                                        </p:attrNameLst>
+                                      </p:cBhvr>
+                                      <p:to>
+                                        <p:strVal val="visible"/>
+                                      </p:to>
+                                    </p:set>
+                                    <p:animEffect transition="in" filter="fade">
+                                      <p:cBhvr>
+                                        <p:cTn id="36" dur="500"/>
+                                        <p:tgtEl>
+                                          <p:spTgt spid="9"/>
+                                        </p:tgtEl>
+                                      </p:cBhvr>
+                                    </p:animEffect>
+                                  </p:childTnLst>
+                                </p:cTn>
+                              </p:par>
+                            </p:childTnLst>
+                          </p:cTn>
+                        </p:par>
+                      </p:childTnLst>
+                    </p:cTn>
+                  </p:par>
+                  <p:par>
+                    <p:cTn id="37" fill="hold">
+                      <p:stCondLst>
+                        <p:cond delay="indefinite"/>
+                      </p:stCondLst>
+                      <p:childTnLst>
+                        <p:par>
+                          <p:cTn id="38" fill="hold">
+                            <p:stCondLst>
+                              <p:cond delay="0"/>
+                            </p:stCondLst>
+                            <p:childTnLst>
+                              <p:par>
+                                <p:cTn id="39" presetID="10" presetClass="entr" presetSubtype="0" fill="hold" grpId="0" nodeType="clickEffect">
+                                  <p:stCondLst>
+                                    <p:cond delay="0"/>
+                                  </p:stCondLst>
+                                  <p:childTnLst>
+                                    <p:set>
+                                      <p:cBhvr>
+                                        <p:cTn id="40" dur="1" fill="hold">
+                                          <p:stCondLst>
+                                            <p:cond delay="0"/>
+                                          </p:stCondLst>
+                                        </p:cTn>
+                                        <p:tgtEl>
+                                          <p:spTgt spid="12"/>
+                                        </p:tgtEl>
+                                        <p:attrNameLst>
+                                          <p:attrName>style.visibility</p:attrName>
+                                        </p:attrNameLst>
+                                      </p:cBhvr>
+                                      <p:to>
+                                        <p:strVal val="visible"/>
+                                      </p:to>
+                                    </p:set>
+                                    <p:animEffect transition="in" filter="fade">
+                                      <p:cBhvr>
+                                        <p:cTn id="41" dur="500"/>
+                                        <p:tgtEl>
+                                          <p:spTgt spid="12"/>
+                                        </p:tgtEl>
+                                      </p:cBhvr>
+                                    </p:animEffect>
+                                  </p:childTnLst>
+                                </p:cTn>
+                              </p:par>
+                            </p:childTnLst>
+                          </p:cTn>
+                        </p:par>
+                        <p:par>
+                          <p:cTn id="42" fill="hold">
+                            <p:stCondLst>
+                              <p:cond delay="0"/>
+                            </p:stCondLst>
+                            <p:childTnLst>
+                              <p:par>
+                                <p:cTn id="43" presetID="10" presetClass="entr" presetSubtype="0" fill="hold" grpId="0" nodeType="withEffect">
+                                  <p:stCondLst>
+                                    <p:cond delay="0"/>
+                                  </p:stCondLst>
+                                  <p:childTnLst>
+                                    <p:set>
+                                      <p:cBhvr>
+                                        <p:cTn id="44" dur="1" fill="hold">
+                                          <p:stCondLst>
+                                            <p:cond delay="0"/>
+                                          </p:stCondLst>
+                                        </p:cTn>
+                                        <p:tgtEl>
+                                          <p:spTgt spid="13"/>
+                                        </p:tgtEl>
+                                        <p:attrNameLst>
+                                          <p:attrName>style.visibility</p:attrName>
+                                        </p:attrNameLst>
+                                      </p:cBhvr>
+                                      <p:to>
+                                        <p:strVal val="visible"/>
+                                      </p:to>
+                                    </p:set>
+                                    <p:animEffect transition="in" filter="fade">
+                                      <p:cBhvr>
+                                        <p:cTn id="45" dur="500"/>
+                                        <p:tgtEl>
+                                          <p:spTgt spid="13"/>
+                                        </p:tgtEl>
+                                      </p:cBhvr>
+                                    </p:animEffect>
+                                  </p:childTnLst>
+                                </p:cTn>
+                              </p:par>
+                            </p:childTnLst>
+                          </p:cTn>
+                        </p:par>
+                        <p:par>
+                          <p:cTn id="46" fill="hold">
+                            <p:stCondLst>
+                              <p:cond delay="0"/>
+                            </p:stCondLst>
+                            <p:childTnLst>
+                              <p:par>
+                                <p:cTn id="47" presetID="10" presetClass="entr" presetSubtype="0" fill="hold" grpId="0" nodeType="withEffect">
+                                  <p:stCondLst>
+                                    <p:cond delay="0"/>
+                                  </p:stCondLst>
+                                  <p:childTnLst>
+                                    <p:set>
+                                      <p:cBhvr>
+                                        <p:cTn id="48" dur="1" fill="hold">
+                                          <p:stCondLst>
+                                            <p:cond delay="0"/>
+                                          </p:stCondLst>
+                                        </p:cTn>
+                                        <p:tgtEl>
+                                          <p:spTgt spid="14"/>
+                                        </p:tgtEl>
+                                        <p:attrNameLst>
+                                          <p:attrName>style.visibility</p:attrName>
+                                        </p:attrNameLst>
+                                      </p:cBhvr>
+                                      <p:to>
+                                        <p:strVal val="visible"/>
+                                      </p:to>
+                                    </p:set>
+                                    <p:animEffect transition="in" filter="fade">
+                                      <p:cBhvr>
+                                        <p:cTn id="49" dur="500"/>
+                                        <p:tgtEl>
+                                          <p:spTgt spid="14"/>
+                                        </p:tgtEl>
+                                      </p:cBhvr>
+                                    </p:animEffect>
+                                  </p:childTnLst>
+                                </p:cTn>
+                              </p:par>
+                            </p:childTnLst>
+                          </p:cTn>
+                        </p:par>
+                        <p:par>
+                          <p:cTn id="50" fill="hold">
+                            <p:stCondLst>
+                              <p:cond delay="0"/>
+                            </p:stCondLst>
+                            <p:childTnLst>
+                              <p:par>
+                                <p:cTn id="51" presetID="10" presetClass="entr" presetSubtype="0" fill="hold" grpId="0" nodeType="withEffect">
+                                  <p:stCondLst>
+                                    <p:cond delay="0"/>
+                                  </p:stCondLst>
+                                  <p:childTnLst>
+                                    <p:set>
+                                      <p:cBhvr>
+                                        <p:cTn id="52" dur="1" fill="hold">
+                                          <p:stCondLst>
+                                            <p:cond delay="0"/>
+                                          </p:stCondLst>
+                                        </p:cTn>
+                                        <p:tgtEl>
+                                          <p:spTgt spid="16"/>
+                                        </p:tgtEl>
+                                        <p:attrNameLst>
+                                          <p:attrName>style.visibility</p:attrName>
+                                        </p:attrNameLst>
+                                      </p:cBhvr>
+                                      <p:to>
+                                        <p:strVal val="visible"/>
+                                      </p:to>
+                                    </p:set>
+                                    <p:animEffect transition="in" filter="fade">
+                                      <p:cBhvr>
+                                        <p:cTn id="53" dur="500"/>
+                                        <p:tgtEl>
+                                          <p:spTgt spid="16"/>
+                                        </p:tgtEl>
+                                      </p:cBhvr>
+                                    </p:animEffect>
+                                  </p:childTnLst>
+                                </p:cTn>
+                              </p:par>
+                            </p:childTnLst>
+                          </p:cTn>
+                        </p:par>
+                        <p:par>
+                          <p:cTn id="54" fill="hold">
+                            <p:stCondLst>
+                              <p:cond delay="0"/>
+                            </p:stCondLst>
+                            <p:childTnLst>
+                              <p:par>
+                                <p:cTn id="55" presetID="10" presetClass="entr" presetSubtype="0" fill="hold" grpId="0" nodeType="withEffect">
+                                  <p:stCondLst>
+                                    <p:cond delay="0"/>
+                                  </p:stCondLst>
+                                  <p:childTnLst>
+                                    <p:set>
+                                      <p:cBhvr>
+                                        <p:cTn id="56" dur="1" fill="hold">
+                                          <p:stCondLst>
+                                            <p:cond delay="0"/>
+                                          </p:stCondLst>
+                                        </p:cTn>
+                                        <p:tgtEl>
+                                          <p:spTgt spid="17"/>
+                                        </p:tgtEl>
+                                        <p:attrNameLst>
+                                          <p:attrName>style.visibility</p:attrName>
+                                        </p:attrNameLst>
+                                      </p:cBhvr>
+                                      <p:to>
+                                        <p:strVal val="visible"/>
+                                      </p:to>
+                                    </p:set>
+                                    <p:animEffect transition="in" filter="fade">
+                                      <p:cBhvr>
+                                        <p:cTn id="57" dur="500"/>
+                                        <p:tgtEl>
+                                          <p:spTgt spid="17"/>
+                                        </p:tgtEl>
+                                      </p:cBhvr>
+                                    </p:animEffect>
+                                  </p:childTnLst>
+                                </p:cTn>
+                              </p:par>
+                            </p:childTnLst>
+                          </p:cTn>
+                        </p:par>
+                        <p:par>
+                          <p:cTn id="58" fill="hold">
+                            <p:stCondLst>
+                              <p:cond delay="0"/>
+                            </p:stCondLst>
+                            <p:childTnLst>
+                              <p:par>
+                                <p:cTn id="59" presetID="10" presetClass="entr" presetSubtype="0" fill="hold" grpId="0" nodeType="withEffect">
+                                  <p:stCondLst>
+                                    <p:cond delay="0"/>
+                                  </p:stCondLst>
+                                  <p:childTnLst>
+                                    <p:set>
+                                      <p:cBhvr>
+                                        <p:cTn id="60" dur="1" fill="hold">
+                                          <p:stCondLst>
+                                            <p:cond delay="0"/>
+                                          </p:stCondLst>
+                                        </p:cTn>
+                                        <p:tgtEl>
+                                          <p:spTgt spid="15"/>
+                                        </p:tgtEl>
+                                        <p:attrNameLst>
+                                          <p:attrName>style.visibility</p:attrName>
+                                        </p:attrNameLst>
+                                      </p:cBhvr>
+                                      <p:to>
+                                        <p:strVal val="visible"/>
+                                      </p:to>
+                                    </p:set>
+                                    <p:animEffect transition="in" filter="fade">
+                                      <p:cBhvr>
+                                        <p:cTn id="61" dur="500"/>
+                                        <p:tgtEl>
+                                          <p:spTgt spid="15"/>
+                                        </p:tgtEl>
+                                      </p:cBhvr>
+                                    </p:animEffect>
+                                  </p:childTnLst>
+                                </p:cTn>
+                              </p:par>
+                            </p:childTnLst>
+                          </p:cTn>
+                        </p:par>
+                      </p:childTnLst>
+                    </p:cTn>
+                  </p:par>
+                  <p:par>
+                    <p:cTn id="62" fill="hold">
+                      <p:stCondLst>
+                        <p:cond delay="indefinite"/>
+                      </p:stCondLst>
+                      <p:childTnLst>
+                        <p:par>
+                          <p:cTn id="63" fill="hold">
+                            <p:stCondLst>
+                              <p:cond delay="0"/>
+                            </p:stCondLst>
+                            <p:childTnLst>
+                              <p:par>
+                                <p:cTn id="64" presetID="10" presetClass="entr" presetSubtype="0" fill="hold" grpId="0" nodeType="clickEffect">
+                                  <p:stCondLst>
+                                    <p:cond delay="0"/>
+                                  </p:stCondLst>
+                                  <p:childTnLst>
+                                    <p:set>
+                                      <p:cBhvr>
+                                        <p:cTn id="65" dur="1" fill="hold">
+                                          <p:stCondLst>
+                                            <p:cond delay="0"/>
+                                          </p:stCondLst>
+                                        </p:cTn>
+                                        <p:tgtEl>
+                                          <p:spTgt spid="18"/>
+                                        </p:tgtEl>
+                                        <p:attrNameLst>
+                                          <p:attrName>style.visibility</p:attrName>
+                                        </p:attrNameLst>
+                                      </p:cBhvr>
+                                      <p:to>
+                                        <p:strVal val="visible"/>
+                                      </p:to>
+                                    </p:set>
+                                    <p:animEffect transition="in" filter="fade">
+                                      <p:cBhvr>
+                                        <p:cTn id="66" dur="500"/>
+                                        <p:tgtEl>
+                                          <p:spTgt spid="18"/>
+                                        </p:tgtEl>
+                                      </p:cBhvr>
+                                    </p:animEffect>
+                                  </p:childTnLst>
+                                </p:cTn>
+                              </p:par>
+                            </p:childTnLst>
+                          </p:cTn>
+                        </p:par>
+                        <p:par>
+                          <p:cTn id="67" fill="hold">
+                            <p:stCondLst>
+                              <p:cond delay="0"/>
+                            </p:stCondLst>
+                            <p:childTnLst>
+                              <p:par>
+                                <p:cTn id="68" presetID="10" presetClass="entr" presetSubtype="0" fill="hold" grpId="0" nodeType="withEffect">
+                                  <p:stCondLst>
+                                    <p:cond delay="0"/>
+                                  </p:stCondLst>
+                                  <p:childTnLst>
+                                    <p:set>
+                                      <p:cBhvr>
+                                        <p:cTn id="69" dur="1" fill="hold">
+                                          <p:stCondLst>
+                                            <p:cond delay="0"/>
+                                          </p:stCondLst>
+                                        </p:cTn>
+                                        <p:tgtEl>
+                                          <p:spTgt spid="19"/>
+                                        </p:tgtEl>
+                                        <p:attrNameLst>
+                                          <p:attrName>style.visibility</p:attrName>
+                                        </p:attrNameLst>
+                                      </p:cBhvr>
+                                      <p:to>
+                                        <p:strVal val="visible"/>
+                                      </p:to>
+                                    </p:set>
+                                    <p:animEffect transition="in" filter="fade">
+                                      <p:cBhvr>
+                                        <p:cTn id="70" dur="500"/>
+                                        <p:tgtEl>
+                                          <p:spTgt spid="19"/>
+                                        </p:tgtEl>
+                                      </p:cBhvr>
+                                    </p:animEffect>
+                                  </p:childTnLst>
+                                </p:cTn>
+                              </p:par>
+                            </p:childTnLst>
+                          </p:cTn>
+                        </p:par>
+                        <p:par>
+                          <p:cTn id="71" fill="hold">
+                            <p:stCondLst>
+                              <p:cond delay="0"/>
+                            </p:stCondLst>
+                            <p:childTnLst>
+                              <p:par>
+                                <p:cTn id="72" presetID="10" presetClass="entr" presetSubtype="0" fill="hold" grpId="0" nodeType="withEffect">
+                                  <p:stCondLst>
+                                    <p:cond delay="0"/>
+                                  </p:stCondLst>
+                                  <p:childTnLst>
+                                    <p:set>
+                                      <p:cBhvr>
+                                        <p:cTn id="73" dur="1" fill="hold">
+                                          <p:stCondLst>
+                                            <p:cond delay="0"/>
+                                          </p:stCondLst>
+                                        </p:cTn>
+                                        <p:tgtEl>
+                                          <p:spTgt spid="20"/>
+                                        </p:tgtEl>
+                                        <p:attrNameLst>
+                                          <p:attrName>style.visibility</p:attrName>
+                                        </p:attrNameLst>
+                                      </p:cBhvr>
+                                      <p:to>
+                                        <p:strVal val="visible"/>
+                                      </p:to>
+                                    </p:set>
+                                    <p:animEffect transition="in" filter="fade">
+                                      <p:cBhvr>
+                                        <p:cTn id="74" dur="500"/>
+                                        <p:tgtEl>
+                                          <p:spTgt spid="20"/>
+                                        </p:tgtEl>
+                                      </p:cBhvr>
+                                    </p:animEffect>
+                                  </p:childTnLst>
+                                </p:cTn>
+                              </p:par>
+                            </p:childTnLst>
+                          </p:cTn>
+                        </p:par>
+                        <p:par>
+                          <p:cTn id="75" fill="hold">
+                            <p:stCondLst>
+                              <p:cond delay="0"/>
+                            </p:stCondLst>
+                            <p:childTnLst>
+                              <p:par>
+                                <p:cTn id="76" presetID="10" presetClass="entr" presetSubtype="0" fill="hold" grpId="0" nodeType="withEffect">
+                                  <p:stCondLst>
+                                    <p:cond delay="0"/>
+                                  </p:stCondLst>
+                                  <p:childTnLst>
+                                    <p:set>
+                                      <p:cBhvr>
+                                        <p:cTn id="77" dur="1" fill="hold">
+                                          <p:stCondLst>
+                                            <p:cond delay="0"/>
+                                          </p:stCondLst>
+                                        </p:cTn>
+                                        <p:tgtEl>
+                                          <p:spTgt spid="22"/>
+                                        </p:tgtEl>
+                                        <p:attrNameLst>
+                                          <p:attrName>style.visibility</p:attrName>
+                                        </p:attrNameLst>
+                                      </p:cBhvr>
+                                      <p:to>
+                                        <p:strVal val="visible"/>
+                                      </p:to>
+                                    </p:set>
+                                    <p:animEffect transition="in" filter="fade">
+                                      <p:cBhvr>
+                                        <p:cTn id="78" dur="500"/>
+                                        <p:tgtEl>
+                                          <p:spTgt spid="22"/>
+                                        </p:tgtEl>
+                                      </p:cBhvr>
+                                    </p:animEffect>
+                                  </p:childTnLst>
+                                </p:cTn>
+                              </p:par>
+                            </p:childTnLst>
+                          </p:cTn>
+                        </p:par>
+                        <p:par>
+                          <p:cTn id="79" fill="hold">
+                            <p:stCondLst>
+                              <p:cond delay="0"/>
+                            </p:stCondLst>
+                            <p:childTnLst>
+                              <p:par>
+                                <p:cTn id="80" presetID="10" presetClass="entr" presetSubtype="0" fill="hold" grpId="0" nodeType="withEffect">
+                                  <p:stCondLst>
+                                    <p:cond delay="0"/>
+                                  </p:stCondLst>
+                                  <p:childTnLst>
+                                    <p:set>
+                                      <p:cBhvr>
+                                        <p:cTn id="81" dur="1" fill="hold">
+                                          <p:stCondLst>
+                                            <p:cond delay="0"/>
+                                          </p:stCondLst>
+                                        </p:cTn>
+                                        <p:tgtEl>
+                                          <p:spTgt spid="23"/>
+                                        </p:tgtEl>
+                                        <p:attrNameLst>
+                                          <p:attrName>style.visibility</p:attrName>
+                                        </p:attrNameLst>
+                                      </p:cBhvr>
+                                      <p:to>
+                                        <p:strVal val="visible"/>
+                                      </p:to>
+                                    </p:set>
+                                    <p:animEffect transition="in" filter="fade">
+                                      <p:cBhvr>
+                                        <p:cTn id="82" dur="500"/>
+                                        <p:tgtEl>
+                                          <p:spTgt spid="23"/>
+                                        </p:tgtEl>
+                                      </p:cBhvr>
+                                    </p:animEffect>
+                                  </p:childTnLst>
+                                </p:cTn>
+                              </p:par>
+                            </p:childTnLst>
+                          </p:cTn>
+                        </p:par>
+                        <p:par>
+                          <p:cTn id="83" fill="hold">
+                            <p:stCondLst>
+                              <p:cond delay="0"/>
+                            </p:stCondLst>
+                            <p:childTnLst>
+                              <p:par>
+                                <p:cTn id="84" presetID="10" presetClass="entr" presetSubtype="0" fill="hold" grpId="0" nodeType="withEffect">
+                                  <p:stCondLst>
+                                    <p:cond delay="0"/>
+                                  </p:stCondLst>
+                                  <p:childTnLst>
+                                    <p:set>
+                                      <p:cBhvr>
+                                        <p:cTn id="85" dur="1" fill="hold">
+                                          <p:stCondLst>
+                                            <p:cond delay="0"/>
+                                          </p:stCondLst>
+                                        </p:cTn>
+                                        <p:tgtEl>
+                                          <p:spTgt spid="21"/>
+                                        </p:tgtEl>
+                                        <p:attrNameLst>
+                                          <p:attrName>style.visibility</p:attrName>
+                                        </p:attrNameLst>
+                                      </p:cBhvr>
+                                      <p:to>
+                                        <p:strVal val="visible"/>
+                                      </p:to>
+                                    </p:set>
+                                    <p:animEffect transition="in" filter="fade">
+                                      <p:cBhvr>
+                                        <p:cTn id="86" dur="500"/>
+                                        <p:tgtEl>
+                                          <p:spTgt spid="21"/>
+                                        </p:tgtEl>
+                                      </p:cBhvr>
+                                    </p:animEffect>
+                                  </p:childTnLst>
+                                </p:cTn>
+                              </p:par>
+                            </p:childTnLst>
+                          </p:cTn>
+                        </p:par>
+                      </p:childTnLst>
+                    </p:cTn>
+                  </p:par>
+                  <p:par>
+                    <p:cTn id="87" fill="hold">
+                      <p:stCondLst>
+                        <p:cond delay="indefinite"/>
+                      </p:stCondLst>
+                      <p:childTnLst>
+                        <p:par>
+                          <p:cTn id="88" fill="hold">
+                            <p:stCondLst>
+                              <p:cond delay="0"/>
+                            </p:stCondLst>
+                            <p:childTnLst>
+                              <p:par>
+                                <p:cTn id="89" presetID="10" presetClass="entr" presetSubtype="0" fill="hold" grpId="0" nodeType="clickEffect">
+                                  <p:stCondLst>
+                                    <p:cond delay="0"/>
+                                  </p:stCondLst>
+                                  <p:childTnLst>
+                                    <p:set>
+                                      <p:cBhvr>
+                                        <p:cTn id="90" dur="1" fill="hold">
+                                          <p:stCondLst>
+                                            <p:cond delay="0"/>
+                                          </p:stCondLst>
+                                        </p:cTn>
+                                        <p:tgtEl>
+                                          <p:spTgt spid="24"/>
+                                        </p:tgtEl>
+                                        <p:attrNameLst>
+                                          <p:attrName>style.visibility</p:attrName>
+                                        </p:attrNameLst>
+                                      </p:cBhvr>
+                                      <p:to>
+                                        <p:strVal val="visible"/>
+                                      </p:to>
+                                    </p:set>
+                                    <p:animEffect transition="in" filter="fade">
+                                      <p:cBhvr>
+                                        <p:cTn id="91" dur="500"/>
+                                        <p:tgtEl>
+                                          <p:spTgt spid="24"/>
+                                        </p:tgtEl>
+                                      </p:cBhvr>
+                                    </p:animEffect>
+                                  </p:childTnLst>
+                                </p:cTn>
+                              </p:par>
+                            </p:childTnLst>
+                          </p:cTn>
+                        </p:par>
+                        <p:par>
+                          <p:cTn id="92" fill="hold">
+                            <p:stCondLst>
+                              <p:cond delay="0"/>
+                            </p:stCondLst>
+                            <p:childTnLst>
+                              <p:par>
+                                <p:cTn id="93" presetID="10" presetClass="entr" presetSubtype="0" fill="hold" grpId="0" nodeType="withEffect">
+                                  <p:stCondLst>
+                                    <p:cond delay="0"/>
+                                  </p:stCondLst>
+                                  <p:childTnLst>
+                                    <p:set>
+                                      <p:cBhvr>
+                                        <p:cTn id="94" dur="1" fill="hold">
+                                          <p:stCondLst>
+                                            <p:cond delay="0"/>
+                                          </p:stCondLst>
+                                        </p:cTn>
+                                        <p:tgtEl>
+                                          <p:spTgt spid="25"/>
+                                        </p:tgtEl>
+                                        <p:attrNameLst>
+                                          <p:attrName>style.visibility</p:attrName>
+                                        </p:attrNameLst>
+                                      </p:cBhvr>
+                                      <p:to>
+                                        <p:strVal val="visible"/>
+                                      </p:to>
+                                    </p:set>
+                                    <p:animEffect transition="in" filter="fade">
+                                      <p:cBhvr>
+                                        <p:cTn id="95" dur="500"/>
+                                        <p:tgtEl>
+                                          <p:spTgt spid="25"/>
+                                        </p:tgtEl>
+                                      </p:cBhvr>
+                                    </p:animEffect>
+                                  </p:childTnLst>
+                                </p:cTn>
+                              </p:par>
+                            </p:childTnLst>
+                          </p:cTn>
+                        </p:par>
+                        <p:par>
+                          <p:cTn id="96" fill="hold">
+                            <p:stCondLst>
+                              <p:cond delay="0"/>
+                            </p:stCondLst>
+                            <p:childTnLst>
+                              <p:par>
+                                <p:cTn id="97" presetID="10" presetClass="entr" presetSubtype="0" fill="hold" grpId="0" nodeType="withEffect">
+                                  <p:stCondLst>
+                                    <p:cond delay="0"/>
+                                  </p:stCondLst>
+                                  <p:childTnLst>
+                                    <p:set>
+                                      <p:cBhvr>
+                                        <p:cTn id="98" dur="1" fill="hold">
+                                          <p:stCondLst>
+                                            <p:cond delay="0"/>
+                                          </p:stCondLst>
+                                        </p:cTn>
+                                        <p:tgtEl>
+                                          <p:spTgt spid="26"/>
+                                        </p:tgtEl>
+                                        <p:attrNameLst>
+                                          <p:attrName>style.visibility</p:attrName>
+                                        </p:attrNameLst>
+                                      </p:cBhvr>
+                                      <p:to>
+                                        <p:strVal val="visible"/>
+                                      </p:to>
+                                    </p:set>
+                                    <p:animEffect transition="in" filter="fade">
+                                      <p:cBhvr>
+                                        <p:cTn id="99" dur="500"/>
+                                        <p:tgtEl>
+                                          <p:spTgt spid="26"/>
+                                        </p:tgtEl>
+                                      </p:cBhvr>
+                                    </p:animEffect>
+                                  </p:childTnLst>
+                                </p:cTn>
+                              </p:par>
+                            </p:childTnLst>
+                          </p:cTn>
+                        </p:par>
+                        <p:par>
+                          <p:cTn id="100" fill="hold">
+                            <p:stCondLst>
+                              <p:cond delay="0"/>
+                            </p:stCondLst>
+                            <p:childTnLst>
+                              <p:par>
+                                <p:cTn id="101" presetID="10" presetClass="entr" presetSubtype="0" fill="hold" grpId="0" nodeType="withEffect">
+                                  <p:stCondLst>
+                                    <p:cond delay="0"/>
+                                  </p:stCondLst>
+                                  <p:childTnLst>
+                                    <p:set>
+                                      <p:cBhvr>
+                                        <p:cTn id="102" dur="1" fill="hold">
+                                          <p:stCondLst>
+                                            <p:cond delay="0"/>
+                                          </p:stCondLst>
+                                        </p:cTn>
+                                        <p:tgtEl>
+                                          <p:spTgt spid="28"/>
+                                        </p:tgtEl>
+                                        <p:attrNameLst>
+                                          <p:attrName>style.visibility</p:attrName>
+                                        </p:attrNameLst>
+                                      </p:cBhvr>
+                                      <p:to>
+                                        <p:strVal val="visible"/>
+                                      </p:to>
+                                    </p:set>
+                                    <p:animEffect transition="in" filter="fade">
+                                      <p:cBhvr>
+                                        <p:cTn id="103" dur="500"/>
+                                        <p:tgtEl>
+                                          <p:spTgt spid="28"/>
+                                        </p:tgtEl>
+                                      </p:cBhvr>
+                                    </p:animEffect>
+                                  </p:childTnLst>
+                                </p:cTn>
+                              </p:par>
+                            </p:childTnLst>
+                          </p:cTn>
+                        </p:par>
+                        <p:par>
+                          <p:cTn id="104" fill="hold">
+                            <p:stCondLst>
+                              <p:cond delay="0"/>
+                            </p:stCondLst>
+                            <p:childTnLst>
+                              <p:par>
+                                <p:cTn id="105" presetID="10" presetClass="entr" presetSubtype="0" fill="hold" grpId="0" nodeType="withEffect">
+                                  <p:stCondLst>
+                                    <p:cond delay="0"/>
+                                  </p:stCondLst>
+                                  <p:childTnLst>
+                                    <p:set>
+                                      <p:cBhvr>
+                                        <p:cTn id="106" dur="1" fill="hold">
+                                          <p:stCondLst>
+                                            <p:cond delay="0"/>
+                                          </p:stCondLst>
+                                        </p:cTn>
+                                        <p:tgtEl>
+                                          <p:spTgt spid="29"/>
+                                        </p:tgtEl>
+                                        <p:attrNameLst>
+                                          <p:attrName>style.visibility</p:attrName>
+                                        </p:attrNameLst>
+                                      </p:cBhvr>
+                                      <p:to>
+                                        <p:strVal val="visible"/>
+                                      </p:to>
+                                    </p:set>
+                                    <p:animEffect transition="in" filter="fade">
+                                      <p:cBhvr>
+                                        <p:cTn id="107" dur="500"/>
+                                        <p:tgtEl>
+                                          <p:spTgt spid="29"/>
+                                        </p:tgtEl>
+                                      </p:cBhvr>
+                                    </p:animEffect>
+                                  </p:childTnLst>
+                                </p:cTn>
+                              </p:par>
+                            </p:childTnLst>
+                          </p:cTn>
+                        </p:par>
+                        <p:par>
+                          <p:cTn id="108" fill="hold">
+                            <p:stCondLst>
+                              <p:cond delay="0"/>
+                            </p:stCondLst>
+                            <p:childTnLst>
+                              <p:par>
+                                <p:cTn id="109" presetID="10" presetClass="entr" presetSubtype="0" fill="hold" grpId="0" nodeType="withEffect">
+                                  <p:stCondLst>
+                                    <p:cond delay="0"/>
+                                  </p:stCondLst>
+                                  <p:childTnLst>
+                                    <p:set>
+                                      <p:cBhvr>
+                                        <p:cTn id="110" dur="1" fill="hold">
+                                          <p:stCondLst>
+                                            <p:cond delay="0"/>
+                                          </p:stCondLst>
+                                        </p:cTn>
+                                        <p:tgtEl>
+                                          <p:spTgt spid="27"/>
+                                        </p:tgtEl>
+                                        <p:attrNameLst>
+                                          <p:attrName>style.visibility</p:attrName>
+                                        </p:attrNameLst>
+                                      </p:cBhvr>
+                                      <p:to>
+                                        <p:strVal val="visible"/>
+                                      </p:to>
+                                    </p:set>
+                                    <p:animEffect transition="in" filter="fade">
+                                      <p:cBhvr>
+                                        <p:cTn id="111" dur="500"/>
+                                        <p:tgtEl>
+                                          <p:spTgt spid="27"/>
+                                        </p:tgtEl>
+                                      </p:cBhvr>
+                                    </p:animEffect>
+                                  </p:childTnLst>
+                                </p:cTn>
+                              </p:par>
+                            </p:childTnLst>
+                          </p:cTn>
+                        </p:par>
+                      </p:childTnLst>
+                    </p:cTn>
+                  </p:par>
+                </p:childTnLst>
+              </p:cTn>
+              <p:prevCondLst>
+                <p:cond evt="onPrev" delay="0">
+                  <p:tgtEl>
+                    <p:sldTgt/>
+                  </p:tgtEl>
+                </p:cond>
+              </p:prevCondLst>
+              <p:nextCondLst>
+                <p:cond evt="onNext" delay="0">
+                  <p:tgtEl>
+                    <p:sldTgt/>
+                  </p:tgtEl>
+                </p:cond>
+              </p:nextCondLst>
+            </p:seq>
+          </p:childTnLst>
+        </p:cTn>
+      </p:par>
+    </p:tnLst>
+    <p:bldLst>
+      <p:bldP spid="4" grpId="0"/>
+      <p:bldP spid="5" grpId="0"/>
+      <p:bldP spid="6" grpId="0"/>
+      <p:bldP spid="7" grpId="0"/>
+      <p:bldP spid="8" grpId="0"/>
+      <p:bldP spid="10" grpId="0"/>
+      <p:bldP spid="11" grpId="0"/>
+      <p:bldP spid="9" grpId="0"/>
+      <p:bldP spid="12" grpId="0"/>
+      <p:bldP spid="13" grpId="0"/>
+      <p:bldP spid="14" grpId="0"/>
+      <p:bldP spid="16" grpId="0"/>
+      <p:bldP spid="17" grpId="0"/>
+      <p:bldP spid="15" grpId="0"/>
+      <p:bldP spid="18" grpId="0"/>
+      <p:bldP spid="19" grpId="0"/>
+      <p:bldP spid="20" grpId="0"/>
+      <p:bldP spid="22" grpId="0"/>
+      <p:bldP spid="23" grpId="0"/>
+      <p:bldP spid="21" grpId="0"/>
+      <p:bldP spid="24" grpId="0"/>
+      <p:bldP spid="25" grpId="0"/>
+      <p:bldP spid="26" grpId="0"/>
+      <p:bldP spid="28" grpId="0"/>
+      <p:bldP spid="29" grpId="0"/>
+      <p:bldP spid="27" grpId="0"/>
+    </p:bldLst>
+  </p:timing>
 </p:sld>
 </file>
 
@@ -8270,7 +15910,7 @@
       </p:sp>
       <p:sp>
         <p:nvSpPr>
-          <p:cNvPr id="7" name="Text 5"/>
+          <p:cNvPr id="7" name="c1-1"/>
           <p:cNvSpPr txBox="1"/>
           <p:nvPr/>
         </p:nvSpPr>
@@ -8306,7 +15946,7 @@
       </p:sp>
       <p:sp>
         <p:nvSpPr>
-          <p:cNvPr id="8" name="Text 6"/>
+          <p:cNvPr id="8" name="c1-2"/>
           <p:cNvSpPr txBox="1"/>
           <p:nvPr/>
         </p:nvSpPr>
@@ -8342,7 +15982,7 @@
       </p:sp>
       <p:sp>
         <p:nvSpPr>
-          <p:cNvPr id="9" name="Shape 7"/>
+          <p:cNvPr id="9" name="c2-3bg"/>
           <p:cNvSpPr/>
           <p:nvPr/>
         </p:nvSpPr>
@@ -8364,7 +16004,7 @@
       </p:sp>
       <p:pic>
         <p:nvPicPr>
-          <p:cNvPr id="10" name="Image 0" descr="preencoded.png">    </p:cNvPr>
+          <p:cNvPr id="10" name="c2-3ic" descr="preencoded.png">    </p:cNvPr>
           <p:cNvPicPr>
             <a:picLocks noChangeAspect="1"/>
           </p:cNvPicPr>
@@ -8388,7 +16028,7 @@
       </p:pic>
       <p:sp>
         <p:nvSpPr>
-          <p:cNvPr id="11" name="Text 8"/>
+          <p:cNvPr id="11" name="c2-4"/>
           <p:cNvSpPr txBox="1"/>
           <p:nvPr/>
         </p:nvSpPr>
@@ -8424,7 +16064,7 @@
       </p:sp>
       <p:sp>
         <p:nvSpPr>
-          <p:cNvPr id="12" name="Shape 9"/>
+          <p:cNvPr id="12" name="c2-5bg"/>
           <p:cNvSpPr/>
           <p:nvPr/>
         </p:nvSpPr>
@@ -8446,7 +16086,7 @@
       </p:sp>
       <p:pic>
         <p:nvPicPr>
-          <p:cNvPr id="13" name="Image 1" descr="preencoded.png">    </p:cNvPr>
+          <p:cNvPr id="13" name="c2-5ic" descr="preencoded.png">    </p:cNvPr>
           <p:cNvPicPr>
             <a:picLocks noChangeAspect="1"/>
           </p:cNvPicPr>
@@ -8470,7 +16110,7 @@
       </p:pic>
       <p:sp>
         <p:nvSpPr>
-          <p:cNvPr id="14" name="Text 10"/>
+          <p:cNvPr id="14" name="c2-6"/>
           <p:cNvSpPr txBox="1"/>
           <p:nvPr/>
         </p:nvSpPr>
@@ -8554,6 +16194,416 @@
   <p:clrMapOvr>
     <a:masterClrMapping/>
   </p:clrMapOvr>
+  <p:timing>
+    <p:tnLst>
+      <p:par>
+        <p:cTn id="1" dur="indefinite" restart="never" nodeType="tmRoot">
+          <p:childTnLst>
+            <p:seq concurrent="1" nextAc="seek">
+              <p:cTn id="2" dur="indefinite" nodeType="mainSeq">
+                <p:childTnLst>
+                  <p:par>
+                    <p:cTn id="3" fill="hold">
+                      <p:stCondLst>
+                        <p:cond delay="indefinite"/>
+                      </p:stCondLst>
+                      <p:childTnLst>
+                        <p:par>
+                          <p:cTn id="4" fill="hold">
+                            <p:stCondLst>
+                              <p:cond delay="0"/>
+                            </p:stCondLst>
+                            <p:childTnLst>
+                              <p:par>
+                                <p:cTn id="5" presetID="10" presetClass="entr" presetSubtype="0" fill="hold" grpId="0" nodeType="clickEffect">
+                                  <p:stCondLst>
+                                    <p:cond delay="0"/>
+                                  </p:stCondLst>
+                                  <p:childTnLst>
+                                    <p:set>
+                                      <p:cBhvr>
+                                        <p:cTn id="6" dur="1" fill="hold">
+                                          <p:stCondLst>
+                                            <p:cond delay="0"/>
+                                          </p:stCondLst>
+                                        </p:cTn>
+                                        <p:tgtEl>
+                                          <p:spTgt spid="7"/>
+                                        </p:tgtEl>
+                                        <p:attrNameLst>
+                                          <p:attrName>style.visibility</p:attrName>
+                                        </p:attrNameLst>
+                                      </p:cBhvr>
+                                      <p:to>
+                                        <p:strVal val="visible"/>
+                                      </p:to>
+                                    </p:set>
+                                    <p:animEffect transition="in" filter="fade">
+                                      <p:cBhvr>
+                                        <p:cTn id="7" dur="500"/>
+                                        <p:tgtEl>
+                                          <p:spTgt spid="7"/>
+                                        </p:tgtEl>
+                                      </p:cBhvr>
+                                    </p:animEffect>
+                                  </p:childTnLst>
+                                </p:cTn>
+                              </p:par>
+                            </p:childTnLst>
+                          </p:cTn>
+                        </p:par>
+                        <p:par>
+                          <p:cTn id="8" fill="hold">
+                            <p:stCondLst>
+                              <p:cond delay="0"/>
+                            </p:stCondLst>
+                            <p:childTnLst>
+                              <p:par>
+                                <p:cTn id="9" presetID="10" presetClass="entr" presetSubtype="0" fill="hold" grpId="0" nodeType="withEffect">
+                                  <p:stCondLst>
+                                    <p:cond delay="0"/>
+                                  </p:stCondLst>
+                                  <p:childTnLst>
+                                    <p:set>
+                                      <p:cBhvr>
+                                        <p:cTn id="10" dur="1" fill="hold">
+                                          <p:stCondLst>
+                                            <p:cond delay="0"/>
+                                          </p:stCondLst>
+                                        </p:cTn>
+                                        <p:tgtEl>
+                                          <p:spTgt spid="8"/>
+                                        </p:tgtEl>
+                                        <p:attrNameLst>
+                                          <p:attrName>style.visibility</p:attrName>
+                                        </p:attrNameLst>
+                                      </p:cBhvr>
+                                      <p:to>
+                                        <p:strVal val="visible"/>
+                                      </p:to>
+                                    </p:set>
+                                    <p:animEffect transition="in" filter="fade">
+                                      <p:cBhvr>
+                                        <p:cTn id="11" dur="500"/>
+                                        <p:tgtEl>
+                                          <p:spTgt spid="8"/>
+                                        </p:tgtEl>
+                                      </p:cBhvr>
+                                    </p:animEffect>
+                                  </p:childTnLst>
+                                </p:cTn>
+                              </p:par>
+                            </p:childTnLst>
+                          </p:cTn>
+                        </p:par>
+                      </p:childTnLst>
+                    </p:cTn>
+                  </p:par>
+                  <p:par>
+                    <p:cTn id="12" fill="hold">
+                      <p:stCondLst>
+                        <p:cond delay="indefinite"/>
+                      </p:stCondLst>
+                      <p:childTnLst>
+                        <p:par>
+                          <p:cTn id="13" fill="hold">
+                            <p:stCondLst>
+                              <p:cond delay="0"/>
+                            </p:stCondLst>
+                            <p:childTnLst>
+                              <p:par>
+                                <p:cTn id="14" presetID="10" presetClass="entr" presetSubtype="0" fill="hold" grpId="0" nodeType="clickEffect">
+                                  <p:stCondLst>
+                                    <p:cond delay="0"/>
+                                  </p:stCondLst>
+                                  <p:childTnLst>
+                                    <p:set>
+                                      <p:cBhvr>
+                                        <p:cTn id="15" dur="1" fill="hold">
+                                          <p:stCondLst>
+                                            <p:cond delay="0"/>
+                                          </p:stCondLst>
+                                        </p:cTn>
+                                        <p:tgtEl>
+                                          <p:spTgt spid="9"/>
+                                        </p:tgtEl>
+                                        <p:attrNameLst>
+                                          <p:attrName>style.visibility</p:attrName>
+                                        </p:attrNameLst>
+                                      </p:cBhvr>
+                                      <p:to>
+                                        <p:strVal val="visible"/>
+                                      </p:to>
+                                    </p:set>
+                                    <p:animEffect transition="in" filter="fade">
+                                      <p:cBhvr>
+                                        <p:cTn id="16" dur="500"/>
+                                        <p:tgtEl>
+                                          <p:spTgt spid="9"/>
+                                        </p:tgtEl>
+                                      </p:cBhvr>
+                                    </p:animEffect>
+                                  </p:childTnLst>
+                                </p:cTn>
+                              </p:par>
+                            </p:childTnLst>
+                          </p:cTn>
+                        </p:par>
+                        <p:par>
+                          <p:cTn id="17" fill="hold">
+                            <p:stCondLst>
+                              <p:cond delay="0"/>
+                            </p:stCondLst>
+                            <p:childTnLst>
+                              <p:par>
+                                <p:cTn id="18" presetID="10" presetClass="entr" presetSubtype="0" fill="hold" grpId="0" nodeType="withEffect">
+                                  <p:stCondLst>
+                                    <p:cond delay="0"/>
+                                  </p:stCondLst>
+                                  <p:childTnLst>
+                                    <p:set>
+                                      <p:cBhvr>
+                                        <p:cTn id="19" dur="1" fill="hold">
+                                          <p:stCondLst>
+                                            <p:cond delay="0"/>
+                                          </p:stCondLst>
+                                        </p:cTn>
+                                        <p:tgtEl>
+                                          <p:spTgt spid="11"/>
+                                        </p:tgtEl>
+                                        <p:attrNameLst>
+                                          <p:attrName>style.visibility</p:attrName>
+                                        </p:attrNameLst>
+                                      </p:cBhvr>
+                                      <p:to>
+                                        <p:strVal val="visible"/>
+                                      </p:to>
+                                    </p:set>
+                                    <p:animEffect transition="in" filter="fade">
+                                      <p:cBhvr>
+                                        <p:cTn id="20" dur="500"/>
+                                        <p:tgtEl>
+                                          <p:spTgt spid="11"/>
+                                        </p:tgtEl>
+                                      </p:cBhvr>
+                                    </p:animEffect>
+                                  </p:childTnLst>
+                                </p:cTn>
+                              </p:par>
+                            </p:childTnLst>
+                          </p:cTn>
+                        </p:par>
+                        <p:par>
+                          <p:cTn id="21" fill="hold">
+                            <p:stCondLst>
+                              <p:cond delay="0"/>
+                            </p:stCondLst>
+                            <p:childTnLst>
+                              <p:par>
+                                <p:cTn id="22" presetID="10" presetClass="entr" presetSubtype="0" fill="hold" grpId="0" nodeType="withEffect">
+                                  <p:stCondLst>
+                                    <p:cond delay="0"/>
+                                  </p:stCondLst>
+                                  <p:childTnLst>
+                                    <p:set>
+                                      <p:cBhvr>
+                                        <p:cTn id="23" dur="1" fill="hold">
+                                          <p:stCondLst>
+                                            <p:cond delay="0"/>
+                                          </p:stCondLst>
+                                        </p:cTn>
+                                        <p:tgtEl>
+                                          <p:spTgt spid="12"/>
+                                        </p:tgtEl>
+                                        <p:attrNameLst>
+                                          <p:attrName>style.visibility</p:attrName>
+                                        </p:attrNameLst>
+                                      </p:cBhvr>
+                                      <p:to>
+                                        <p:strVal val="visible"/>
+                                      </p:to>
+                                    </p:set>
+                                    <p:animEffect transition="in" filter="fade">
+                                      <p:cBhvr>
+                                        <p:cTn id="24" dur="500"/>
+                                        <p:tgtEl>
+                                          <p:spTgt spid="12"/>
+                                        </p:tgtEl>
+                                      </p:cBhvr>
+                                    </p:animEffect>
+                                  </p:childTnLst>
+                                </p:cTn>
+                              </p:par>
+                            </p:childTnLst>
+                          </p:cTn>
+                        </p:par>
+                        <p:par>
+                          <p:cTn id="25" fill="hold">
+                            <p:stCondLst>
+                              <p:cond delay="0"/>
+                            </p:stCondLst>
+                            <p:childTnLst>
+                              <p:par>
+                                <p:cTn id="26" presetID="10" presetClass="entr" presetSubtype="0" fill="hold" grpId="0" nodeType="withEffect">
+                                  <p:stCondLst>
+                                    <p:cond delay="0"/>
+                                  </p:stCondLst>
+                                  <p:childTnLst>
+                                    <p:set>
+                                      <p:cBhvr>
+                                        <p:cTn id="27" dur="1" fill="hold">
+                                          <p:stCondLst>
+                                            <p:cond delay="0"/>
+                                          </p:stCondLst>
+                                        </p:cTn>
+                                        <p:tgtEl>
+                                          <p:spTgt spid="14"/>
+                                        </p:tgtEl>
+                                        <p:attrNameLst>
+                                          <p:attrName>style.visibility</p:attrName>
+                                        </p:attrNameLst>
+                                      </p:cBhvr>
+                                      <p:to>
+                                        <p:strVal val="visible"/>
+                                      </p:to>
+                                    </p:set>
+                                    <p:animEffect transition="in" filter="fade">
+                                      <p:cBhvr>
+                                        <p:cTn id="28" dur="500"/>
+                                        <p:tgtEl>
+                                          <p:spTgt spid="14"/>
+                                        </p:tgtEl>
+                                      </p:cBhvr>
+                                    </p:animEffect>
+                                  </p:childTnLst>
+                                </p:cTn>
+                              </p:par>
+                            </p:childTnLst>
+                          </p:cTn>
+                        </p:par>
+                        <p:par>
+                          <p:cTn id="29" fill="hold">
+                            <p:stCondLst>
+                              <p:cond delay="0"/>
+                            </p:stCondLst>
+                            <p:childTnLst>
+                              <p:par>
+                                <p:cTn id="30" presetID="10" presetClass="entr" presetSubtype="0" fill="hold" grpId="0" nodeType="withEffect">
+                                  <p:stCondLst>
+                                    <p:cond delay="0"/>
+                                  </p:stCondLst>
+                                  <p:childTnLst>
+                                    <p:set>
+                                      <p:cBhvr>
+                                        <p:cTn id="31" dur="1" fill="hold">
+                                          <p:stCondLst>
+                                            <p:cond delay="0"/>
+                                          </p:stCondLst>
+                                        </p:cTn>
+                                        <p:tgtEl>
+                                          <p:spTgt spid="10"/>
+                                        </p:tgtEl>
+                                        <p:attrNameLst>
+                                          <p:attrName>style.visibility</p:attrName>
+                                        </p:attrNameLst>
+                                      </p:cBhvr>
+                                      <p:to>
+                                        <p:strVal val="visible"/>
+                                      </p:to>
+                                    </p:set>
+                                    <p:animEffect transition="in" filter="fade">
+                                      <p:cBhvr>
+                                        <p:cTn id="32" dur="500"/>
+                                        <p:tgtEl>
+                                          <p:spTgt spid="10"/>
+                                        </p:tgtEl>
+                                      </p:cBhvr>
+                                    </p:animEffect>
+                                  </p:childTnLst>
+                                </p:cTn>
+                              </p:par>
+                            </p:childTnLst>
+                          </p:cTn>
+                        </p:par>
+                        <p:par>
+                          <p:cTn id="33" fill="hold">
+                            <p:stCondLst>
+                              <p:cond delay="0"/>
+                            </p:stCondLst>
+                            <p:childTnLst>
+                              <p:par>
+                                <p:cTn id="34" presetID="10" presetClass="entr" presetSubtype="0" fill="hold" grpId="0" nodeType="withEffect">
+                                  <p:stCondLst>
+                                    <p:cond delay="0"/>
+                                  </p:stCondLst>
+                                  <p:childTnLst>
+                                    <p:set>
+                                      <p:cBhvr>
+                                        <p:cTn id="35" dur="1" fill="hold">
+                                          <p:stCondLst>
+                                            <p:cond delay="0"/>
+                                          </p:stCondLst>
+                                        </p:cTn>
+                                        <p:tgtEl>
+                                          <p:spTgt spid="13"/>
+                                        </p:tgtEl>
+                                        <p:attrNameLst>
+                                          <p:attrName>style.visibility</p:attrName>
+                                        </p:attrNameLst>
+                                      </p:cBhvr>
+                                      <p:to>
+                                        <p:strVal val="visible"/>
+                                      </p:to>
+                                    </p:set>
+                                    <p:animEffect transition="in" filter="fade">
+                                      <p:cBhvr>
+                                        <p:cTn id="36" dur="500"/>
+                                        <p:tgtEl>
+                                          <p:spTgt spid="13"/>
+                                        </p:tgtEl>
+                                      </p:cBhvr>
+                                    </p:animEffect>
+                                  </p:childTnLst>
+                                </p:cTn>
+                              </p:par>
+                            </p:childTnLst>
+                          </p:cTn>
+                        </p:par>
+                      </p:childTnLst>
+                    </p:cTn>
+                  </p:par>
+                </p:childTnLst>
+              </p:cTn>
+              <p:prevCondLst>
+                <p:cond evt="onPrev" delay="0">
+                  <p:tgtEl>
+                    <p:sldTgt/>
+                  </p:tgtEl>
+                </p:cond>
+              </p:prevCondLst>
+              <p:nextCondLst>
+                <p:cond evt="onNext" delay="0">
+                  <p:tgtEl>
+                    <p:sldTgt/>
+                  </p:tgtEl>
+                </p:cond>
+              </p:nextCondLst>
+            </p:seq>
+          </p:childTnLst>
+        </p:cTn>
+      </p:par>
+    </p:tnLst>
+    <p:bldLst>
+      <p:bldP spid="7" grpId="0"/>
+      <p:bldP spid="8" grpId="0"/>
+      <p:bldP spid="9" grpId="0"/>
+      <p:bldP spid="11" grpId="0"/>
+      <p:bldP spid="12" grpId="0"/>
+      <p:bldP spid="14" grpId="0"/>
+      <p:bldP spid="10" grpId="0"/>
+      <p:bldP spid="13" grpId="0"/>
+    </p:bldLst>
+  </p:timing>
 </p:sld>
 </file>
 

--- a/Elevate-Vision-2027.pptx
+++ b/Elevate-Vision-2027.pptx
@@ -115,47 +115,47 @@
   <p:extLst>
     <p:ext uri="{521415D9-36F7-43E2-AB2F-B90AF26B5E84}">
       <p14:sectionLst xmlns:p14="http://schemas.microsoft.com/office/powerpoint/2010/main">
-        <p14:section name="Opening" id="{b1933991-12ed-8ec3-8137-8b40d45c997a}">
+        <p14:section name="Opening" id="{80ac147a-5d73-75dc-4b39-78e434a65c33}">
           <p14:sldIdLst>
             <p14:sldId id="256"/>
           </p14:sldIdLst>
         </p14:section>
-        <p14:section name="Vision" id="{45485ebd-ea18-a173-9d0e-214f3dc87c9a}">
+        <p14:section name="Vision" id="{4008b90c-02a6-32a7-41ef-a5902bbcd471}">
           <p14:sldIdLst>
             <p14:sldId id="257"/>
           </p14:sldIdLst>
         </p14:section>
-        <p14:section name="Metrics" id="{3a1733c3-3a1c-fdc1-81b1-4feea41fa72a}">
+        <p14:section name="Metrics" id="{f16d59d5-9f0f-894e-d214-f936b0af6e61}">
           <p14:sldIdLst>
             <p14:sldId id="258"/>
           </p14:sldIdLst>
         </p14:section>
-        <p14:section name="Market" id="{46739440-883c-6924-9c46-77b914be32c5}">
+        <p14:section name="Market" id="{b7827484-4ece-d663-8b0a-f3d64683df3f}">
           <p14:sldIdLst>
             <p14:sldId id="259"/>
           </p14:sldIdLst>
         </p14:section>
-        <p14:section name="Strategy" id="{04eeda06-1e4a-119b-261e-2842d0014de5}">
+        <p14:section name="Strategy" id="{8d0fca0e-ece9-2a54-ba19-3cc58708b472}">
           <p14:sldIdLst>
             <p14:sldId id="260"/>
           </p14:sldIdLst>
         </p14:section>
-        <p14:section name="Roadmap" id="{f9986d98-a67f-b78d-99a3-ddbe932d6b16}">
+        <p14:section name="Roadmap" id="{3b1981b7-124d-325d-4d4e-707db3637183}">
           <p14:sldIdLst>
             <p14:sldId id="261"/>
           </p14:sldIdLst>
         </p14:section>
-        <p14:section name="Results" id="{9c2b5db6-4075-3c4c-5eef-287d170ea51a}">
+        <p14:section name="Results" id="{d3b9cff6-6b1a-0288-ed0e-3bc9a41630ef}">
           <p14:sldIdLst>
             <p14:sldId id="262"/>
           </p14:sldIdLst>
         </p14:section>
-        <p14:section name="Next Steps" id="{0b0a23eb-0dbf-0625-6048-288309f2eadc}">
+        <p14:section name="Next Steps" id="{7e69a90b-2a2a-ae2f-435b-d62de7504904}">
           <p14:sldIdLst>
             <p14:sldId id="263"/>
           </p14:sldIdLst>
         </p14:section>
-        <p14:section name="Close" id="{d239fdc5-4093-6c46-ece3-d53949d2fb3b}">
+        <p14:section name="Close" id="{50b70c14-7085-6669-f84f-179728bc5b86}">
           <p14:sldIdLst>
             <p14:sldId id="264"/>
           </p14:sldIdLst>
@@ -2795,7 +2795,7 @@
                   <p:par>
                     <p:cTn id="3" fill="hold">
                       <p:stCondLst>
-                        <p:cond delay="indefinite"/>
+                        <p:cond delay="400"/>
                       </p:stCondLst>
                       <p:childTnLst>
                         <p:par>
@@ -2805,7 +2805,7 @@
                             </p:stCondLst>
                             <p:childTnLst>
                               <p:par>
-                                <p:cTn id="5" presetID="10" presetClass="entr" presetSubtype="0" fill="hold" grpId="0" nodeType="clickEffect">
+                                <p:cTn id="5" presetID="10" presetClass="entr" presetSubtype="0" fill="hold" grpId="0" nodeType="afterEffect">
                                   <p:stCondLst>
                                     <p:cond delay="0"/>
                                   </p:stCondLst>
@@ -2892,7 +2892,7 @@
                   <p:par>
                     <p:cTn id="12" fill="hold">
                       <p:stCondLst>
-                        <p:cond delay="indefinite"/>
+                        <p:cond delay="300"/>
                       </p:stCondLst>
                       <p:childTnLst>
                         <p:par>
@@ -2902,7 +2902,7 @@
                             </p:stCondLst>
                             <p:childTnLst>
                               <p:par>
-                                <p:cTn id="14" presetID="10" presetClass="entr" presetSubtype="0" fill="hold" grpId="0" nodeType="clickEffect">
+                                <p:cTn id="14" presetID="10" presetClass="entr" presetSubtype="0" fill="hold" grpId="0" nodeType="afterEffect">
                                   <p:stCondLst>
                                     <p:cond delay="0"/>
                                   </p:stCondLst>
@@ -3710,7 +3710,7 @@
                   <p:par>
                     <p:cTn id="3" fill="hold">
                       <p:stCondLst>
-                        <p:cond delay="indefinite"/>
+                        <p:cond delay="400"/>
                       </p:stCondLst>
                       <p:childTnLst>
                         <p:par>
@@ -3720,7 +3720,7 @@
                             </p:stCondLst>
                             <p:childTnLst>
                               <p:par>
-                                <p:cTn id="5" presetID="10" presetClass="entr" presetSubtype="0" fill="hold" grpId="0" nodeType="clickEffect">
+                                <p:cTn id="5" presetID="10" presetClass="entr" presetSubtype="0" fill="hold" grpId="0" nodeType="afterEffect">
                                   <p:stCondLst>
                                     <p:cond delay="0"/>
                                   </p:stCondLst>
@@ -3807,7 +3807,7 @@
                   <p:par>
                     <p:cTn id="12" fill="hold">
                       <p:stCondLst>
-                        <p:cond delay="indefinite"/>
+                        <p:cond delay="300"/>
                       </p:stCondLst>
                       <p:childTnLst>
                         <p:par>
@@ -3817,7 +3817,7 @@
                             </p:stCondLst>
                             <p:childTnLst>
                               <p:par>
-                                <p:cTn id="14" presetID="10" presetClass="entr" presetSubtype="0" fill="hold" grpId="0" nodeType="clickEffect">
+                                <p:cTn id="14" presetID="10" presetClass="entr" presetSubtype="0" fill="hold" grpId="0" nodeType="afterEffect">
                                   <p:stCondLst>
                                     <p:cond delay="0"/>
                                   </p:stCondLst>
@@ -4036,7 +4036,7 @@
                   <p:par>
                     <p:cTn id="33" fill="hold">
                       <p:stCondLst>
-                        <p:cond delay="indefinite"/>
+                        <p:cond delay="300"/>
                       </p:stCondLst>
                       <p:childTnLst>
                         <p:par>
@@ -4046,7 +4046,7 @@
                             </p:stCondLst>
                             <p:childTnLst>
                               <p:par>
-                                <p:cTn id="35" presetID="10" presetClass="entr" presetSubtype="0" fill="hold" grpId="0" nodeType="clickEffect">
+                                <p:cTn id="35" presetID="10" presetClass="entr" presetSubtype="0" fill="hold" grpId="0" nodeType="afterEffect">
                                   <p:stCondLst>
                                     <p:cond delay="0"/>
                                   </p:stCondLst>
@@ -4265,7 +4265,7 @@
                   <p:par>
                     <p:cTn id="54" fill="hold">
                       <p:stCondLst>
-                        <p:cond delay="indefinite"/>
+                        <p:cond delay="300"/>
                       </p:stCondLst>
                       <p:childTnLst>
                         <p:par>
@@ -4275,7 +4275,7 @@
                             </p:stCondLst>
                             <p:childTnLst>
                               <p:par>
-                                <p:cTn id="56" presetID="10" presetClass="entr" presetSubtype="0" fill="hold" grpId="0" nodeType="clickEffect">
+                                <p:cTn id="56" presetID="10" presetClass="entr" presetSubtype="0" fill="hold" grpId="0" nodeType="afterEffect">
                                   <p:stCondLst>
                                     <p:cond delay="0"/>
                                   </p:stCondLst>
@@ -5471,7 +5471,7 @@
                   <p:par>
                     <p:cTn id="3" fill="hold">
                       <p:stCondLst>
-                        <p:cond delay="indefinite"/>
+                        <p:cond delay="400"/>
                       </p:stCondLst>
                       <p:childTnLst>
                         <p:par>
@@ -5481,7 +5481,7 @@
                             </p:stCondLst>
                             <p:childTnLst>
                               <p:par>
-                                <p:cTn id="5" presetID="10" presetClass="entr" presetSubtype="0" fill="hold" grpId="0" nodeType="clickEffect">
+                                <p:cTn id="5" presetID="10" presetClass="entr" presetSubtype="0" fill="hold" grpId="0" nodeType="afterEffect">
                                   <p:stCondLst>
                                     <p:cond delay="0"/>
                                   </p:stCondLst>
@@ -5568,7 +5568,7 @@
                   <p:par>
                     <p:cTn id="12" fill="hold">
                       <p:stCondLst>
-                        <p:cond delay="indefinite"/>
+                        <p:cond delay="300"/>
                       </p:stCondLst>
                       <p:childTnLst>
                         <p:par>
@@ -5578,7 +5578,7 @@
                             </p:stCondLst>
                             <p:childTnLst>
                               <p:par>
-                                <p:cTn id="14" presetID="10" presetClass="entr" presetSubtype="0" fill="hold" grpId="0" nodeType="clickEffect">
+                                <p:cTn id="14" presetID="10" presetClass="entr" presetSubtype="0" fill="hold" grpId="0" nodeType="afterEffect">
                                   <p:stCondLst>
                                     <p:cond delay="0"/>
                                   </p:stCondLst>
@@ -5841,7 +5841,7 @@
                   <p:par>
                     <p:cTn id="37" fill="hold">
                       <p:stCondLst>
-                        <p:cond delay="indefinite"/>
+                        <p:cond delay="300"/>
                       </p:stCondLst>
                       <p:childTnLst>
                         <p:par>
@@ -5851,7 +5851,7 @@
                             </p:stCondLst>
                             <p:childTnLst>
                               <p:par>
-                                <p:cTn id="39" presetID="10" presetClass="entr" presetSubtype="0" fill="hold" grpId="0" nodeType="clickEffect">
+                                <p:cTn id="39" presetID="10" presetClass="entr" presetSubtype="0" fill="hold" grpId="0" nodeType="afterEffect">
                                   <p:stCondLst>
                                     <p:cond delay="0"/>
                                   </p:stCondLst>
@@ -6114,7 +6114,7 @@
                   <p:par>
                     <p:cTn id="62" fill="hold">
                       <p:stCondLst>
-                        <p:cond delay="indefinite"/>
+                        <p:cond delay="300"/>
                       </p:stCondLst>
                       <p:childTnLst>
                         <p:par>
@@ -6124,7 +6124,7 @@
                             </p:stCondLst>
                             <p:childTnLst>
                               <p:par>
-                                <p:cTn id="64" presetID="10" presetClass="entr" presetSubtype="0" fill="hold" grpId="0" nodeType="clickEffect">
+                                <p:cTn id="64" presetID="10" presetClass="entr" presetSubtype="0" fill="hold" grpId="0" nodeType="afterEffect">
                                   <p:stCondLst>
                                     <p:cond delay="0"/>
                                   </p:stCondLst>
@@ -6387,7 +6387,7 @@
                   <p:par>
                     <p:cTn id="87" fill="hold">
                       <p:stCondLst>
-                        <p:cond delay="indefinite"/>
+                        <p:cond delay="300"/>
                       </p:stCondLst>
                       <p:childTnLst>
                         <p:par>
@@ -6397,7 +6397,7 @@
                             </p:stCondLst>
                             <p:childTnLst>
                               <p:par>
-                                <p:cTn id="89" presetID="10" presetClass="entr" presetSubtype="0" fill="hold" grpId="0" nodeType="clickEffect">
+                                <p:cTn id="89" presetID="10" presetClass="entr" presetSubtype="0" fill="hold" grpId="0" nodeType="afterEffect">
                                   <p:stCondLst>
                                     <p:cond delay="0"/>
                                   </p:stCondLst>
@@ -7182,7 +7182,7 @@
                   <p:par>
                     <p:cTn id="3" fill="hold">
                       <p:stCondLst>
-                        <p:cond delay="indefinite"/>
+                        <p:cond delay="400"/>
                       </p:stCondLst>
                       <p:childTnLst>
                         <p:par>
@@ -7192,7 +7192,7 @@
                             </p:stCondLst>
                             <p:childTnLst>
                               <p:par>
-                                <p:cTn id="5" presetID="10" presetClass="entr" presetSubtype="0" fill="hold" grpId="0" nodeType="clickEffect">
+                                <p:cTn id="5" presetID="10" presetClass="entr" presetSubtype="0" fill="hold" grpId="0" nodeType="afterEffect">
                                   <p:stCondLst>
                                     <p:cond delay="0"/>
                                   </p:stCondLst>
@@ -7235,7 +7235,7 @@
                   <p:par>
                     <p:cTn id="8" fill="hold">
                       <p:stCondLst>
-                        <p:cond delay="indefinite"/>
+                        <p:cond delay="300"/>
                       </p:stCondLst>
                       <p:childTnLst>
                         <p:par>
@@ -7245,7 +7245,7 @@
                             </p:stCondLst>
                             <p:childTnLst>
                               <p:par>
-                                <p:cTn id="10" presetID="10" presetClass="entr" presetSubtype="0" fill="hold" grpId="0" nodeType="clickEffect">
+                                <p:cTn id="10" presetID="10" presetClass="entr" presetSubtype="0" fill="hold" grpId="0" nodeType="afterEffect">
                                   <p:stCondLst>
                                     <p:cond delay="0"/>
                                   </p:stCondLst>
@@ -7288,7 +7288,7 @@
                   <p:par>
                     <p:cTn id="13" fill="hold">
                       <p:stCondLst>
-                        <p:cond delay="indefinite"/>
+                        <p:cond delay="300"/>
                       </p:stCondLst>
                       <p:childTnLst>
                         <p:par>
@@ -7298,7 +7298,7 @@
                             </p:stCondLst>
                             <p:childTnLst>
                               <p:par>
-                                <p:cTn id="15" presetID="10" presetClass="entr" presetSubtype="0" fill="hold" grpId="0" nodeType="clickEffect">
+                                <p:cTn id="15" presetID="10" presetClass="entr" presetSubtype="0" fill="hold" grpId="0" nodeType="afterEffect">
                                   <p:stCondLst>
                                     <p:cond delay="0"/>
                                   </p:stCondLst>
@@ -8615,7 +8615,7 @@
                   <p:par>
                     <p:cTn id="3" fill="hold">
                       <p:stCondLst>
-                        <p:cond delay="indefinite"/>
+                        <p:cond delay="400"/>
                       </p:stCondLst>
                       <p:childTnLst>
                         <p:par>
@@ -8625,7 +8625,7 @@
                             </p:stCondLst>
                             <p:childTnLst>
                               <p:par>
-                                <p:cTn id="5" presetID="10" presetClass="entr" presetSubtype="0" fill="hold" grpId="0" nodeType="clickEffect">
+                                <p:cTn id="5" presetID="10" presetClass="entr" presetSubtype="0" fill="hold" grpId="0" nodeType="afterEffect">
                                   <p:stCondLst>
                                     <p:cond delay="0"/>
                                   </p:stCondLst>
@@ -8712,7 +8712,7 @@
                   <p:par>
                     <p:cTn id="12" fill="hold">
                       <p:stCondLst>
-                        <p:cond delay="indefinite"/>
+                        <p:cond delay="300"/>
                       </p:stCondLst>
                       <p:childTnLst>
                         <p:par>
@@ -8722,7 +8722,7 @@
                             </p:stCondLst>
                             <p:childTnLst>
                               <p:par>
-                                <p:cTn id="14" presetID="10" presetClass="entr" presetSubtype="0" fill="hold" grpId="0" nodeType="clickEffect">
+                                <p:cTn id="14" presetID="10" presetClass="entr" presetSubtype="0" fill="hold" grpId="0" nodeType="afterEffect">
                                   <p:stCondLst>
                                     <p:cond delay="0"/>
                                   </p:stCondLst>
@@ -9161,7 +9161,7 @@
                   <p:par>
                     <p:cTn id="53" fill="hold">
                       <p:stCondLst>
-                        <p:cond delay="indefinite"/>
+                        <p:cond delay="300"/>
                       </p:stCondLst>
                       <p:childTnLst>
                         <p:par>
@@ -9171,7 +9171,7 @@
                             </p:stCondLst>
                             <p:childTnLst>
                               <p:par>
-                                <p:cTn id="55" presetID="10" presetClass="entr" presetSubtype="0" fill="hold" grpId="0" nodeType="clickEffect">
+                                <p:cTn id="55" presetID="10" presetClass="entr" presetSubtype="0" fill="hold" grpId="0" nodeType="afterEffect">
                                   <p:stCondLst>
                                     <p:cond delay="0"/>
                                   </p:stCondLst>
@@ -10765,7 +10765,7 @@
                   <p:par>
                     <p:cTn id="3" fill="hold">
                       <p:stCondLst>
-                        <p:cond delay="indefinite"/>
+                        <p:cond delay="400"/>
                       </p:stCondLst>
                       <p:childTnLst>
                         <p:par>
@@ -10775,7 +10775,7 @@
                             </p:stCondLst>
                             <p:childTnLst>
                               <p:par>
-                                <p:cTn id="5" presetID="10" presetClass="entr" presetSubtype="0" fill="hold" grpId="0" nodeType="clickEffect">
+                                <p:cTn id="5" presetID="10" presetClass="entr" presetSubtype="0" fill="hold" grpId="0" nodeType="afterEffect">
                                   <p:stCondLst>
                                     <p:cond delay="0"/>
                                   </p:stCondLst>
@@ -10862,7 +10862,7 @@
                   <p:par>
                     <p:cTn id="12" fill="hold">
                       <p:stCondLst>
-                        <p:cond delay="indefinite"/>
+                        <p:cond delay="300"/>
                       </p:stCondLst>
                       <p:childTnLst>
                         <p:par>
@@ -10872,7 +10872,7 @@
                             </p:stCondLst>
                             <p:childTnLst>
                               <p:par>
-                                <p:cTn id="14" presetID="10" presetClass="entr" presetSubtype="0" fill="hold" grpId="0" nodeType="clickEffect">
+                                <p:cTn id="14" presetID="10" presetClass="entr" presetSubtype="0" fill="hold" grpId="0" nodeType="afterEffect">
                                   <p:stCondLst>
                                     <p:cond delay="0"/>
                                   </p:stCondLst>
@@ -11179,7 +11179,7 @@
                   <p:par>
                     <p:cTn id="41" fill="hold">
                       <p:stCondLst>
-                        <p:cond delay="indefinite"/>
+                        <p:cond delay="300"/>
                       </p:stCondLst>
                       <p:childTnLst>
                         <p:par>
@@ -11189,7 +11189,7 @@
                             </p:stCondLst>
                             <p:childTnLst>
                               <p:par>
-                                <p:cTn id="43" presetID="10" presetClass="entr" presetSubtype="0" fill="hold" grpId="0" nodeType="clickEffect">
+                                <p:cTn id="43" presetID="10" presetClass="entr" presetSubtype="0" fill="hold" grpId="0" nodeType="afterEffect">
                                   <p:stCondLst>
                                     <p:cond delay="0"/>
                                   </p:stCondLst>
@@ -11496,7 +11496,7 @@
                   <p:par>
                     <p:cTn id="70" fill="hold">
                       <p:stCondLst>
-                        <p:cond delay="indefinite"/>
+                        <p:cond delay="300"/>
                       </p:stCondLst>
                       <p:childTnLst>
                         <p:par>
@@ -11506,7 +11506,7 @@
                             </p:stCondLst>
                             <p:childTnLst>
                               <p:par>
-                                <p:cTn id="72" presetID="10" presetClass="entr" presetSubtype="0" fill="hold" grpId="0" nodeType="clickEffect">
+                                <p:cTn id="72" presetID="10" presetClass="entr" presetSubtype="0" fill="hold" grpId="0" nodeType="afterEffect">
                                   <p:stCondLst>
                                     <p:cond delay="0"/>
                                   </p:stCondLst>
@@ -11813,7 +11813,7 @@
                   <p:par>
                     <p:cTn id="99" fill="hold">
                       <p:stCondLst>
-                        <p:cond delay="indefinite"/>
+                        <p:cond delay="300"/>
                       </p:stCondLst>
                       <p:childTnLst>
                         <p:par>
@@ -11823,7 +11823,7 @@
                             </p:stCondLst>
                             <p:childTnLst>
                               <p:par>
-                                <p:cTn id="101" presetID="10" presetClass="entr" presetSubtype="0" fill="hold" grpId="0" nodeType="clickEffect">
+                                <p:cTn id="101" presetID="10" presetClass="entr" presetSubtype="0" fill="hold" grpId="0" nodeType="afterEffect">
                                   <p:stCondLst>
                                     <p:cond delay="0"/>
                                   </p:stCondLst>
@@ -12755,7 +12755,7 @@
                   <p:par>
                     <p:cTn id="3" fill="hold">
                       <p:stCondLst>
-                        <p:cond delay="indefinite"/>
+                        <p:cond delay="400"/>
                       </p:stCondLst>
                       <p:childTnLst>
                         <p:par>
@@ -12765,7 +12765,7 @@
                             </p:stCondLst>
                             <p:childTnLst>
                               <p:par>
-                                <p:cTn id="5" presetID="10" presetClass="entr" presetSubtype="0" fill="hold" grpId="0" nodeType="clickEffect">
+                                <p:cTn id="5" presetID="10" presetClass="entr" presetSubtype="0" fill="hold" grpId="0" nodeType="afterEffect">
                                   <p:stCondLst>
                                     <p:cond delay="0"/>
                                   </p:stCondLst>
@@ -12808,7 +12808,7 @@
                   <p:par>
                     <p:cTn id="8" fill="hold">
                       <p:stCondLst>
-                        <p:cond delay="indefinite"/>
+                        <p:cond delay="300"/>
                       </p:stCondLst>
                       <p:childTnLst>
                         <p:par>
@@ -12818,7 +12818,7 @@
                             </p:stCondLst>
                             <p:childTnLst>
                               <p:par>
-                                <p:cTn id="10" presetID="10" presetClass="entr" presetSubtype="0" fill="hold" grpId="0" nodeType="clickEffect">
+                                <p:cTn id="10" presetID="10" presetClass="entr" presetSubtype="0" fill="hold" grpId="0" nodeType="afterEffect">
                                   <p:stCondLst>
                                     <p:cond delay="0"/>
                                   </p:stCondLst>
@@ -12861,7 +12861,7 @@
                   <p:par>
                     <p:cTn id="13" fill="hold">
                       <p:stCondLst>
-                        <p:cond delay="indefinite"/>
+                        <p:cond delay="300"/>
                       </p:stCondLst>
                       <p:childTnLst>
                         <p:par>
@@ -12871,7 +12871,7 @@
                             </p:stCondLst>
                             <p:childTnLst>
                               <p:par>
-                                <p:cTn id="15" presetID="10" presetClass="entr" presetSubtype="0" fill="hold" grpId="0" nodeType="clickEffect">
+                                <p:cTn id="15" presetID="10" presetClass="entr" presetSubtype="0" fill="hold" grpId="0" nodeType="afterEffect">
                                   <p:stCondLst>
                                     <p:cond delay="0"/>
                                   </p:stCondLst>
@@ -14517,7 +14517,7 @@
                   <p:par>
                     <p:cTn id="3" fill="hold">
                       <p:stCondLst>
-                        <p:cond delay="indefinite"/>
+                        <p:cond delay="400"/>
                       </p:stCondLst>
                       <p:childTnLst>
                         <p:par>
@@ -14527,7 +14527,7 @@
                             </p:stCondLst>
                             <p:childTnLst>
                               <p:par>
-                                <p:cTn id="5" presetID="10" presetClass="entr" presetSubtype="0" fill="hold" grpId="0" nodeType="clickEffect">
+                                <p:cTn id="5" presetID="10" presetClass="entr" presetSubtype="0" fill="hold" grpId="0" nodeType="afterEffect">
                                   <p:stCondLst>
                                     <p:cond delay="0"/>
                                   </p:stCondLst>
@@ -14614,7 +14614,7 @@
                   <p:par>
                     <p:cTn id="12" fill="hold">
                       <p:stCondLst>
-                        <p:cond delay="indefinite"/>
+                        <p:cond delay="300"/>
                       </p:stCondLst>
                       <p:childTnLst>
                         <p:par>
@@ -14624,7 +14624,7 @@
                             </p:stCondLst>
                             <p:childTnLst>
                               <p:par>
-                                <p:cTn id="14" presetID="10" presetClass="entr" presetSubtype="0" fill="hold" grpId="0" nodeType="clickEffect">
+                                <p:cTn id="14" presetID="10" presetClass="entr" presetSubtype="0" fill="hold" grpId="0" nodeType="afterEffect">
                                   <p:stCondLst>
                                     <p:cond delay="0"/>
                                   </p:stCondLst>
@@ -14887,7 +14887,7 @@
                   <p:par>
                     <p:cTn id="37" fill="hold">
                       <p:stCondLst>
-                        <p:cond delay="indefinite"/>
+                        <p:cond delay="300"/>
                       </p:stCondLst>
                       <p:childTnLst>
                         <p:par>
@@ -14897,7 +14897,7 @@
                             </p:stCondLst>
                             <p:childTnLst>
                               <p:par>
-                                <p:cTn id="39" presetID="10" presetClass="entr" presetSubtype="0" fill="hold" grpId="0" nodeType="clickEffect">
+                                <p:cTn id="39" presetID="10" presetClass="entr" presetSubtype="0" fill="hold" grpId="0" nodeType="afterEffect">
                                   <p:stCondLst>
                                     <p:cond delay="0"/>
                                   </p:stCondLst>
@@ -15160,7 +15160,7 @@
                   <p:par>
                     <p:cTn id="62" fill="hold">
                       <p:stCondLst>
-                        <p:cond delay="indefinite"/>
+                        <p:cond delay="300"/>
                       </p:stCondLst>
                       <p:childTnLst>
                         <p:par>
@@ -15170,7 +15170,7 @@
                             </p:stCondLst>
                             <p:childTnLst>
                               <p:par>
-                                <p:cTn id="64" presetID="10" presetClass="entr" presetSubtype="0" fill="hold" grpId="0" nodeType="clickEffect">
+                                <p:cTn id="64" presetID="10" presetClass="entr" presetSubtype="0" fill="hold" grpId="0" nodeType="afterEffect">
                                   <p:stCondLst>
                                     <p:cond delay="0"/>
                                   </p:stCondLst>
@@ -15433,7 +15433,7 @@
                   <p:par>
                     <p:cTn id="87" fill="hold">
                       <p:stCondLst>
-                        <p:cond delay="indefinite"/>
+                        <p:cond delay="300"/>
                       </p:stCondLst>
                       <p:childTnLst>
                         <p:par>
@@ -15443,7 +15443,7 @@
                             </p:stCondLst>
                             <p:childTnLst>
                               <p:par>
-                                <p:cTn id="89" presetID="10" presetClass="entr" presetSubtype="0" fill="hold" grpId="0" nodeType="clickEffect">
+                                <p:cTn id="89" presetID="10" presetClass="entr" presetSubtype="0" fill="hold" grpId="0" nodeType="afterEffect">
                                   <p:stCondLst>
                                     <p:cond delay="0"/>
                                   </p:stCondLst>
@@ -16205,7 +16205,7 @@
                   <p:par>
                     <p:cTn id="3" fill="hold">
                       <p:stCondLst>
-                        <p:cond delay="indefinite"/>
+                        <p:cond delay="400"/>
                       </p:stCondLst>
                       <p:childTnLst>
                         <p:par>
@@ -16215,7 +16215,7 @@
                             </p:stCondLst>
                             <p:childTnLst>
                               <p:par>
-                                <p:cTn id="5" presetID="10" presetClass="entr" presetSubtype="0" fill="hold" grpId="0" nodeType="clickEffect">
+                                <p:cTn id="5" presetID="10" presetClass="entr" presetSubtype="0" fill="hold" grpId="0" nodeType="afterEffect">
                                   <p:stCondLst>
                                     <p:cond delay="0"/>
                                   </p:stCondLst>
@@ -16302,7 +16302,7 @@
                   <p:par>
                     <p:cTn id="12" fill="hold">
                       <p:stCondLst>
-                        <p:cond delay="indefinite"/>
+                        <p:cond delay="300"/>
                       </p:stCondLst>
                       <p:childTnLst>
                         <p:par>
@@ -16312,7 +16312,7 @@
                             </p:stCondLst>
                             <p:childTnLst>
                               <p:par>
-                                <p:cTn id="14" presetID="10" presetClass="entr" presetSubtype="0" fill="hold" grpId="0" nodeType="clickEffect">
+                                <p:cTn id="14" presetID="10" presetClass="entr" presetSubtype="0" fill="hold" grpId="0" nodeType="afterEffect">
                                   <p:stCondLst>
                                     <p:cond delay="0"/>
                                   </p:stCondLst>
